--- a/StockLink_Capstone_Presentation.pptx
+++ b/StockLink_Capstone_Presentation.pptx
@@ -3085,6 +3085,14 @@
 <file path=ppt/slides/slide1.xml><?xml version="1.0" encoding="utf-8"?>
 <p:sld xmlns:a="http://schemas.openxmlformats.org/drawingml/2006/main" xmlns:p="http://schemas.openxmlformats.org/presentationml/2006/main" xmlns:r="http://schemas.openxmlformats.org/officeDocument/2006/relationships">
   <p:cSld>
+    <p:bg>
+      <p:bgPr>
+        <a:solidFill>
+          <a:srgbClr val="1A1622"/>
+        </a:solidFill>
+        <a:effectLst/>
+      </p:bgPr>
+    </p:bg>
     <p:spTree>
       <p:nvGrpSpPr>
         <p:cNvPr id="1" name=""/>
@@ -3100,17 +3108,19 @@
         </p:nvSpPr>
         <p:spPr>
           <a:xfrm>
-            <a:off x="0" y="0"/>
-            <a:ext cx="12191695" cy="6858000"/>
+            <a:off x="731520" y="731520"/>
+            <a:ext cx="1371600" cy="73152"/>
           </a:xfrm>
           <a:prstGeom prst="rect">
             <a:avLst/>
           </a:prstGeom>
           <a:solidFill>
-            <a:srgbClr val="1A1622"/>
+            <a:srgbClr val="FFA062"/>
           </a:solidFill>
-          <a:ln>
-            <a:noFill/>
+          <a:ln w="12700">
+            <a:solidFill>
+              <a:srgbClr val="FFA062"/>
+            </a:solidFill>
           </a:ln>
         </p:spPr>
         <p:style>
@@ -3137,56 +3147,13 @@
       </p:sp>
       <p:sp>
         <p:nvSpPr>
-          <p:cNvPr id="3" name="Rectangle 2"/>
-          <p:cNvSpPr/>
+          <p:cNvPr id="3" name="TextBox 2"/>
+          <p:cNvSpPr txBox="1"/>
           <p:nvPr/>
         </p:nvSpPr>
         <p:spPr>
           <a:xfrm>
-            <a:off x="731520" y="731520"/>
-            <a:ext cx="1097280" cy="73152"/>
-          </a:xfrm>
-          <a:prstGeom prst="rect">
-            <a:avLst/>
-          </a:prstGeom>
-          <a:solidFill>
-            <a:srgbClr val="FFA062"/>
-          </a:solidFill>
-          <a:ln>
-            <a:noFill/>
-          </a:ln>
-        </p:spPr>
-        <p:style>
-          <a:lnRef idx="1">
-            <a:schemeClr val="accent1"/>
-          </a:lnRef>
-          <a:fillRef idx="3">
-            <a:schemeClr val="accent1"/>
-          </a:fillRef>
-          <a:effectRef idx="2">
-            <a:schemeClr val="accent1"/>
-          </a:effectRef>
-          <a:fontRef idx="minor">
-            <a:schemeClr val="lt1"/>
-          </a:fontRef>
-        </p:style>
-        <p:txBody>
-          <a:bodyPr rtlCol="0" anchor="ctr"/>
-          <a:lstStyle/>
-          <a:p>
-            <a:pPr algn="ctr"/>
-          </a:p>
-        </p:txBody>
-      </p:sp>
-      <p:sp>
-        <p:nvSpPr>
-          <p:cNvPr id="4" name="TextBox 3"/>
-          <p:cNvSpPr txBox="1"/>
-          <p:nvPr/>
-        </p:nvSpPr>
-        <p:spPr>
-          <a:xfrm>
-            <a:off x="731520" y="1005840"/>
+            <a:off x="731520" y="960120"/>
             <a:ext cx="10698480" cy="1280160"/>
           </a:xfrm>
           <a:prstGeom prst="rect">
@@ -3205,6 +3172,7 @@
                 <a:solidFill>
                   <a:srgbClr val="FFFFFF"/>
                 </a:solidFill>
+                <a:latin typeface="Arial"/>
               </a:defRPr>
             </a:pPr>
             <a:r>
@@ -3214,12 +3182,13 @@
           <a:p>
             <a:pPr>
               <a:spcBef>
-                <a:spcPts val="800"/>
+                <a:spcPts val="600"/>
               </a:spcBef>
               <a:defRPr sz="1800" b="1">
                 <a:solidFill>
                   <a:srgbClr val="FFA062"/>
                 </a:solidFill>
+                <a:latin typeface="Arial"/>
               </a:defRPr>
             </a:pPr>
             <a:r>
@@ -3230,14 +3199,14 @@
       </p:sp>
       <p:sp>
         <p:nvSpPr>
-          <p:cNvPr id="5" name="Rounded Rectangle 4"/>
+          <p:cNvPr id="4" name="Rounded Rectangle 3"/>
           <p:cNvSpPr/>
           <p:nvPr/>
         </p:nvSpPr>
         <p:spPr>
           <a:xfrm>
             <a:off x="731520" y="2468880"/>
-            <a:ext cx="5120640" cy="3840480"/>
+            <a:ext cx="5120640" cy="3931920"/>
           </a:xfrm>
           <a:prstGeom prst="roundRect">
             <a:avLst/>
@@ -3245,7 +3214,7 @@
           <a:solidFill>
             <a:srgbClr val="262030"/>
           </a:solidFill>
-          <a:ln>
+          <a:ln w="19050">
             <a:solidFill>
               <a:srgbClr val="413750"/>
             </a:solidFill>
@@ -3275,14 +3244,14 @@
       </p:sp>
       <p:sp>
         <p:nvSpPr>
-          <p:cNvPr id="6" name="TextBox 5"/>
+          <p:cNvPr id="5" name="TextBox 4"/>
           <p:cNvSpPr txBox="1"/>
           <p:nvPr/>
         </p:nvSpPr>
         <p:spPr>
           <a:xfrm>
-            <a:off x="1005840" y="2651760"/>
-            <a:ext cx="4572000" cy="3474720"/>
+            <a:off x="960120" y="2651760"/>
+            <a:ext cx="4663440" cy="3566160"/>
           </a:xfrm>
           <a:prstGeom prst="rect">
             <a:avLst/>
@@ -3297,138 +3266,147 @@
           <a:p>
             <a:pPr>
               <a:spcAft>
-                <a:spcPts val="1400"/>
+                <a:spcPts val="1200"/>
               </a:spcAft>
               <a:defRPr sz="1300" b="1">
                 <a:solidFill>
                   <a:srgbClr val="FFA062"/>
                 </a:solidFill>
-              </a:defRPr>
-            </a:pPr>
-            <a:r>
-              <a:t>PROJECT TEAM (4 MEMBERS)</a:t>
-            </a:r>
-          </a:p>
-          <a:p>
-            <a:pPr>
-              <a:defRPr sz="1400" b="1">
+                <a:latin typeface="Arial"/>
+              </a:defRPr>
+            </a:pPr>
+            <a:r>
+              <a:t>PROJECT TEAM &amp; ROLE ALLOCATION</a:t>
+            </a:r>
+          </a:p>
+          <a:p>
+            <a:pPr>
+              <a:defRPr sz="1300" b="1">
                 <a:solidFill>
                   <a:srgbClr val="FFFFFF"/>
                 </a:solidFill>
-              </a:defRPr>
-            </a:pPr>
-            <a:r>
-              <a:t>•  Praween Singh Rawat</a:t>
-            </a:r>
-          </a:p>
-          <a:p>
-            <a:pPr>
-              <a:spcAft>
-                <a:spcPts val="800"/>
-              </a:spcAft>
-              <a:defRPr sz="1100">
+                <a:latin typeface="Arial"/>
+              </a:defRPr>
+            </a:pPr>
+            <a:r>
+              <a:t>•  Praween Singh Rawat  (Frontend Lead)</a:t>
+            </a:r>
+          </a:p>
+          <a:p>
+            <a:pPr>
+              <a:spcAft>
+                <a:spcPts val="600"/>
+              </a:spcAft>
+              <a:defRPr sz="1050">
                 <a:solidFill>
                   <a:srgbClr val="B9AFC6"/>
                 </a:solidFill>
-              </a:defRPr>
-            </a:pPr>
-            <a:r>
-              <a:t>    Frontend Lead · UI/UX &amp; Dashboard Architecture</a:t>
-            </a:r>
-          </a:p>
-          <a:p>
-            <a:pPr>
-              <a:defRPr sz="1400" b="1">
+                <a:latin typeface="Arial"/>
+              </a:defRPr>
+            </a:pPr>
+            <a:r>
+              <a:t>    UI/UX, Dashboards &amp; Profile Modules</a:t>
+            </a:r>
+          </a:p>
+          <a:p>
+            <a:pPr>
+              <a:defRPr sz="1300" b="1">
                 <a:solidFill>
                   <a:srgbClr val="FFFFFF"/>
                 </a:solidFill>
-              </a:defRPr>
-            </a:pPr>
-            <a:r>
-              <a:t>•  Anvitha S</a:t>
-            </a:r>
-          </a:p>
-          <a:p>
-            <a:pPr>
-              <a:spcAft>
-                <a:spcPts val="800"/>
-              </a:spcAft>
-              <a:defRPr sz="1100">
+                <a:latin typeface="Arial"/>
+              </a:defRPr>
+            </a:pPr>
+            <a:r>
+              <a:t>•  Anvitha S  (Frontend Developer)</a:t>
+            </a:r>
+          </a:p>
+          <a:p>
+            <a:pPr>
+              <a:spcAft>
+                <a:spcPts val="600"/>
+              </a:spcAft>
+              <a:defRPr sz="1050">
                 <a:solidFill>
                   <a:srgbClr val="B9AFC6"/>
                 </a:solidFill>
-              </a:defRPr>
-            </a:pPr>
-            <a:r>
-              <a:t>    Frontend Developer · Auth, Onboarding &amp; State Logic</a:t>
-            </a:r>
-          </a:p>
-          <a:p>
-            <a:pPr>
-              <a:defRPr sz="1400" b="1">
+                <a:latin typeface="Arial"/>
+              </a:defRPr>
+            </a:pPr>
+            <a:r>
+              <a:t>    Auth, Onboarding Wizards &amp; State Logic</a:t>
+            </a:r>
+          </a:p>
+          <a:p>
+            <a:pPr>
+              <a:defRPr sz="1300" b="1">
                 <a:solidFill>
                   <a:srgbClr val="FFFFFF"/>
                 </a:solidFill>
-              </a:defRPr>
-            </a:pPr>
-            <a:r>
-              <a:t>•  Tanishq Mittal</a:t>
-            </a:r>
-          </a:p>
-          <a:p>
-            <a:pPr>
-              <a:spcAft>
-                <a:spcPts val="800"/>
-              </a:spcAft>
-              <a:defRPr sz="1100">
+                <a:latin typeface="Arial"/>
+              </a:defRPr>
+            </a:pPr>
+            <a:r>
+              <a:t>•  Tanishq Mittal  (Backend Lead)</a:t>
+            </a:r>
+          </a:p>
+          <a:p>
+            <a:pPr>
+              <a:spcAft>
+                <a:spcPts val="600"/>
+              </a:spcAft>
+              <a:defRPr sz="1050">
                 <a:solidFill>
                   <a:srgbClr val="B9AFC6"/>
                 </a:solidFill>
-              </a:defRPr>
-            </a:pPr>
-            <a:r>
-              <a:t>    Backend Lead · REST APIs, RBAC &amp; Data Models</a:t>
-            </a:r>
-          </a:p>
-          <a:p>
-            <a:pPr>
-              <a:defRPr sz="1400" b="1">
+                <a:latin typeface="Arial"/>
+              </a:defRPr>
+            </a:pPr>
+            <a:r>
+              <a:t>    REST APIs, RBAC Middleware &amp; Data Models</a:t>
+            </a:r>
+          </a:p>
+          <a:p>
+            <a:pPr>
+              <a:defRPr sz="1300" b="1">
                 <a:solidFill>
                   <a:srgbClr val="FFFFFF"/>
                 </a:solidFill>
-              </a:defRPr>
-            </a:pPr>
-            <a:r>
-              <a:t>•  Ashraj Singh Rana</a:t>
-            </a:r>
-          </a:p>
-          <a:p>
-            <a:pPr>
-              <a:spcAft>
-                <a:spcPts val="800"/>
-              </a:spcAft>
-              <a:defRPr sz="1100">
+                <a:latin typeface="Arial"/>
+              </a:defRPr>
+            </a:pPr>
+            <a:r>
+              <a:t>•  Ashraj Singh Rana  (Backend &amp; DevOps)</a:t>
+            </a:r>
+          </a:p>
+          <a:p>
+            <a:pPr>
+              <a:spcAft>
+                <a:spcPts val="600"/>
+              </a:spcAft>
+              <a:defRPr sz="1050">
                 <a:solidFill>
                   <a:srgbClr val="B9AFC6"/>
                 </a:solidFill>
-              </a:defRPr>
-            </a:pPr>
-            <a:r>
-              <a:t>    Backend &amp; DevOps · Aggregations &amp; Cloud Deployment</a:t>
-            </a:r>
-          </a:p>
-        </p:txBody>
-      </p:sp>
-      <p:sp>
-        <p:nvSpPr>
-          <p:cNvPr id="7" name="Rounded Rectangle 6"/>
+                <a:latin typeface="Arial"/>
+              </a:defRPr>
+            </a:pPr>
+            <a:r>
+              <a:t>    Live Aggregation Engines &amp; Cloud Deployments</a:t>
+            </a:r>
+          </a:p>
+        </p:txBody>
+      </p:sp>
+      <p:sp>
+        <p:nvSpPr>
+          <p:cNvPr id="6" name="Rounded Rectangle 5"/>
           <p:cNvSpPr/>
           <p:nvPr/>
         </p:nvSpPr>
         <p:spPr>
           <a:xfrm>
             <a:off x="6217920" y="2468880"/>
-            <a:ext cx="5212080" cy="3840480"/>
+            <a:ext cx="5212080" cy="3931920"/>
           </a:xfrm>
           <a:prstGeom prst="roundRect">
             <a:avLst/>
@@ -3436,7 +3414,7 @@
           <a:solidFill>
             <a:srgbClr val="262030"/>
           </a:solidFill>
-          <a:ln>
+          <a:ln w="19050">
             <a:solidFill>
               <a:srgbClr val="413750"/>
             </a:solidFill>
@@ -3466,14 +3444,14 @@
       </p:sp>
       <p:sp>
         <p:nvSpPr>
-          <p:cNvPr id="8" name="TextBox 7"/>
+          <p:cNvPr id="7" name="TextBox 6"/>
           <p:cNvSpPr txBox="1"/>
           <p:nvPr/>
         </p:nvSpPr>
         <p:spPr>
           <a:xfrm>
-            <a:off x="6492240" y="2651760"/>
-            <a:ext cx="4663440" cy="3474720"/>
+            <a:off x="6446520" y="2651760"/>
+            <a:ext cx="4754880" cy="3566160"/>
           </a:xfrm>
           <a:prstGeom prst="rect">
             <a:avLst/>
@@ -3488,12 +3466,13 @@
           <a:p>
             <a:pPr>
               <a:spcAft>
-                <a:spcPts val="1400"/>
+                <a:spcPts val="1200"/>
               </a:spcAft>
               <a:defRPr sz="1300" b="1">
                 <a:solidFill>
                   <a:srgbClr val="FFA062"/>
                 </a:solidFill>
+                <a:latin typeface="Arial"/>
               </a:defRPr>
             </a:pPr>
             <a:r>
@@ -3502,77 +3481,147 @@
           </a:p>
           <a:p>
             <a:pPr>
-              <a:spcAft>
-                <a:spcPts val="1000"/>
-              </a:spcAft>
-              <a:defRPr sz="1300" b="1">
-                <a:solidFill>
-                  <a:srgbClr val="D7D0E1"/>
-                </a:solidFill>
-              </a:defRPr>
-            </a:pPr>
-            <a:r>
-              <a:t>[01]  Project Overview &amp; Problem Statement  (2 Mins)</a:t>
-            </a:r>
-          </a:p>
-          <a:p>
-            <a:pPr>
-              <a:spcAft>
-                <a:spcPts val="1000"/>
-              </a:spcAft>
-              <a:defRPr sz="1300" b="1">
-                <a:solidFill>
-                  <a:srgbClr val="D7D0E1"/>
-                </a:solidFill>
-              </a:defRPr>
-            </a:pPr>
-            <a:r>
-              <a:t>[02]  Technologies Used &amp; Team Member Roles  (2 Mins)</a:t>
-            </a:r>
-          </a:p>
-          <a:p>
-            <a:pPr>
-              <a:spcAft>
-                <a:spcPts val="1000"/>
-              </a:spcAft>
-              <a:defRPr sz="1300" b="1">
-                <a:solidFill>
-                  <a:srgbClr val="D7D0E1"/>
-                </a:solidFill>
-              </a:defRPr>
-            </a:pPr>
-            <a:r>
-              <a:t>[03]  System Workflows, Architecture &amp; Features  (2 Mins)</a:t>
-            </a:r>
-          </a:p>
-          <a:p>
-            <a:pPr>
-              <a:spcAft>
-                <a:spcPts val="1000"/>
-              </a:spcAft>
-              <a:defRPr sz="1300" b="1">
-                <a:solidFill>
-                  <a:srgbClr val="D7D0E1"/>
-                </a:solidFill>
-              </a:defRPr>
-            </a:pPr>
-            <a:r>
-              <a:t>[04]  Advantages, Disadvantages &amp; Future Roadmap  (2 Mins)</a:t>
-            </a:r>
-          </a:p>
-          <a:p>
-            <a:pPr>
-              <a:spcAft>
-                <a:spcPts val="1000"/>
-              </a:spcAft>
-              <a:defRPr sz="1300" b="1">
-                <a:solidFill>
-                  <a:srgbClr val="D7D0E1"/>
-                </a:solidFill>
-              </a:defRPr>
-            </a:pPr>
-            <a:r>
-              <a:t>[05]  Live Project Hosting &amp; Key Learning Takeaways  (2 Mins)</a:t>
+              <a:defRPr sz="1250" b="1">
+                <a:solidFill>
+                  <a:srgbClr val="E1DAEB"/>
+                </a:solidFill>
+                <a:latin typeface="Arial"/>
+              </a:defRPr>
+            </a:pPr>
+            <a:r>
+              <a:t>[01]  Project Title, Domain &amp; Problem Statement</a:t>
+            </a:r>
+          </a:p>
+          <a:p>
+            <a:pPr>
+              <a:spcAft>
+                <a:spcPts val="600"/>
+              </a:spcAft>
+              <a:defRPr sz="1000">
+                <a:solidFill>
+                  <a:srgbClr val="B9AFC6"/>
+                </a:solidFill>
+                <a:latin typeface="Arial"/>
+              </a:defRPr>
+            </a:pPr>
+            <a:r>
+              <a:t>       2 Mins · Praween</a:t>
+            </a:r>
+          </a:p>
+          <a:p>
+            <a:pPr>
+              <a:defRPr sz="1250" b="1">
+                <a:solidFill>
+                  <a:srgbClr val="E1DAEB"/>
+                </a:solidFill>
+                <a:latin typeface="Arial"/>
+              </a:defRPr>
+            </a:pPr>
+            <a:r>
+              <a:t>[02]  Technologies Used &amp; Team Member Roles</a:t>
+            </a:r>
+          </a:p>
+          <a:p>
+            <a:pPr>
+              <a:spcAft>
+                <a:spcPts val="600"/>
+              </a:spcAft>
+              <a:defRPr sz="1000">
+                <a:solidFill>
+                  <a:srgbClr val="B9AFC6"/>
+                </a:solidFill>
+                <a:latin typeface="Arial"/>
+              </a:defRPr>
+            </a:pPr>
+            <a:r>
+              <a:t>       2 Mins · Anvitha &amp; Tanishq</a:t>
+            </a:r>
+          </a:p>
+          <a:p>
+            <a:pPr>
+              <a:defRPr sz="1250" b="1">
+                <a:solidFill>
+                  <a:srgbClr val="E1DAEB"/>
+                </a:solidFill>
+                <a:latin typeface="Arial"/>
+              </a:defRPr>
+            </a:pPr>
+            <a:r>
+              <a:t>[03]  System Architecture &amp; Live Workflows</a:t>
+            </a:r>
+          </a:p>
+          <a:p>
+            <a:pPr>
+              <a:spcAft>
+                <a:spcPts val="600"/>
+              </a:spcAft>
+              <a:defRPr sz="1000">
+                <a:solidFill>
+                  <a:srgbClr val="B9AFC6"/>
+                </a:solidFill>
+                <a:latin typeface="Arial"/>
+              </a:defRPr>
+            </a:pPr>
+            <a:r>
+              <a:t>       2 Mins · Praween &amp; Ashraj</a:t>
+            </a:r>
+          </a:p>
+          <a:p>
+            <a:pPr>
+              <a:defRPr sz="1250" b="1">
+                <a:solidFill>
+                  <a:srgbClr val="E1DAEB"/>
+                </a:solidFill>
+                <a:latin typeface="Arial"/>
+              </a:defRPr>
+            </a:pPr>
+            <a:r>
+              <a:t>[04]  Advantages, Disadvantages &amp; Roadmap</a:t>
+            </a:r>
+          </a:p>
+          <a:p>
+            <a:pPr>
+              <a:spcAft>
+                <a:spcPts val="600"/>
+              </a:spcAft>
+              <a:defRPr sz="1000">
+                <a:solidFill>
+                  <a:srgbClr val="B9AFC6"/>
+                </a:solidFill>
+                <a:latin typeface="Arial"/>
+              </a:defRPr>
+            </a:pPr>
+            <a:r>
+              <a:t>       2 Mins · Tanishq &amp; Anvitha</a:t>
+            </a:r>
+          </a:p>
+          <a:p>
+            <a:pPr>
+              <a:defRPr sz="1250" b="1">
+                <a:solidFill>
+                  <a:srgbClr val="E1DAEB"/>
+                </a:solidFill>
+                <a:latin typeface="Arial"/>
+              </a:defRPr>
+            </a:pPr>
+            <a:r>
+              <a:t>[05]  Live Cloud Hosting &amp; Key Learning Takeaways</a:t>
+            </a:r>
+          </a:p>
+          <a:p>
+            <a:pPr>
+              <a:spcAft>
+                <a:spcPts val="600"/>
+              </a:spcAft>
+              <a:defRPr sz="1000">
+                <a:solidFill>
+                  <a:srgbClr val="B9AFC6"/>
+                </a:solidFill>
+                <a:latin typeface="Arial"/>
+              </a:defRPr>
+            </a:pPr>
+            <a:r>
+              <a:t>       2 Mins · Ashraj &amp; Praween</a:t>
             </a:r>
           </a:p>
         </p:txBody>
@@ -3588,6 +3637,14 @@
 <file path=ppt/slides/slide2.xml><?xml version="1.0" encoding="utf-8"?>
 <p:sld xmlns:a="http://schemas.openxmlformats.org/drawingml/2006/main" xmlns:p="http://schemas.openxmlformats.org/presentationml/2006/main" xmlns:r="http://schemas.openxmlformats.org/officeDocument/2006/relationships">
   <p:cSld>
+    <p:bg>
+      <p:bgPr>
+        <a:solidFill>
+          <a:srgbClr val="1A1622"/>
+        </a:solidFill>
+        <a:effectLst/>
+      </p:bgPr>
+    </p:bg>
     <p:spTree>
       <p:nvGrpSpPr>
         <p:cNvPr id="1" name=""/>
@@ -3597,57 +3654,14 @@
       <p:grpSpPr/>
       <p:sp>
         <p:nvSpPr>
-          <p:cNvPr id="2" name="Rectangle 1"/>
-          <p:cNvSpPr/>
-          <p:nvPr/>
-        </p:nvSpPr>
-        <p:spPr>
-          <a:xfrm>
-            <a:off x="0" y="0"/>
-            <a:ext cx="12191695" cy="6858000"/>
-          </a:xfrm>
-          <a:prstGeom prst="rect">
-            <a:avLst/>
-          </a:prstGeom>
-          <a:solidFill>
-            <a:srgbClr val="1A1622"/>
-          </a:solidFill>
-          <a:ln>
-            <a:noFill/>
-          </a:ln>
-        </p:spPr>
-        <p:style>
-          <a:lnRef idx="1">
-            <a:schemeClr val="accent1"/>
-          </a:lnRef>
-          <a:fillRef idx="3">
-            <a:schemeClr val="accent1"/>
-          </a:fillRef>
-          <a:effectRef idx="2">
-            <a:schemeClr val="accent1"/>
-          </a:effectRef>
-          <a:fontRef idx="minor">
-            <a:schemeClr val="lt1"/>
-          </a:fontRef>
-        </p:style>
-        <p:txBody>
-          <a:bodyPr rtlCol="0" anchor="ctr"/>
-          <a:lstStyle/>
-          <a:p>
-            <a:pPr algn="ctr"/>
-          </a:p>
-        </p:txBody>
-      </p:sp>
-      <p:sp>
-        <p:nvSpPr>
-          <p:cNvPr id="3" name="TextBox 2"/>
+          <p:cNvPr id="2" name="TextBox 1"/>
           <p:cNvSpPr txBox="1"/>
           <p:nvPr/>
         </p:nvSpPr>
         <p:spPr>
           <a:xfrm>
             <a:off x="731520" y="365760"/>
-            <a:ext cx="10698480" cy="365760"/>
+            <a:ext cx="10698480" cy="320040"/>
           </a:xfrm>
           <a:prstGeom prst="rect">
             <a:avLst/>
@@ -3655,7 +3669,7 @@
           <a:noFill/>
         </p:spPr>
         <p:txBody>
-          <a:bodyPr wrap="square" lIns="0" tIns="0" rIns="0" bIns="0">
+          <a:bodyPr wrap="square">
             <a:spAutoFit/>
           </a:bodyPr>
           <a:lstStyle/>
@@ -3665,6 +3679,7 @@
                 <a:solidFill>
                   <a:srgbClr val="FFA062"/>
                 </a:solidFill>
+                <a:latin typeface="Arial"/>
               </a:defRPr>
             </a:pPr>
             <a:r>
@@ -3675,14 +3690,14 @@
       </p:sp>
       <p:sp>
         <p:nvSpPr>
-          <p:cNvPr id="4" name="TextBox 3"/>
+          <p:cNvPr id="3" name="TextBox 2"/>
           <p:cNvSpPr txBox="1"/>
           <p:nvPr/>
         </p:nvSpPr>
         <p:spPr>
           <a:xfrm>
             <a:off x="731520" y="685800"/>
-            <a:ext cx="10698480" cy="640080"/>
+            <a:ext cx="10698480" cy="594360"/>
           </a:xfrm>
           <a:prstGeom prst="rect">
             <a:avLst/>
@@ -3690,7 +3705,7 @@
           <a:noFill/>
         </p:spPr>
         <p:txBody>
-          <a:bodyPr wrap="square" lIns="0" tIns="0" rIns="0" bIns="0">
+          <a:bodyPr wrap="square">
             <a:spAutoFit/>
           </a:bodyPr>
           <a:lstStyle/>
@@ -3700,6 +3715,7 @@
                 <a:solidFill>
                   <a:srgbClr val="FFFFFF"/>
                 </a:solidFill>
+                <a:latin typeface="Arial"/>
               </a:defRPr>
             </a:pPr>
             <a:r>
@@ -3710,14 +3726,14 @@
       </p:sp>
       <p:sp>
         <p:nvSpPr>
-          <p:cNvPr id="5" name="Rounded Rectangle 4"/>
+          <p:cNvPr id="4" name="Rounded Rectangle 3"/>
           <p:cNvSpPr/>
           <p:nvPr/>
         </p:nvSpPr>
         <p:spPr>
           <a:xfrm>
-            <a:off x="731520" y="1463040"/>
-            <a:ext cx="3657600" cy="4846320"/>
+            <a:off x="731520" y="1417320"/>
+            <a:ext cx="3566160" cy="4937760"/>
           </a:xfrm>
           <a:prstGeom prst="roundRect">
             <a:avLst/>
@@ -3725,7 +3741,7 @@
           <a:solidFill>
             <a:srgbClr val="262030"/>
           </a:solidFill>
-          <a:ln>
+          <a:ln w="19050">
             <a:solidFill>
               <a:srgbClr val="413750"/>
             </a:solidFill>
@@ -3746,17 +3762,44 @@
           </a:fontRef>
         </p:style>
         <p:txBody>
-          <a:bodyPr rtlCol="0" anchor="ctr" wrap="square" lIns="274320" tIns="274320" rIns="274320" bIns="274320"/>
-          <a:lstStyle/>
-          <a:p>
-            <a:pPr algn="ctr">
+          <a:bodyPr rtlCol="0" anchor="ctr"/>
+          <a:lstStyle/>
+          <a:p>
+            <a:pPr algn="ctr"/>
+          </a:p>
+        </p:txBody>
+      </p:sp>
+      <p:sp>
+        <p:nvSpPr>
+          <p:cNvPr id="5" name="TextBox 4"/>
+          <p:cNvSpPr txBox="1"/>
+          <p:nvPr/>
+        </p:nvSpPr>
+        <p:spPr>
+          <a:xfrm>
+            <a:off x="914400" y="1554480"/>
+            <a:ext cx="3200400" cy="4663440"/>
+          </a:xfrm>
+          <a:prstGeom prst="rect">
+            <a:avLst/>
+          </a:prstGeom>
+          <a:noFill/>
+        </p:spPr>
+        <p:txBody>
+          <a:bodyPr wrap="square">
+            <a:spAutoFit/>
+          </a:bodyPr>
+          <a:lstStyle/>
+          <a:p>
+            <a:pPr>
               <a:spcAft>
                 <a:spcPts val="1000"/>
               </a:spcAft>
-              <a:defRPr sz="1400" b="1">
+              <a:defRPr sz="1300" b="1">
                 <a:solidFill>
                   <a:srgbClr val="FFA062"/>
                 </a:solidFill>
+                <a:latin typeface="Arial"/>
               </a:defRPr>
             </a:pPr>
             <a:r>
@@ -3765,37 +3808,40 @@
           </a:p>
           <a:p>
             <a:pPr>
-              <a:defRPr sz="1200" b="1">
+              <a:defRPr sz="1150" b="1">
                 <a:solidFill>
                   <a:srgbClr val="FFFFFF"/>
                 </a:solidFill>
-              </a:defRPr>
-            </a:pPr>
-            <a:r>
-              <a:t>• Frontend Client</a:t>
-            </a:r>
-          </a:p>
-          <a:p>
-            <a:pPr>
-              <a:spcAft>
-                <a:spcPts val="800"/>
-              </a:spcAft>
-              <a:defRPr sz="1000">
+                <a:latin typeface="Arial"/>
+              </a:defRPr>
+            </a:pPr>
+            <a:r>
+              <a:t>• Frontend Stack</a:t>
+            </a:r>
+          </a:p>
+          <a:p>
+            <a:pPr>
+              <a:spcAft>
+                <a:spcPts val="700"/>
+              </a:spcAft>
+              <a:defRPr sz="950">
                 <a:solidFill>
                   <a:srgbClr val="B9AFC6"/>
                 </a:solidFill>
-              </a:defRPr>
-            </a:pPr>
-            <a:r>
-              <a:t>React 18 · Vite · React Router v7 · Tailwind Tokens · Lucide Icons</a:t>
-            </a:r>
-          </a:p>
-          <a:p>
-            <a:pPr>
-              <a:defRPr sz="1200" b="1">
+                <a:latin typeface="Arial"/>
+              </a:defRPr>
+            </a:pPr>
+            <a:r>
+              <a:t>React 18 · Vite · React Router v7 · Tailwind Design Tokens · Lucide Icons</a:t>
+            </a:r>
+          </a:p>
+          <a:p>
+            <a:pPr>
+              <a:defRPr sz="1150" b="1">
                 <a:solidFill>
                   <a:srgbClr val="FFFFFF"/>
                 </a:solidFill>
+                <a:latin typeface="Arial"/>
               </a:defRPr>
             </a:pPr>
             <a:r>
@@ -3805,78 +3851,84 @@
           <a:p>
             <a:pPr>
               <a:spcAft>
-                <a:spcPts val="800"/>
-              </a:spcAft>
-              <a:defRPr sz="1000">
+                <a:spcPts val="700"/>
+              </a:spcAft>
+              <a:defRPr sz="950">
                 <a:solidFill>
                   <a:srgbClr val="B9AFC6"/>
                 </a:solidFill>
-              </a:defRPr>
-            </a:pPr>
-            <a:r>
-              <a:t>Node.js · Express.js · REST Architecture · Centralized Middleware</a:t>
-            </a:r>
-          </a:p>
-          <a:p>
-            <a:pPr>
-              <a:defRPr sz="1200" b="1">
+                <a:latin typeface="Arial"/>
+              </a:defRPr>
+            </a:pPr>
+            <a:r>
+              <a:t>Node.js · Express.js REST Framework · Centralized Middleware Pipeline</a:t>
+            </a:r>
+          </a:p>
+          <a:p>
+            <a:pPr>
+              <a:defRPr sz="1150" b="1">
                 <a:solidFill>
                   <a:srgbClr val="FFFFFF"/>
                 </a:solidFill>
-              </a:defRPr>
-            </a:pPr>
-            <a:r>
-              <a:t>• Database &amp; Persistence</a:t>
-            </a:r>
-          </a:p>
-          <a:p>
-            <a:pPr>
-              <a:spcAft>
-                <a:spcPts val="800"/>
-              </a:spcAft>
-              <a:defRPr sz="1000">
+                <a:latin typeface="Arial"/>
+              </a:defRPr>
+            </a:pPr>
+            <a:r>
+              <a:t>• Data Persistence</a:t>
+            </a:r>
+          </a:p>
+          <a:p>
+            <a:pPr>
+              <a:spcAft>
+                <a:spcPts val="700"/>
+              </a:spcAft>
+              <a:defRPr sz="950">
                 <a:solidFill>
                   <a:srgbClr val="B9AFC6"/>
                 </a:solidFill>
-              </a:defRPr>
-            </a:pPr>
-            <a:r>
-              <a:t>MongoDB · Mongoose Models · Resilient In-Memory Dual Store</a:t>
-            </a:r>
-          </a:p>
-          <a:p>
-            <a:pPr>
-              <a:defRPr sz="1200" b="1">
+                <a:latin typeface="Arial"/>
+              </a:defRPr>
+            </a:pPr>
+            <a:r>
+              <a:t>MongoDB · Mongoose ORM · Resilient In-Memory Dual Fallback Engine</a:t>
+            </a:r>
+          </a:p>
+          <a:p>
+            <a:pPr>
+              <a:defRPr sz="1150" b="1">
                 <a:solidFill>
                   <a:srgbClr val="FFFFFF"/>
                 </a:solidFill>
-              </a:defRPr>
-            </a:pPr>
-            <a:r>
-              <a:t>• Security &amp; Validation</a:t>
-            </a:r>
-          </a:p>
-          <a:p>
-            <a:pPr>
-              <a:spcAft>
-                <a:spcPts val="800"/>
-              </a:spcAft>
-              <a:defRPr sz="1000">
+                <a:latin typeface="Arial"/>
+              </a:defRPr>
+            </a:pPr>
+            <a:r>
+              <a:t>• Security &amp; Auth</a:t>
+            </a:r>
+          </a:p>
+          <a:p>
+            <a:pPr>
+              <a:spcAft>
+                <a:spcPts val="700"/>
+              </a:spcAft>
+              <a:defRPr sz="950">
                 <a:solidFill>
                   <a:srgbClr val="B9AFC6"/>
                 </a:solidFill>
-              </a:defRPr>
-            </a:pPr>
-            <a:r>
-              <a:t>JWT Bearer Tokens · Bcryptjs · Zod Schema Validation · RBAC</a:t>
-            </a:r>
-          </a:p>
-          <a:p>
-            <a:pPr>
-              <a:defRPr sz="1200" b="1">
+                <a:latin typeface="Arial"/>
+              </a:defRPr>
+            </a:pPr>
+            <a:r>
+              <a:t>Stateless JWT Bearer Tokens · Bcryptjs · Zod Schema Validation · RBAC</a:t>
+            </a:r>
+          </a:p>
+          <a:p>
+            <a:pPr>
+              <a:defRPr sz="1150" b="1">
                 <a:solidFill>
                   <a:srgbClr val="FFFFFF"/>
                 </a:solidFill>
+                <a:latin typeface="Arial"/>
               </a:defRPr>
             </a:pPr>
             <a:r>
@@ -3886,16 +3938,17 @@
           <a:p>
             <a:pPr>
               <a:spcAft>
-                <a:spcPts val="800"/>
-              </a:spcAft>
-              <a:defRPr sz="1000">
+                <a:spcPts val="700"/>
+              </a:spcAft>
+              <a:defRPr sz="950">
                 <a:solidFill>
                   <a:srgbClr val="B9AFC6"/>
                 </a:solidFill>
-              </a:defRPr>
-            </a:pPr>
-            <a:r>
-              <a:t>Vercel (Edge SPA) · Render (Node Service) · GitHub CI/CD</a:t>
+                <a:latin typeface="Arial"/>
+              </a:defRPr>
+            </a:pPr>
+            <a:r>
+              <a:t>Vercel (Edge CDN Frontend) · Render (Cloud Web Service) · Git Monorepo</a:t>
             </a:r>
           </a:p>
         </p:txBody>
@@ -3908,8 +3961,8 @@
         </p:nvSpPr>
         <p:spPr>
           <a:xfrm>
-            <a:off x="4663440" y="1463040"/>
-            <a:ext cx="3566160" cy="2331720"/>
+            <a:off x="4572000" y="1417320"/>
+            <a:ext cx="3566160" cy="2377440"/>
           </a:xfrm>
           <a:prstGeom prst="roundRect">
             <a:avLst/>
@@ -3917,7 +3970,7 @@
           <a:solidFill>
             <a:srgbClr val="262030"/>
           </a:solidFill>
-          <a:ln>
+          <a:ln w="19050">
             <a:solidFill>
               <a:srgbClr val="413750"/>
             </a:solidFill>
@@ -3938,14 +3991,41 @@
           </a:fontRef>
         </p:style>
         <p:txBody>
-          <a:bodyPr rtlCol="0" anchor="ctr" wrap="square" lIns="228600" tIns="228600" rIns="228600" bIns="228600"/>
-          <a:lstStyle/>
-          <a:p>
-            <a:pPr algn="ctr">
+          <a:bodyPr rtlCol="0" anchor="ctr"/>
+          <a:lstStyle/>
+          <a:p>
+            <a:pPr algn="ctr"/>
+          </a:p>
+        </p:txBody>
+      </p:sp>
+      <p:sp>
+        <p:nvSpPr>
+          <p:cNvPr id="7" name="TextBox 6"/>
+          <p:cNvSpPr txBox="1"/>
+          <p:nvPr/>
+        </p:nvSpPr>
+        <p:spPr>
+          <a:xfrm>
+            <a:off x="4754880" y="1581912"/>
+            <a:ext cx="3200400" cy="2103120"/>
+          </a:xfrm>
+          <a:prstGeom prst="rect">
+            <a:avLst/>
+          </a:prstGeom>
+          <a:noFill/>
+        </p:spPr>
+        <p:txBody>
+          <a:bodyPr wrap="square">
+            <a:spAutoFit/>
+          </a:bodyPr>
+          <a:lstStyle/>
+          <a:p>
+            <a:pPr>
               <a:defRPr sz="1300" b="1">
                 <a:solidFill>
                   <a:srgbClr val="FFFFFF"/>
                 </a:solidFill>
+                <a:latin typeface="Arial"/>
               </a:defRPr>
             </a:pPr>
             <a:r>
@@ -3961,6 +4041,7 @@
                 <a:solidFill>
                   <a:srgbClr val="FFA062"/>
                 </a:solidFill>
+                <a:latin typeface="Arial"/>
               </a:defRPr>
             </a:pPr>
             <a:r>
@@ -3974,12 +4055,13 @@
               </a:spcAft>
               <a:defRPr sz="950">
                 <a:solidFill>
-                  <a:srgbClr val="D7D0E1"/>
-                </a:solidFill>
-              </a:defRPr>
-            </a:pPr>
-            <a:r>
-              <a:t>▹ UI/UX Design tokens matching Indian Mandi branding</a:t>
+                  <a:srgbClr val="E1DAEB"/>
+                </a:solidFill>
+                <a:latin typeface="Arial"/>
+              </a:defRPr>
+            </a:pPr>
+            <a:r>
+              <a:t>▹ UI/UX Design system tailored for Mandi Commerce</a:t>
             </a:r>
           </a:p>
           <a:p>
@@ -3989,12 +4071,13 @@
               </a:spcAft>
               <a:defRPr sz="950">
                 <a:solidFill>
-                  <a:srgbClr val="D7D0E1"/>
-                </a:solidFill>
-              </a:defRPr>
-            </a:pPr>
-            <a:r>
-              <a:t>▹ Retailer &amp; Wholesaler interactive dashboards &amp; metrics</a:t>
+                  <a:srgbClr val="E1DAEB"/>
+                </a:solidFill>
+                <a:latin typeface="Arial"/>
+              </a:defRPr>
+            </a:pPr>
+            <a:r>
+              <a:t>▹ Interactive Retailer &amp; Wholesaler KPI Dashboards</a:t>
             </a:r>
           </a:p>
           <a:p>
@@ -4004,12 +4087,13 @@
               </a:spcAft>
               <a:defRPr sz="950">
                 <a:solidFill>
-                  <a:srgbClr val="D7D0E1"/>
-                </a:solidFill>
-              </a:defRPr>
-            </a:pPr>
-            <a:r>
-              <a:t>▹ Retailer &amp; Wholesaler comprehensive profile managers</a:t>
+                  <a:srgbClr val="E1DAEB"/>
+                </a:solidFill>
+                <a:latin typeface="Arial"/>
+              </a:defRPr>
+            </a:pPr>
+            <a:r>
+              <a:t>▹ Multi-section Store and Wholesaler Profile engines</a:t>
             </a:r>
           </a:p>
           <a:p>
@@ -4019,26 +4103,27 @@
               </a:spcAft>
               <a:defRPr sz="950">
                 <a:solidFill>
-                  <a:srgbClr val="D7D0E1"/>
-                </a:solidFill>
-              </a:defRPr>
-            </a:pPr>
-            <a:r>
-              <a:t>▹ Vite production build optimizations &amp; responsive layouts</a:t>
-            </a:r>
-          </a:p>
-        </p:txBody>
-      </p:sp>
-      <p:sp>
-        <p:nvSpPr>
-          <p:cNvPr id="7" name="Rounded Rectangle 6"/>
+                  <a:srgbClr val="E1DAEB"/>
+                </a:solidFill>
+                <a:latin typeface="Arial"/>
+              </a:defRPr>
+            </a:pPr>
+            <a:r>
+              <a:t>▹ Vite client optimization &amp; responsive layout design</a:t>
+            </a:r>
+          </a:p>
+        </p:txBody>
+      </p:sp>
+      <p:sp>
+        <p:nvSpPr>
+          <p:cNvPr id="8" name="Rounded Rectangle 7"/>
           <p:cNvSpPr/>
           <p:nvPr/>
         </p:nvSpPr>
         <p:spPr>
           <a:xfrm>
-            <a:off x="8412480" y="1463040"/>
-            <a:ext cx="3566160" cy="2331720"/>
+            <a:off x="8321040" y="1417320"/>
+            <a:ext cx="3566160" cy="2377440"/>
           </a:xfrm>
           <a:prstGeom prst="roundRect">
             <a:avLst/>
@@ -4046,7 +4131,7 @@
           <a:solidFill>
             <a:srgbClr val="262030"/>
           </a:solidFill>
-          <a:ln>
+          <a:ln w="19050">
             <a:solidFill>
               <a:srgbClr val="413750"/>
             </a:solidFill>
@@ -4067,14 +4152,41 @@
           </a:fontRef>
         </p:style>
         <p:txBody>
-          <a:bodyPr rtlCol="0" anchor="ctr" wrap="square" lIns="228600" tIns="228600" rIns="228600" bIns="228600"/>
-          <a:lstStyle/>
-          <a:p>
-            <a:pPr algn="ctr">
+          <a:bodyPr rtlCol="0" anchor="ctr"/>
+          <a:lstStyle/>
+          <a:p>
+            <a:pPr algn="ctr"/>
+          </a:p>
+        </p:txBody>
+      </p:sp>
+      <p:sp>
+        <p:nvSpPr>
+          <p:cNvPr id="9" name="TextBox 8"/>
+          <p:cNvSpPr txBox="1"/>
+          <p:nvPr/>
+        </p:nvSpPr>
+        <p:spPr>
+          <a:xfrm>
+            <a:off x="8503920" y="1581912"/>
+            <a:ext cx="3200400" cy="2103120"/>
+          </a:xfrm>
+          <a:prstGeom prst="rect">
+            <a:avLst/>
+          </a:prstGeom>
+          <a:noFill/>
+        </p:spPr>
+        <p:txBody>
+          <a:bodyPr wrap="square">
+            <a:spAutoFit/>
+          </a:bodyPr>
+          <a:lstStyle/>
+          <a:p>
+            <a:pPr>
               <a:defRPr sz="1300" b="1">
                 <a:solidFill>
                   <a:srgbClr val="FFFFFF"/>
                 </a:solidFill>
+                <a:latin typeface="Arial"/>
               </a:defRPr>
             </a:pPr>
             <a:r>
@@ -4090,6 +4202,7 @@
                 <a:solidFill>
                   <a:srgbClr val="FFA062"/>
                 </a:solidFill>
+                <a:latin typeface="Arial"/>
               </a:defRPr>
             </a:pPr>
             <a:r>
@@ -4103,8 +4216,9 @@
               </a:spcAft>
               <a:defRPr sz="950">
                 <a:solidFill>
-                  <a:srgbClr val="D7D0E1"/>
-                </a:solidFill>
+                  <a:srgbClr val="E1DAEB"/>
+                </a:solidFill>
+                <a:latin typeface="Arial"/>
               </a:defRPr>
             </a:pPr>
             <a:r>
@@ -4118,8 +4232,9 @@
               </a:spcAft>
               <a:defRPr sz="950">
                 <a:solidFill>
-                  <a:srgbClr val="D7D0E1"/>
-                </a:solidFill>
+                  <a:srgbClr val="E1DAEB"/>
+                </a:solidFill>
+                <a:latin typeface="Arial"/>
               </a:defRPr>
             </a:pPr>
             <a:r>
@@ -4133,12 +4248,13 @@
               </a:spcAft>
               <a:defRPr sz="950">
                 <a:solidFill>
-                  <a:srgbClr val="D7D0E1"/>
-                </a:solidFill>
-              </a:defRPr>
-            </a:pPr>
-            <a:r>
-              <a:t>▹ Centralized API service (`api.js`) &amp; token attachment</a:t>
+                  <a:srgbClr val="E1DAEB"/>
+                </a:solidFill>
+                <a:latin typeface="Arial"/>
+              </a:defRPr>
+            </a:pPr>
+            <a:r>
+              <a:t>▹ Centralized API service (`api.js`) &amp; token integration</a:t>
             </a:r>
           </a:p>
           <a:p>
@@ -4148,8 +4264,9 @@
               </a:spcAft>
               <a:defRPr sz="950">
                 <a:solidFill>
-                  <a:srgbClr val="D7D0E1"/>
-                </a:solidFill>
+                  <a:srgbClr val="E1DAEB"/>
+                </a:solidFill>
+                <a:latin typeface="Arial"/>
               </a:defRPr>
             </a:pPr>
             <a:r>
@@ -4160,14 +4277,14 @@
       </p:sp>
       <p:sp>
         <p:nvSpPr>
-          <p:cNvPr id="8" name="Rounded Rectangle 7"/>
+          <p:cNvPr id="10" name="Rounded Rectangle 9"/>
           <p:cNvSpPr/>
           <p:nvPr/>
         </p:nvSpPr>
         <p:spPr>
           <a:xfrm>
-            <a:off x="4663440" y="3977639"/>
-            <a:ext cx="3566160" cy="2331720"/>
+            <a:off x="4572000" y="3977639"/>
+            <a:ext cx="3566160" cy="2377440"/>
           </a:xfrm>
           <a:prstGeom prst="roundRect">
             <a:avLst/>
@@ -4175,7 +4292,7 @@
           <a:solidFill>
             <a:srgbClr val="262030"/>
           </a:solidFill>
-          <a:ln>
+          <a:ln w="19050">
             <a:solidFill>
               <a:srgbClr val="413750"/>
             </a:solidFill>
@@ -4196,14 +4313,41 @@
           </a:fontRef>
         </p:style>
         <p:txBody>
-          <a:bodyPr rtlCol="0" anchor="ctr" wrap="square" lIns="228600" tIns="228600" rIns="228600" bIns="228600"/>
-          <a:lstStyle/>
-          <a:p>
-            <a:pPr algn="ctr">
+          <a:bodyPr rtlCol="0" anchor="ctr"/>
+          <a:lstStyle/>
+          <a:p>
+            <a:pPr algn="ctr"/>
+          </a:p>
+        </p:txBody>
+      </p:sp>
+      <p:sp>
+        <p:nvSpPr>
+          <p:cNvPr id="11" name="TextBox 10"/>
+          <p:cNvSpPr txBox="1"/>
+          <p:nvPr/>
+        </p:nvSpPr>
+        <p:spPr>
+          <a:xfrm>
+            <a:off x="4754880" y="4142231"/>
+            <a:ext cx="3200400" cy="2103120"/>
+          </a:xfrm>
+          <a:prstGeom prst="rect">
+            <a:avLst/>
+          </a:prstGeom>
+          <a:noFill/>
+        </p:spPr>
+        <p:txBody>
+          <a:bodyPr wrap="square">
+            <a:spAutoFit/>
+          </a:bodyPr>
+          <a:lstStyle/>
+          <a:p>
+            <a:pPr>
               <a:defRPr sz="1300" b="1">
                 <a:solidFill>
                   <a:srgbClr val="FFFFFF"/>
                 </a:solidFill>
+                <a:latin typeface="Arial"/>
               </a:defRPr>
             </a:pPr>
             <a:r>
@@ -4219,6 +4363,7 @@
                 <a:solidFill>
                   <a:srgbClr val="3B82F6"/>
                 </a:solidFill>
+                <a:latin typeface="Arial"/>
               </a:defRPr>
             </a:pPr>
             <a:r>
@@ -4232,8 +4377,9 @@
               </a:spcAft>
               <a:defRPr sz="950">
                 <a:solidFill>
-                  <a:srgbClr val="D7D0E1"/>
-                </a:solidFill>
+                  <a:srgbClr val="E1DAEB"/>
+                </a:solidFill>
+                <a:latin typeface="Arial"/>
               </a:defRPr>
             </a:pPr>
             <a:r>
@@ -4247,8 +4393,9 @@
               </a:spcAft>
               <a:defRPr sz="950">
                 <a:solidFill>
-                  <a:srgbClr val="D7D0E1"/>
-                </a:solidFill>
+                  <a:srgbClr val="E1DAEB"/>
+                </a:solidFill>
+                <a:latin typeface="Arial"/>
               </a:defRPr>
             </a:pPr>
             <a:r>
@@ -4262,8 +4409,9 @@
               </a:spcAft>
               <a:defRPr sz="950">
                 <a:solidFill>
-                  <a:srgbClr val="D7D0E1"/>
-                </a:solidFill>
+                  <a:srgbClr val="E1DAEB"/>
+                </a:solidFill>
+                <a:latin typeface="Arial"/>
               </a:defRPr>
             </a:pPr>
             <a:r>
@@ -4277,8 +4425,9 @@
               </a:spcAft>
               <a:defRPr sz="950">
                 <a:solidFill>
-                  <a:srgbClr val="D7D0E1"/>
-                </a:solidFill>
+                  <a:srgbClr val="E1DAEB"/>
+                </a:solidFill>
+                <a:latin typeface="Arial"/>
               </a:defRPr>
             </a:pPr>
             <a:r>
@@ -4289,14 +4438,14 @@
       </p:sp>
       <p:sp>
         <p:nvSpPr>
-          <p:cNvPr id="9" name="Rounded Rectangle 8"/>
+          <p:cNvPr id="12" name="Rounded Rectangle 11"/>
           <p:cNvSpPr/>
           <p:nvPr/>
         </p:nvSpPr>
         <p:spPr>
           <a:xfrm>
-            <a:off x="8412480" y="3977639"/>
-            <a:ext cx="3566160" cy="2331720"/>
+            <a:off x="8321040" y="3977639"/>
+            <a:ext cx="3566160" cy="2377440"/>
           </a:xfrm>
           <a:prstGeom prst="roundRect">
             <a:avLst/>
@@ -4304,7 +4453,7 @@
           <a:solidFill>
             <a:srgbClr val="262030"/>
           </a:solidFill>
-          <a:ln>
+          <a:ln w="19050">
             <a:solidFill>
               <a:srgbClr val="413750"/>
             </a:solidFill>
@@ -4325,14 +4474,41 @@
           </a:fontRef>
         </p:style>
         <p:txBody>
-          <a:bodyPr rtlCol="0" anchor="ctr" wrap="square" lIns="228600" tIns="228600" rIns="228600" bIns="228600"/>
-          <a:lstStyle/>
-          <a:p>
-            <a:pPr algn="ctr">
+          <a:bodyPr rtlCol="0" anchor="ctr"/>
+          <a:lstStyle/>
+          <a:p>
+            <a:pPr algn="ctr"/>
+          </a:p>
+        </p:txBody>
+      </p:sp>
+      <p:sp>
+        <p:nvSpPr>
+          <p:cNvPr id="13" name="TextBox 12"/>
+          <p:cNvSpPr txBox="1"/>
+          <p:nvPr/>
+        </p:nvSpPr>
+        <p:spPr>
+          <a:xfrm>
+            <a:off x="8503920" y="4142231"/>
+            <a:ext cx="3200400" cy="2103120"/>
+          </a:xfrm>
+          <a:prstGeom prst="rect">
+            <a:avLst/>
+          </a:prstGeom>
+          <a:noFill/>
+        </p:spPr>
+        <p:txBody>
+          <a:bodyPr wrap="square">
+            <a:spAutoFit/>
+          </a:bodyPr>
+          <a:lstStyle/>
+          <a:p>
+            <a:pPr>
               <a:defRPr sz="1300" b="1">
                 <a:solidFill>
                   <a:srgbClr val="FFFFFF"/>
                 </a:solidFill>
+                <a:latin typeface="Arial"/>
               </a:defRPr>
             </a:pPr>
             <a:r>
@@ -4348,6 +4524,7 @@
                 <a:solidFill>
                   <a:srgbClr val="22C55E"/>
                 </a:solidFill>
+                <a:latin typeface="Arial"/>
               </a:defRPr>
             </a:pPr>
             <a:r>
@@ -4361,8 +4538,9 @@
               </a:spcAft>
               <a:defRPr sz="950">
                 <a:solidFill>
-                  <a:srgbClr val="D7D0E1"/>
-                </a:solidFill>
+                  <a:srgbClr val="E1DAEB"/>
+                </a:solidFill>
+                <a:latin typeface="Arial"/>
               </a:defRPr>
             </a:pPr>
             <a:r>
@@ -4376,8 +4554,9 @@
               </a:spcAft>
               <a:defRPr sz="950">
                 <a:solidFill>
-                  <a:srgbClr val="D7D0E1"/>
-                </a:solidFill>
+                  <a:srgbClr val="E1DAEB"/>
+                </a:solidFill>
+                <a:latin typeface="Arial"/>
               </a:defRPr>
             </a:pPr>
             <a:r>
@@ -4391,8 +4570,9 @@
               </a:spcAft>
               <a:defRPr sz="950">
                 <a:solidFill>
-                  <a:srgbClr val="D7D0E1"/>
-                </a:solidFill>
+                  <a:srgbClr val="E1DAEB"/>
+                </a:solidFill>
+                <a:latin typeface="Arial"/>
               </a:defRPr>
             </a:pPr>
             <a:r>
@@ -4406,8 +4586,9 @@
               </a:spcAft>
               <a:defRPr sz="950">
                 <a:solidFill>
-                  <a:srgbClr val="D7D0E1"/>
-                </a:solidFill>
+                  <a:srgbClr val="E1DAEB"/>
+                </a:solidFill>
+                <a:latin typeface="Arial"/>
               </a:defRPr>
             </a:pPr>
             <a:r>
@@ -4427,6 +4608,14 @@
 <file path=ppt/slides/slide3.xml><?xml version="1.0" encoding="utf-8"?>
 <p:sld xmlns:a="http://schemas.openxmlformats.org/drawingml/2006/main" xmlns:p="http://schemas.openxmlformats.org/presentationml/2006/main" xmlns:r="http://schemas.openxmlformats.org/officeDocument/2006/relationships">
   <p:cSld>
+    <p:bg>
+      <p:bgPr>
+        <a:solidFill>
+          <a:srgbClr val="1A1622"/>
+        </a:solidFill>
+        <a:effectLst/>
+      </p:bgPr>
+    </p:bg>
     <p:spTree>
       <p:nvGrpSpPr>
         <p:cNvPr id="1" name=""/>
@@ -4436,57 +4625,14 @@
       <p:grpSpPr/>
       <p:sp>
         <p:nvSpPr>
-          <p:cNvPr id="2" name="Rectangle 1"/>
-          <p:cNvSpPr/>
-          <p:nvPr/>
-        </p:nvSpPr>
-        <p:spPr>
-          <a:xfrm>
-            <a:off x="0" y="0"/>
-            <a:ext cx="12191695" cy="6858000"/>
-          </a:xfrm>
-          <a:prstGeom prst="rect">
-            <a:avLst/>
-          </a:prstGeom>
-          <a:solidFill>
-            <a:srgbClr val="1A1622"/>
-          </a:solidFill>
-          <a:ln>
-            <a:noFill/>
-          </a:ln>
-        </p:spPr>
-        <p:style>
-          <a:lnRef idx="1">
-            <a:schemeClr val="accent1"/>
-          </a:lnRef>
-          <a:fillRef idx="3">
-            <a:schemeClr val="accent1"/>
-          </a:fillRef>
-          <a:effectRef idx="2">
-            <a:schemeClr val="accent1"/>
-          </a:effectRef>
-          <a:fontRef idx="minor">
-            <a:schemeClr val="lt1"/>
-          </a:fontRef>
-        </p:style>
-        <p:txBody>
-          <a:bodyPr rtlCol="0" anchor="ctr"/>
-          <a:lstStyle/>
-          <a:p>
-            <a:pPr algn="ctr"/>
-          </a:p>
-        </p:txBody>
-      </p:sp>
-      <p:sp>
-        <p:nvSpPr>
-          <p:cNvPr id="3" name="TextBox 2"/>
+          <p:cNvPr id="2" name="TextBox 1"/>
           <p:cNvSpPr txBox="1"/>
           <p:nvPr/>
         </p:nvSpPr>
         <p:spPr>
           <a:xfrm>
             <a:off x="731520" y="365760"/>
-            <a:ext cx="10698480" cy="365760"/>
+            <a:ext cx="10698480" cy="320040"/>
           </a:xfrm>
           <a:prstGeom prst="rect">
             <a:avLst/>
@@ -4494,7 +4640,7 @@
           <a:noFill/>
         </p:spPr>
         <p:txBody>
-          <a:bodyPr wrap="square" lIns="0" tIns="0" rIns="0" bIns="0">
+          <a:bodyPr wrap="square">
             <a:spAutoFit/>
           </a:bodyPr>
           <a:lstStyle/>
@@ -4504,6 +4650,7 @@
                 <a:solidFill>
                   <a:srgbClr val="FFA062"/>
                 </a:solidFill>
+                <a:latin typeface="Arial"/>
               </a:defRPr>
             </a:pPr>
             <a:r>
@@ -4514,14 +4661,14 @@
       </p:sp>
       <p:sp>
         <p:nvSpPr>
-          <p:cNvPr id="4" name="TextBox 3"/>
+          <p:cNvPr id="3" name="TextBox 2"/>
           <p:cNvSpPr txBox="1"/>
           <p:nvPr/>
         </p:nvSpPr>
         <p:spPr>
           <a:xfrm>
             <a:off x="731520" y="685800"/>
-            <a:ext cx="10698480" cy="640080"/>
+            <a:ext cx="10698480" cy="594360"/>
           </a:xfrm>
           <a:prstGeom prst="rect">
             <a:avLst/>
@@ -4529,7 +4676,7 @@
           <a:noFill/>
         </p:spPr>
         <p:txBody>
-          <a:bodyPr wrap="square" lIns="0" tIns="0" rIns="0" bIns="0">
+          <a:bodyPr wrap="square">
             <a:spAutoFit/>
           </a:bodyPr>
           <a:lstStyle/>
@@ -4539,6 +4686,7 @@
                 <a:solidFill>
                   <a:srgbClr val="FFFFFF"/>
                 </a:solidFill>
+                <a:latin typeface="Arial"/>
               </a:defRPr>
             </a:pPr>
             <a:r>
@@ -4549,14 +4697,14 @@
       </p:sp>
       <p:sp>
         <p:nvSpPr>
-          <p:cNvPr id="5" name="Rounded Rectangle 4"/>
+          <p:cNvPr id="4" name="Rounded Rectangle 3"/>
           <p:cNvSpPr/>
           <p:nvPr/>
         </p:nvSpPr>
         <p:spPr>
           <a:xfrm>
-            <a:off x="731520" y="1463040"/>
-            <a:ext cx="3328416" cy="4846320"/>
+            <a:off x="731520" y="1417320"/>
+            <a:ext cx="3328416" cy="4937760"/>
           </a:xfrm>
           <a:prstGeom prst="roundRect">
             <a:avLst/>
@@ -4564,7 +4712,7 @@
           <a:solidFill>
             <a:srgbClr val="262030"/>
           </a:solidFill>
-          <a:ln>
+          <a:ln w="19050">
             <a:solidFill>
               <a:srgbClr val="413750"/>
             </a:solidFill>
@@ -4585,17 +4733,44 @@
           </a:fontRef>
         </p:style>
         <p:txBody>
-          <a:bodyPr rtlCol="0" anchor="ctr" wrap="square" lIns="274320" tIns="274320" rIns="274320" bIns="274320"/>
-          <a:lstStyle/>
-          <a:p>
-            <a:pPr algn="ctr">
-              <a:spcAft>
-                <a:spcPts val="1200"/>
+          <a:bodyPr rtlCol="0" anchor="ctr"/>
+          <a:lstStyle/>
+          <a:p>
+            <a:pPr algn="ctr"/>
+          </a:p>
+        </p:txBody>
+      </p:sp>
+      <p:sp>
+        <p:nvSpPr>
+          <p:cNvPr id="5" name="TextBox 4"/>
+          <p:cNvSpPr txBox="1"/>
+          <p:nvPr/>
+        </p:nvSpPr>
+        <p:spPr>
+          <a:xfrm>
+            <a:off x="914400" y="1554480"/>
+            <a:ext cx="2962656" cy="4663440"/>
+          </a:xfrm>
+          <a:prstGeom prst="rect">
+            <a:avLst/>
+          </a:prstGeom>
+          <a:noFill/>
+        </p:spPr>
+        <p:txBody>
+          <a:bodyPr wrap="square">
+            <a:spAutoFit/>
+          </a:bodyPr>
+          <a:lstStyle/>
+          <a:p>
+            <a:pPr>
+              <a:spcAft>
+                <a:spcPts val="1000"/>
               </a:spcAft>
               <a:defRPr sz="1300" b="1">
                 <a:solidFill>
                   <a:srgbClr val="FFA062"/>
                 </a:solidFill>
+                <a:latin typeface="Arial"/>
               </a:defRPr>
             </a:pPr>
             <a:r>
@@ -4608,6 +4783,7 @@
                 <a:solidFill>
                   <a:srgbClr val="FFFFFF"/>
                 </a:solidFill>
+                <a:latin typeface="Arial"/>
               </a:defRPr>
             </a:pPr>
             <a:r>
@@ -4617,12 +4793,13 @@
           <a:p>
             <a:pPr>
               <a:spcAft>
-                <a:spcPts val="800"/>
-              </a:spcAft>
-              <a:defRPr sz="1000">
+                <a:spcPts val="700"/>
+              </a:spcAft>
+              <a:defRPr sz="950">
                 <a:solidFill>
                   <a:srgbClr val="B9AFC6"/>
                 </a:solidFill>
+                <a:latin typeface="Arial"/>
               </a:defRPr>
             </a:pPr>
             <a:r>
@@ -4635,6 +4812,7 @@
                 <a:solidFill>
                   <a:srgbClr val="FFFFFF"/>
                 </a:solidFill>
+                <a:latin typeface="Arial"/>
               </a:defRPr>
             </a:pPr>
             <a:r>
@@ -4644,12 +4822,13 @@
           <a:p>
             <a:pPr>
               <a:spcAft>
-                <a:spcPts val="800"/>
-              </a:spcAft>
-              <a:defRPr sz="1000">
+                <a:spcPts val="700"/>
+              </a:spcAft>
+              <a:defRPr sz="950">
                 <a:solidFill>
                   <a:srgbClr val="B9AFC6"/>
                 </a:solidFill>
+                <a:latin typeface="Arial"/>
               </a:defRPr>
             </a:pPr>
             <a:r>
@@ -4662,6 +4841,7 @@
                 <a:solidFill>
                   <a:srgbClr val="FFFFFF"/>
                 </a:solidFill>
+                <a:latin typeface="Arial"/>
               </a:defRPr>
             </a:pPr>
             <a:r>
@@ -4671,12 +4851,13 @@
           <a:p>
             <a:pPr>
               <a:spcAft>
-                <a:spcPts val="800"/>
-              </a:spcAft>
-              <a:defRPr sz="1000">
+                <a:spcPts val="700"/>
+              </a:spcAft>
+              <a:defRPr sz="950">
                 <a:solidFill>
                   <a:srgbClr val="B9AFC6"/>
                 </a:solidFill>
+                <a:latin typeface="Arial"/>
               </a:defRPr>
             </a:pPr>
             <a:r>
@@ -4689,6 +4870,7 @@
                 <a:solidFill>
                   <a:srgbClr val="FFFFFF"/>
                 </a:solidFill>
+                <a:latin typeface="Arial"/>
               </a:defRPr>
             </a:pPr>
             <a:r>
@@ -4698,12 +4880,13 @@
           <a:p>
             <a:pPr>
               <a:spcAft>
-                <a:spcPts val="800"/>
-              </a:spcAft>
-              <a:defRPr sz="1000">
+                <a:spcPts val="700"/>
+              </a:spcAft>
+              <a:defRPr sz="950">
                 <a:solidFill>
                   <a:srgbClr val="B9AFC6"/>
                 </a:solidFill>
+                <a:latin typeface="Arial"/>
               </a:defRPr>
             </a:pPr>
             <a:r>
@@ -4720,8 +4903,8 @@
         </p:nvSpPr>
         <p:spPr>
           <a:xfrm>
-            <a:off x="4389120" y="1463040"/>
-            <a:ext cx="3328416" cy="4846320"/>
+            <a:off x="4389120" y="1417320"/>
+            <a:ext cx="3328416" cy="4937760"/>
           </a:xfrm>
           <a:prstGeom prst="roundRect">
             <a:avLst/>
@@ -4729,7 +4912,7 @@
           <a:solidFill>
             <a:srgbClr val="262030"/>
           </a:solidFill>
-          <a:ln>
+          <a:ln w="19050">
             <a:solidFill>
               <a:srgbClr val="413750"/>
             </a:solidFill>
@@ -4750,17 +4933,44 @@
           </a:fontRef>
         </p:style>
         <p:txBody>
-          <a:bodyPr rtlCol="0" anchor="ctr" wrap="square" lIns="274320" tIns="274320" rIns="274320" bIns="274320"/>
-          <a:lstStyle/>
-          <a:p>
-            <a:pPr algn="ctr">
-              <a:spcAft>
-                <a:spcPts val="1200"/>
+          <a:bodyPr rtlCol="0" anchor="ctr"/>
+          <a:lstStyle/>
+          <a:p>
+            <a:pPr algn="ctr"/>
+          </a:p>
+        </p:txBody>
+      </p:sp>
+      <p:sp>
+        <p:nvSpPr>
+          <p:cNvPr id="7" name="TextBox 6"/>
+          <p:cNvSpPr txBox="1"/>
+          <p:nvPr/>
+        </p:nvSpPr>
+        <p:spPr>
+          <a:xfrm>
+            <a:off x="4572000" y="1554480"/>
+            <a:ext cx="2962656" cy="4663440"/>
+          </a:xfrm>
+          <a:prstGeom prst="rect">
+            <a:avLst/>
+          </a:prstGeom>
+          <a:noFill/>
+        </p:spPr>
+        <p:txBody>
+          <a:bodyPr wrap="square">
+            <a:spAutoFit/>
+          </a:bodyPr>
+          <a:lstStyle/>
+          <a:p>
+            <a:pPr>
+              <a:spcAft>
+                <a:spcPts val="1000"/>
               </a:spcAft>
               <a:defRPr sz="1300" b="1">
                 <a:solidFill>
                   <a:srgbClr val="3B82F6"/>
                 </a:solidFill>
+                <a:latin typeface="Arial"/>
               </a:defRPr>
             </a:pPr>
             <a:r>
@@ -4773,21 +4983,23 @@
                 <a:solidFill>
                   <a:srgbClr val="FFFFFF"/>
                 </a:solidFill>
-              </a:defRPr>
-            </a:pPr>
-            <a:r>
-              <a:t>⚡ Stateless JWT Authentication</a:t>
-            </a:r>
-          </a:p>
-          <a:p>
-            <a:pPr>
-              <a:spcAft>
-                <a:spcPts val="800"/>
-              </a:spcAft>
-              <a:defRPr sz="1000">
+                <a:latin typeface="Arial"/>
+              </a:defRPr>
+            </a:pPr>
+            <a:r>
+              <a:t>⚡ Stateless JWT Auth</a:t>
+            </a:r>
+          </a:p>
+          <a:p>
+            <a:pPr>
+              <a:spcAft>
+                <a:spcPts val="700"/>
+              </a:spcAft>
+              <a:defRPr sz="950">
                 <a:solidFill>
                   <a:srgbClr val="B9AFC6"/>
                 </a:solidFill>
+                <a:latin typeface="Arial"/>
               </a:defRPr>
             </a:pPr>
             <a:r>
@@ -4800,6 +5012,7 @@
                 <a:solidFill>
                   <a:srgbClr val="FFFFFF"/>
                 </a:solidFill>
+                <a:latin typeface="Arial"/>
               </a:defRPr>
             </a:pPr>
             <a:r>
@@ -4809,12 +5022,13 @@
           <a:p>
             <a:pPr>
               <a:spcAft>
-                <a:spcPts val="800"/>
-              </a:spcAft>
-              <a:defRPr sz="1000">
+                <a:spcPts val="700"/>
+              </a:spcAft>
+              <a:defRPr sz="950">
                 <a:solidFill>
                   <a:srgbClr val="B9AFC6"/>
                 </a:solidFill>
+                <a:latin typeface="Arial"/>
               </a:defRPr>
             </a:pPr>
             <a:r>
@@ -4827,25 +5041,27 @@
                 <a:solidFill>
                   <a:srgbClr val="FFFFFF"/>
                 </a:solidFill>
-              </a:defRPr>
-            </a:pPr>
-            <a:r>
-              <a:t>⚡ Role-Based Access Control</a:t>
-            </a:r>
-          </a:p>
-          <a:p>
-            <a:pPr>
-              <a:spcAft>
-                <a:spcPts val="800"/>
-              </a:spcAft>
-              <a:defRPr sz="1000">
+                <a:latin typeface="Arial"/>
+              </a:defRPr>
+            </a:pPr>
+            <a:r>
+              <a:t>⚡ Strict Role Barrier (RBAC)</a:t>
+            </a:r>
+          </a:p>
+          <a:p>
+            <a:pPr>
+              <a:spcAft>
+                <a:spcPts val="700"/>
+              </a:spcAft>
+              <a:defRPr sz="950">
                 <a:solidFill>
                   <a:srgbClr val="B9AFC6"/>
                 </a:solidFill>
-              </a:defRPr>
-            </a:pPr>
-            <a:r>
-              <a:t>Strict barrier preventing retailers from listing stock and wholesalers from placing orders.</a:t>
+                <a:latin typeface="Arial"/>
+              </a:defRPr>
+            </a:pPr>
+            <a:r>
+              <a:t>Prevents retailers from listing stock and wholesalers from placing orders.</a:t>
             </a:r>
           </a:p>
           <a:p>
@@ -4854,6 +5070,7 @@
                 <a:solidFill>
                   <a:srgbClr val="FFFFFF"/>
                 </a:solidFill>
+                <a:latin typeface="Arial"/>
               </a:defRPr>
             </a:pPr>
             <a:r>
@@ -4863,12 +5080,13 @@
           <a:p>
             <a:pPr>
               <a:spcAft>
-                <a:spcPts val="800"/>
-              </a:spcAft>
-              <a:defRPr sz="1000">
+                <a:spcPts val="700"/>
+              </a:spcAft>
+              <a:defRPr sz="950">
                 <a:solidFill>
                   <a:srgbClr val="B9AFC6"/>
                 </a:solidFill>
+                <a:latin typeface="Arial"/>
               </a:defRPr>
             </a:pPr>
             <a:r>
@@ -4879,14 +5097,14 @@
       </p:sp>
       <p:sp>
         <p:nvSpPr>
-          <p:cNvPr id="7" name="Rounded Rectangle 6"/>
+          <p:cNvPr id="8" name="Rounded Rectangle 7"/>
           <p:cNvSpPr/>
           <p:nvPr/>
         </p:nvSpPr>
         <p:spPr>
           <a:xfrm>
-            <a:off x="8046720" y="1463040"/>
-            <a:ext cx="3328416" cy="4846320"/>
+            <a:off x="8046720" y="1417320"/>
+            <a:ext cx="3328416" cy="4937760"/>
           </a:xfrm>
           <a:prstGeom prst="roundRect">
             <a:avLst/>
@@ -4894,7 +5112,7 @@
           <a:solidFill>
             <a:srgbClr val="262030"/>
           </a:solidFill>
-          <a:ln>
+          <a:ln w="19050">
             <a:solidFill>
               <a:srgbClr val="413750"/>
             </a:solidFill>
@@ -4915,17 +5133,44 @@
           </a:fontRef>
         </p:style>
         <p:txBody>
-          <a:bodyPr rtlCol="0" anchor="ctr" wrap="square" lIns="274320" tIns="274320" rIns="274320" bIns="274320"/>
-          <a:lstStyle/>
-          <a:p>
-            <a:pPr algn="ctr">
-              <a:spcAft>
-                <a:spcPts val="1200"/>
+          <a:bodyPr rtlCol="0" anchor="ctr"/>
+          <a:lstStyle/>
+          <a:p>
+            <a:pPr algn="ctr"/>
+          </a:p>
+        </p:txBody>
+      </p:sp>
+      <p:sp>
+        <p:nvSpPr>
+          <p:cNvPr id="9" name="TextBox 8"/>
+          <p:cNvSpPr txBox="1"/>
+          <p:nvPr/>
+        </p:nvSpPr>
+        <p:spPr>
+          <a:xfrm>
+            <a:off x="8229600" y="1554480"/>
+            <a:ext cx="2962656" cy="4663440"/>
+          </a:xfrm>
+          <a:prstGeom prst="rect">
+            <a:avLst/>
+          </a:prstGeom>
+          <a:noFill/>
+        </p:spPr>
+        <p:txBody>
+          <a:bodyPr wrap="square">
+            <a:spAutoFit/>
+          </a:bodyPr>
+          <a:lstStyle/>
+          <a:p>
+            <a:pPr>
+              <a:spcAft>
+                <a:spcPts val="1000"/>
               </a:spcAft>
               <a:defRPr sz="1300" b="1">
                 <a:solidFill>
                   <a:srgbClr val="22C55E"/>
                 </a:solidFill>
+                <a:latin typeface="Arial"/>
               </a:defRPr>
             </a:pPr>
             <a:r>
@@ -4938,6 +5183,7 @@
                 <a:solidFill>
                   <a:srgbClr val="FFFFFF"/>
                 </a:solidFill>
+                <a:latin typeface="Arial"/>
               </a:defRPr>
             </a:pPr>
             <a:r>
@@ -4947,12 +5193,13 @@
           <a:p>
             <a:pPr>
               <a:spcAft>
-                <a:spcPts val="800"/>
-              </a:spcAft>
-              <a:defRPr sz="1000">
+                <a:spcPts val="700"/>
+              </a:spcAft>
+              <a:defRPr sz="950">
                 <a:solidFill>
                   <a:srgbClr val="B9AFC6"/>
                 </a:solidFill>
+                <a:latin typeface="Arial"/>
               </a:defRPr>
             </a:pPr>
             <a:r>
@@ -4965,6 +5212,7 @@
                 <a:solidFill>
                   <a:srgbClr val="FFFFFF"/>
                 </a:solidFill>
+                <a:latin typeface="Arial"/>
               </a:defRPr>
             </a:pPr>
             <a:r>
@@ -4974,12 +5222,13 @@
           <a:p>
             <a:pPr>
               <a:spcAft>
-                <a:spcPts val="800"/>
-              </a:spcAft>
-              <a:defRPr sz="1000">
+                <a:spcPts val="700"/>
+              </a:spcAft>
+              <a:defRPr sz="950">
                 <a:solidFill>
                   <a:srgbClr val="B9AFC6"/>
                 </a:solidFill>
+                <a:latin typeface="Arial"/>
               </a:defRPr>
             </a:pPr>
             <a:r>
@@ -4992,6 +5241,7 @@
                 <a:solidFill>
                   <a:srgbClr val="FFFFFF"/>
                 </a:solidFill>
+                <a:latin typeface="Arial"/>
               </a:defRPr>
             </a:pPr>
             <a:r>
@@ -5001,12 +5251,13 @@
           <a:p>
             <a:pPr>
               <a:spcAft>
-                <a:spcPts val="800"/>
-              </a:spcAft>
-              <a:defRPr sz="1000">
+                <a:spcPts val="700"/>
+              </a:spcAft>
+              <a:defRPr sz="950">
                 <a:solidFill>
                   <a:srgbClr val="B9AFC6"/>
                 </a:solidFill>
+                <a:latin typeface="Arial"/>
               </a:defRPr>
             </a:pPr>
             <a:r>
@@ -5019,6 +5270,7 @@
                 <a:solidFill>
                   <a:srgbClr val="FFFFFF"/>
                 </a:solidFill>
+                <a:latin typeface="Arial"/>
               </a:defRPr>
             </a:pPr>
             <a:r>
@@ -5028,12 +5280,13 @@
           <a:p>
             <a:pPr>
               <a:spcAft>
-                <a:spcPts val="800"/>
-              </a:spcAft>
-              <a:defRPr sz="1000">
+                <a:spcPts val="700"/>
+              </a:spcAft>
+              <a:defRPr sz="950">
                 <a:solidFill>
                   <a:srgbClr val="B9AFC6"/>
                 </a:solidFill>
+                <a:latin typeface="Arial"/>
               </a:defRPr>
             </a:pPr>
             <a:r>
@@ -5053,6 +5306,14 @@
 <file path=ppt/slides/slide4.xml><?xml version="1.0" encoding="utf-8"?>
 <p:sld xmlns:a="http://schemas.openxmlformats.org/drawingml/2006/main" xmlns:p="http://schemas.openxmlformats.org/presentationml/2006/main" xmlns:r="http://schemas.openxmlformats.org/officeDocument/2006/relationships">
   <p:cSld>
+    <p:bg>
+      <p:bgPr>
+        <a:solidFill>
+          <a:srgbClr val="1A1622"/>
+        </a:solidFill>
+        <a:effectLst/>
+      </p:bgPr>
+    </p:bg>
     <p:spTree>
       <p:nvGrpSpPr>
         <p:cNvPr id="1" name=""/>
@@ -5062,57 +5323,14 @@
       <p:grpSpPr/>
       <p:sp>
         <p:nvSpPr>
-          <p:cNvPr id="2" name="Rectangle 1"/>
-          <p:cNvSpPr/>
-          <p:nvPr/>
-        </p:nvSpPr>
-        <p:spPr>
-          <a:xfrm>
-            <a:off x="0" y="0"/>
-            <a:ext cx="12191695" cy="6858000"/>
-          </a:xfrm>
-          <a:prstGeom prst="rect">
-            <a:avLst/>
-          </a:prstGeom>
-          <a:solidFill>
-            <a:srgbClr val="1A1622"/>
-          </a:solidFill>
-          <a:ln>
-            <a:noFill/>
-          </a:ln>
-        </p:spPr>
-        <p:style>
-          <a:lnRef idx="1">
-            <a:schemeClr val="accent1"/>
-          </a:lnRef>
-          <a:fillRef idx="3">
-            <a:schemeClr val="accent1"/>
-          </a:fillRef>
-          <a:effectRef idx="2">
-            <a:schemeClr val="accent1"/>
-          </a:effectRef>
-          <a:fontRef idx="minor">
-            <a:schemeClr val="lt1"/>
-          </a:fontRef>
-        </p:style>
-        <p:txBody>
-          <a:bodyPr rtlCol="0" anchor="ctr"/>
-          <a:lstStyle/>
-          <a:p>
-            <a:pPr algn="ctr"/>
-          </a:p>
-        </p:txBody>
-      </p:sp>
-      <p:sp>
-        <p:nvSpPr>
-          <p:cNvPr id="3" name="TextBox 2"/>
+          <p:cNvPr id="2" name="TextBox 1"/>
           <p:cNvSpPr txBox="1"/>
           <p:nvPr/>
         </p:nvSpPr>
         <p:spPr>
           <a:xfrm>
             <a:off x="731520" y="365760"/>
-            <a:ext cx="10698480" cy="365760"/>
+            <a:ext cx="10698480" cy="320040"/>
           </a:xfrm>
           <a:prstGeom prst="rect">
             <a:avLst/>
@@ -5120,7 +5338,7 @@
           <a:noFill/>
         </p:spPr>
         <p:txBody>
-          <a:bodyPr wrap="square" lIns="0" tIns="0" rIns="0" bIns="0">
+          <a:bodyPr wrap="square">
             <a:spAutoFit/>
           </a:bodyPr>
           <a:lstStyle/>
@@ -5130,6 +5348,7 @@
                 <a:solidFill>
                   <a:srgbClr val="FFA062"/>
                 </a:solidFill>
+                <a:latin typeface="Arial"/>
               </a:defRPr>
             </a:pPr>
             <a:r>
@@ -5140,14 +5359,14 @@
       </p:sp>
       <p:sp>
         <p:nvSpPr>
-          <p:cNvPr id="4" name="TextBox 3"/>
+          <p:cNvPr id="3" name="TextBox 2"/>
           <p:cNvSpPr txBox="1"/>
           <p:nvPr/>
         </p:nvSpPr>
         <p:spPr>
           <a:xfrm>
             <a:off x="731520" y="685800"/>
-            <a:ext cx="10698480" cy="640080"/>
+            <a:ext cx="10698480" cy="594360"/>
           </a:xfrm>
           <a:prstGeom prst="rect">
             <a:avLst/>
@@ -5155,7 +5374,7 @@
           <a:noFill/>
         </p:spPr>
         <p:txBody>
-          <a:bodyPr wrap="square" lIns="0" tIns="0" rIns="0" bIns="0">
+          <a:bodyPr wrap="square">
             <a:spAutoFit/>
           </a:bodyPr>
           <a:lstStyle/>
@@ -5165,6 +5384,7 @@
                 <a:solidFill>
                   <a:srgbClr val="FFFFFF"/>
                 </a:solidFill>
+                <a:latin typeface="Arial"/>
               </a:defRPr>
             </a:pPr>
             <a:r>
@@ -5175,14 +5395,14 @@
       </p:sp>
       <p:sp>
         <p:nvSpPr>
-          <p:cNvPr id="5" name="Rounded Rectangle 4"/>
+          <p:cNvPr id="4" name="Rounded Rectangle 3"/>
           <p:cNvSpPr/>
           <p:nvPr/>
         </p:nvSpPr>
         <p:spPr>
           <a:xfrm>
-            <a:off x="731520" y="1463040"/>
-            <a:ext cx="3328416" cy="4846320"/>
+            <a:off x="731520" y="1417320"/>
+            <a:ext cx="3328416" cy="4937760"/>
           </a:xfrm>
           <a:prstGeom prst="roundRect">
             <a:avLst/>
@@ -5190,7 +5410,7 @@
           <a:solidFill>
             <a:srgbClr val="262030"/>
           </a:solidFill>
-          <a:ln>
+          <a:ln w="19050">
             <a:solidFill>
               <a:srgbClr val="413750"/>
             </a:solidFill>
@@ -5211,17 +5431,44 @@
           </a:fontRef>
         </p:style>
         <p:txBody>
-          <a:bodyPr rtlCol="0" anchor="ctr" wrap="square" lIns="274320" tIns="274320" rIns="274320" bIns="274320"/>
-          <a:lstStyle/>
-          <a:p>
-            <a:pPr algn="ctr">
-              <a:spcAft>
-                <a:spcPts val="1200"/>
+          <a:bodyPr rtlCol="0" anchor="ctr"/>
+          <a:lstStyle/>
+          <a:p>
+            <a:pPr algn="ctr"/>
+          </a:p>
+        </p:txBody>
+      </p:sp>
+      <p:sp>
+        <p:nvSpPr>
+          <p:cNvPr id="5" name="TextBox 4"/>
+          <p:cNvSpPr txBox="1"/>
+          <p:nvPr/>
+        </p:nvSpPr>
+        <p:spPr>
+          <a:xfrm>
+            <a:off x="914400" y="1554480"/>
+            <a:ext cx="2962656" cy="4663440"/>
+          </a:xfrm>
+          <a:prstGeom prst="rect">
+            <a:avLst/>
+          </a:prstGeom>
+          <a:noFill/>
+        </p:spPr>
+        <p:txBody>
+          <a:bodyPr wrap="square">
+            <a:spAutoFit/>
+          </a:bodyPr>
+          <a:lstStyle/>
+          <a:p>
+            <a:pPr>
+              <a:spcAft>
+                <a:spcPts val="1000"/>
               </a:spcAft>
               <a:defRPr sz="1300" b="1">
                 <a:solidFill>
                   <a:srgbClr val="22C55E"/>
                 </a:solidFill>
+                <a:latin typeface="Arial"/>
               </a:defRPr>
             </a:pPr>
             <a:r>
@@ -5234,21 +5481,23 @@
                 <a:solidFill>
                   <a:srgbClr val="FFFFFF"/>
                 </a:solidFill>
-              </a:defRPr>
-            </a:pPr>
-            <a:r>
-              <a:t>★ Disintermediation</a:t>
-            </a:r>
-          </a:p>
-          <a:p>
-            <a:pPr>
-              <a:spcAft>
-                <a:spcPts val="800"/>
-              </a:spcAft>
-              <a:defRPr sz="1000">
+                <a:latin typeface="Arial"/>
+              </a:defRPr>
+            </a:pPr>
+            <a:r>
+              <a:t>★ Direct Disintermediation</a:t>
+            </a:r>
+          </a:p>
+          <a:p>
+            <a:pPr>
+              <a:spcAft>
+                <a:spcPts val="700"/>
+              </a:spcAft>
+              <a:defRPr sz="950">
                 <a:solidFill>
                   <a:srgbClr val="B9AFC6"/>
                 </a:solidFill>
+                <a:latin typeface="Arial"/>
               </a:defRPr>
             </a:pPr>
             <a:r>
@@ -5261,6 +5510,7 @@
                 <a:solidFill>
                   <a:srgbClr val="FFFFFF"/>
                 </a:solidFill>
+                <a:latin typeface="Arial"/>
               </a:defRPr>
             </a:pPr>
             <a:r>
@@ -5270,12 +5520,13 @@
           <a:p>
             <a:pPr>
               <a:spcAft>
-                <a:spcPts val="800"/>
-              </a:spcAft>
-              <a:defRPr sz="1000">
+                <a:spcPts val="700"/>
+              </a:spcAft>
+              <a:defRPr sz="950">
                 <a:solidFill>
                   <a:srgbClr val="B9AFC6"/>
                 </a:solidFill>
+                <a:latin typeface="Arial"/>
               </a:defRPr>
             </a:pPr>
             <a:r>
@@ -5288,6 +5539,7 @@
                 <a:solidFill>
                   <a:srgbClr val="FFFFFF"/>
                 </a:solidFill>
+                <a:latin typeface="Arial"/>
               </a:defRPr>
             </a:pPr>
             <a:r>
@@ -5297,12 +5549,13 @@
           <a:p>
             <a:pPr>
               <a:spcAft>
-                <a:spcPts val="800"/>
-              </a:spcAft>
-              <a:defRPr sz="1000">
+                <a:spcPts val="700"/>
+              </a:spcAft>
+              <a:defRPr sz="950">
                 <a:solidFill>
                   <a:srgbClr val="B9AFC6"/>
                 </a:solidFill>
+                <a:latin typeface="Arial"/>
               </a:defRPr>
             </a:pPr>
             <a:r>
@@ -5315,6 +5568,7 @@
                 <a:solidFill>
                   <a:srgbClr val="FFFFFF"/>
                 </a:solidFill>
+                <a:latin typeface="Arial"/>
               </a:defRPr>
             </a:pPr>
             <a:r>
@@ -5324,12 +5578,13 @@
           <a:p>
             <a:pPr>
               <a:spcAft>
-                <a:spcPts val="800"/>
-              </a:spcAft>
-              <a:defRPr sz="1000">
+                <a:spcPts val="700"/>
+              </a:spcAft>
+              <a:defRPr sz="950">
                 <a:solidFill>
                   <a:srgbClr val="B9AFC6"/>
                 </a:solidFill>
+                <a:latin typeface="Arial"/>
               </a:defRPr>
             </a:pPr>
             <a:r>
@@ -5346,8 +5601,8 @@
         </p:nvSpPr>
         <p:spPr>
           <a:xfrm>
-            <a:off x="4389120" y="1463040"/>
-            <a:ext cx="3328416" cy="4846320"/>
+            <a:off x="4389120" y="1417320"/>
+            <a:ext cx="3328416" cy="4937760"/>
           </a:xfrm>
           <a:prstGeom prst="roundRect">
             <a:avLst/>
@@ -5355,7 +5610,7 @@
           <a:solidFill>
             <a:srgbClr val="262030"/>
           </a:solidFill>
-          <a:ln>
+          <a:ln w="19050">
             <a:solidFill>
               <a:srgbClr val="413750"/>
             </a:solidFill>
@@ -5376,17 +5631,44 @@
           </a:fontRef>
         </p:style>
         <p:txBody>
-          <a:bodyPr rtlCol="0" anchor="ctr" wrap="square" lIns="274320" tIns="274320" rIns="274320" bIns="274320"/>
-          <a:lstStyle/>
-          <a:p>
-            <a:pPr algn="ctr">
-              <a:spcAft>
-                <a:spcPts val="1200"/>
+          <a:bodyPr rtlCol="0" anchor="ctr"/>
+          <a:lstStyle/>
+          <a:p>
+            <a:pPr algn="ctr"/>
+          </a:p>
+        </p:txBody>
+      </p:sp>
+      <p:sp>
+        <p:nvSpPr>
+          <p:cNvPr id="7" name="TextBox 6"/>
+          <p:cNvSpPr txBox="1"/>
+          <p:nvPr/>
+        </p:nvSpPr>
+        <p:spPr>
+          <a:xfrm>
+            <a:off x="4572000" y="1554480"/>
+            <a:ext cx="2962656" cy="4663440"/>
+          </a:xfrm>
+          <a:prstGeom prst="rect">
+            <a:avLst/>
+          </a:prstGeom>
+          <a:noFill/>
+        </p:spPr>
+        <p:txBody>
+          <a:bodyPr wrap="square">
+            <a:spAutoFit/>
+          </a:bodyPr>
+          <a:lstStyle/>
+          <a:p>
+            <a:pPr>
+              <a:spcAft>
+                <a:spcPts val="1000"/>
               </a:spcAft>
               <a:defRPr sz="1300" b="1">
                 <a:solidFill>
                   <a:srgbClr val="FFA062"/>
                 </a:solidFill>
+                <a:latin typeface="Arial"/>
               </a:defRPr>
             </a:pPr>
             <a:r>
@@ -5399,6 +5681,7 @@
                 <a:solidFill>
                   <a:srgbClr val="FFFFFF"/>
                 </a:solidFill>
+                <a:latin typeface="Arial"/>
               </a:defRPr>
             </a:pPr>
             <a:r>
@@ -5408,12 +5691,13 @@
           <a:p>
             <a:pPr>
               <a:spcAft>
-                <a:spcPts val="800"/>
-              </a:spcAft>
-              <a:defRPr sz="1000">
+                <a:spcPts val="700"/>
+              </a:spcAft>
+              <a:defRPr sz="950">
                 <a:solidFill>
                   <a:srgbClr val="B9AFC6"/>
                 </a:solidFill>
+                <a:latin typeface="Arial"/>
               </a:defRPr>
             </a:pPr>
             <a:r>
@@ -5426,6 +5710,7 @@
                 <a:solidFill>
                   <a:srgbClr val="FFFFFF"/>
                 </a:solidFill>
+                <a:latin typeface="Arial"/>
               </a:defRPr>
             </a:pPr>
             <a:r>
@@ -5435,12 +5720,13 @@
           <a:p>
             <a:pPr>
               <a:spcAft>
-                <a:spcPts val="800"/>
-              </a:spcAft>
-              <a:defRPr sz="1000">
+                <a:spcPts val="700"/>
+              </a:spcAft>
+              <a:defRPr sz="950">
                 <a:solidFill>
                   <a:srgbClr val="B9AFC6"/>
                 </a:solidFill>
+                <a:latin typeface="Arial"/>
               </a:defRPr>
             </a:pPr>
             <a:r>
@@ -5453,6 +5739,7 @@
                 <a:solidFill>
                   <a:srgbClr val="FFFFFF"/>
                 </a:solidFill>
+                <a:latin typeface="Arial"/>
               </a:defRPr>
             </a:pPr>
             <a:r>
@@ -5462,12 +5749,13 @@
           <a:p>
             <a:pPr>
               <a:spcAft>
-                <a:spcPts val="800"/>
-              </a:spcAft>
-              <a:defRPr sz="1000">
+                <a:spcPts val="700"/>
+              </a:spcAft>
+              <a:defRPr sz="950">
                 <a:solidFill>
                   <a:srgbClr val="B9AFC6"/>
                 </a:solidFill>
+                <a:latin typeface="Arial"/>
               </a:defRPr>
             </a:pPr>
             <a:r>
@@ -5480,6 +5768,7 @@
                 <a:solidFill>
                   <a:srgbClr val="FFFFFF"/>
                 </a:solidFill>
+                <a:latin typeface="Arial"/>
               </a:defRPr>
             </a:pPr>
             <a:r>
@@ -5489,12 +5778,13 @@
           <a:p>
             <a:pPr>
               <a:spcAft>
-                <a:spcPts val="800"/>
-              </a:spcAft>
-              <a:defRPr sz="1000">
+                <a:spcPts val="700"/>
+              </a:spcAft>
+              <a:defRPr sz="950">
                 <a:solidFill>
                   <a:srgbClr val="B9AFC6"/>
                 </a:solidFill>
+                <a:latin typeface="Arial"/>
               </a:defRPr>
             </a:pPr>
             <a:r>
@@ -5505,14 +5795,14 @@
       </p:sp>
       <p:sp>
         <p:nvSpPr>
-          <p:cNvPr id="7" name="Rounded Rectangle 6"/>
+          <p:cNvPr id="8" name="Rounded Rectangle 7"/>
           <p:cNvSpPr/>
           <p:nvPr/>
         </p:nvSpPr>
         <p:spPr>
           <a:xfrm>
-            <a:off x="8046720" y="1463040"/>
-            <a:ext cx="3328416" cy="4846320"/>
+            <a:off x="8046720" y="1417320"/>
+            <a:ext cx="3328416" cy="4937760"/>
           </a:xfrm>
           <a:prstGeom prst="roundRect">
             <a:avLst/>
@@ -5520,7 +5810,7 @@
           <a:solidFill>
             <a:srgbClr val="262030"/>
           </a:solidFill>
-          <a:ln>
+          <a:ln w="19050">
             <a:solidFill>
               <a:srgbClr val="413750"/>
             </a:solidFill>
@@ -5541,17 +5831,44 @@
           </a:fontRef>
         </p:style>
         <p:txBody>
-          <a:bodyPr rtlCol="0" anchor="ctr" wrap="square" lIns="274320" tIns="274320" rIns="274320" bIns="274320"/>
-          <a:lstStyle/>
-          <a:p>
-            <a:pPr algn="ctr">
-              <a:spcAft>
-                <a:spcPts val="1200"/>
+          <a:bodyPr rtlCol="0" anchor="ctr"/>
+          <a:lstStyle/>
+          <a:p>
+            <a:pPr algn="ctr"/>
+          </a:p>
+        </p:txBody>
+      </p:sp>
+      <p:sp>
+        <p:nvSpPr>
+          <p:cNvPr id="9" name="TextBox 8"/>
+          <p:cNvSpPr txBox="1"/>
+          <p:nvPr/>
+        </p:nvSpPr>
+        <p:spPr>
+          <a:xfrm>
+            <a:off x="8229600" y="1554480"/>
+            <a:ext cx="2962656" cy="4663440"/>
+          </a:xfrm>
+          <a:prstGeom prst="rect">
+            <a:avLst/>
+          </a:prstGeom>
+          <a:noFill/>
+        </p:spPr>
+        <p:txBody>
+          <a:bodyPr wrap="square">
+            <a:spAutoFit/>
+          </a:bodyPr>
+          <a:lstStyle/>
+          <a:p>
+            <a:pPr>
+              <a:spcAft>
+                <a:spcPts val="1000"/>
               </a:spcAft>
               <a:defRPr sz="1300" b="1">
                 <a:solidFill>
                   <a:srgbClr val="3B82F6"/>
                 </a:solidFill>
+                <a:latin typeface="Arial"/>
               </a:defRPr>
             </a:pPr>
             <a:r>
@@ -5564,6 +5881,7 @@
                 <a:solidFill>
                   <a:srgbClr val="FFFFFF"/>
                 </a:solidFill>
+                <a:latin typeface="Arial"/>
               </a:defRPr>
             </a:pPr>
             <a:r>
@@ -5573,12 +5891,13 @@
           <a:p>
             <a:pPr>
               <a:spcAft>
-                <a:spcPts val="800"/>
-              </a:spcAft>
-              <a:defRPr sz="1000">
+                <a:spcPts val="700"/>
+              </a:spcAft>
+              <a:defRPr sz="950">
                 <a:solidFill>
                   <a:srgbClr val="B9AFC6"/>
                 </a:solidFill>
+                <a:latin typeface="Arial"/>
               </a:defRPr>
             </a:pPr>
             <a:r>
@@ -5591,6 +5910,7 @@
                 <a:solidFill>
                   <a:srgbClr val="FFFFFF"/>
                 </a:solidFill>
+                <a:latin typeface="Arial"/>
               </a:defRPr>
             </a:pPr>
             <a:r>
@@ -5600,12 +5920,13 @@
           <a:p>
             <a:pPr>
               <a:spcAft>
-                <a:spcPts val="800"/>
-              </a:spcAft>
-              <a:defRPr sz="1000">
+                <a:spcPts val="700"/>
+              </a:spcAft>
+              <a:defRPr sz="950">
                 <a:solidFill>
                   <a:srgbClr val="B9AFC6"/>
                 </a:solidFill>
+                <a:latin typeface="Arial"/>
               </a:defRPr>
             </a:pPr>
             <a:r>
@@ -5618,6 +5939,7 @@
                 <a:solidFill>
                   <a:srgbClr val="FFFFFF"/>
                 </a:solidFill>
+                <a:latin typeface="Arial"/>
               </a:defRPr>
             </a:pPr>
             <a:r>
@@ -5627,12 +5949,13 @@
           <a:p>
             <a:pPr>
               <a:spcAft>
-                <a:spcPts val="800"/>
-              </a:spcAft>
-              <a:defRPr sz="1000">
+                <a:spcPts val="700"/>
+              </a:spcAft>
+              <a:defRPr sz="950">
                 <a:solidFill>
                   <a:srgbClr val="B9AFC6"/>
                 </a:solidFill>
+                <a:latin typeface="Arial"/>
               </a:defRPr>
             </a:pPr>
             <a:r>
@@ -5645,6 +5968,7 @@
                 <a:solidFill>
                   <a:srgbClr val="FFFFFF"/>
                 </a:solidFill>
+                <a:latin typeface="Arial"/>
               </a:defRPr>
             </a:pPr>
             <a:r>
@@ -5654,12 +5978,13 @@
           <a:p>
             <a:pPr>
               <a:spcAft>
-                <a:spcPts val="800"/>
-              </a:spcAft>
-              <a:defRPr sz="1000">
+                <a:spcPts val="700"/>
+              </a:spcAft>
+              <a:defRPr sz="950">
                 <a:solidFill>
                   <a:srgbClr val="B9AFC6"/>
                 </a:solidFill>
+                <a:latin typeface="Arial"/>
               </a:defRPr>
             </a:pPr>
             <a:r>
@@ -5679,6 +6004,14 @@
 <file path=ppt/slides/slide5.xml><?xml version="1.0" encoding="utf-8"?>
 <p:sld xmlns:a="http://schemas.openxmlformats.org/drawingml/2006/main" xmlns:p="http://schemas.openxmlformats.org/presentationml/2006/main" xmlns:r="http://schemas.openxmlformats.org/officeDocument/2006/relationships">
   <p:cSld>
+    <p:bg>
+      <p:bgPr>
+        <a:solidFill>
+          <a:srgbClr val="1A1622"/>
+        </a:solidFill>
+        <a:effectLst/>
+      </p:bgPr>
+    </p:bg>
     <p:spTree>
       <p:nvGrpSpPr>
         <p:cNvPr id="1" name=""/>
@@ -5688,57 +6021,14 @@
       <p:grpSpPr/>
       <p:sp>
         <p:nvSpPr>
-          <p:cNvPr id="2" name="Rectangle 1"/>
-          <p:cNvSpPr/>
-          <p:nvPr/>
-        </p:nvSpPr>
-        <p:spPr>
-          <a:xfrm>
-            <a:off x="0" y="0"/>
-            <a:ext cx="12191695" cy="6858000"/>
-          </a:xfrm>
-          <a:prstGeom prst="rect">
-            <a:avLst/>
-          </a:prstGeom>
-          <a:solidFill>
-            <a:srgbClr val="1A1622"/>
-          </a:solidFill>
-          <a:ln>
-            <a:noFill/>
-          </a:ln>
-        </p:spPr>
-        <p:style>
-          <a:lnRef idx="1">
-            <a:schemeClr val="accent1"/>
-          </a:lnRef>
-          <a:fillRef idx="3">
-            <a:schemeClr val="accent1"/>
-          </a:fillRef>
-          <a:effectRef idx="2">
-            <a:schemeClr val="accent1"/>
-          </a:effectRef>
-          <a:fontRef idx="minor">
-            <a:schemeClr val="lt1"/>
-          </a:fontRef>
-        </p:style>
-        <p:txBody>
-          <a:bodyPr rtlCol="0" anchor="ctr"/>
-          <a:lstStyle/>
-          <a:p>
-            <a:pPr algn="ctr"/>
-          </a:p>
-        </p:txBody>
-      </p:sp>
-      <p:sp>
-        <p:nvSpPr>
-          <p:cNvPr id="3" name="TextBox 2"/>
+          <p:cNvPr id="2" name="TextBox 1"/>
           <p:cNvSpPr txBox="1"/>
           <p:nvPr/>
         </p:nvSpPr>
         <p:spPr>
           <a:xfrm>
             <a:off x="731520" y="365760"/>
-            <a:ext cx="10698480" cy="365760"/>
+            <a:ext cx="10698480" cy="320040"/>
           </a:xfrm>
           <a:prstGeom prst="rect">
             <a:avLst/>
@@ -5746,7 +6036,7 @@
           <a:noFill/>
         </p:spPr>
         <p:txBody>
-          <a:bodyPr wrap="square" lIns="0" tIns="0" rIns="0" bIns="0">
+          <a:bodyPr wrap="square">
             <a:spAutoFit/>
           </a:bodyPr>
           <a:lstStyle/>
@@ -5756,6 +6046,7 @@
                 <a:solidFill>
                   <a:srgbClr val="FFA062"/>
                 </a:solidFill>
+                <a:latin typeface="Arial"/>
               </a:defRPr>
             </a:pPr>
             <a:r>
@@ -5766,14 +6057,14 @@
       </p:sp>
       <p:sp>
         <p:nvSpPr>
-          <p:cNvPr id="4" name="TextBox 3"/>
+          <p:cNvPr id="3" name="TextBox 2"/>
           <p:cNvSpPr txBox="1"/>
           <p:nvPr/>
         </p:nvSpPr>
         <p:spPr>
           <a:xfrm>
             <a:off x="731520" y="685800"/>
-            <a:ext cx="10698480" cy="640080"/>
+            <a:ext cx="10698480" cy="594360"/>
           </a:xfrm>
           <a:prstGeom prst="rect">
             <a:avLst/>
@@ -5781,7 +6072,7 @@
           <a:noFill/>
         </p:spPr>
         <p:txBody>
-          <a:bodyPr wrap="square" lIns="0" tIns="0" rIns="0" bIns="0">
+          <a:bodyPr wrap="square">
             <a:spAutoFit/>
           </a:bodyPr>
           <a:lstStyle/>
@@ -5791,6 +6082,7 @@
                 <a:solidFill>
                   <a:srgbClr val="FFFFFF"/>
                 </a:solidFill>
+                <a:latin typeface="Arial"/>
               </a:defRPr>
             </a:pPr>
             <a:r>
@@ -5801,14 +6093,14 @@
       </p:sp>
       <p:sp>
         <p:nvSpPr>
-          <p:cNvPr id="5" name="Rounded Rectangle 4"/>
+          <p:cNvPr id="4" name="Rounded Rectangle 3"/>
           <p:cNvSpPr/>
           <p:nvPr/>
         </p:nvSpPr>
         <p:spPr>
           <a:xfrm>
-            <a:off x="731520" y="1463040"/>
-            <a:ext cx="5120640" cy="4846320"/>
+            <a:off x="731520" y="1417320"/>
+            <a:ext cx="5120640" cy="4937760"/>
           </a:xfrm>
           <a:prstGeom prst="roundRect">
             <a:avLst/>
@@ -5816,7 +6108,7 @@
           <a:solidFill>
             <a:srgbClr val="262030"/>
           </a:solidFill>
-          <a:ln>
+          <a:ln w="19050">
             <a:solidFill>
               <a:srgbClr val="413750"/>
             </a:solidFill>
@@ -5837,17 +6129,44 @@
           </a:fontRef>
         </p:style>
         <p:txBody>
-          <a:bodyPr rtlCol="0" anchor="ctr" wrap="square" lIns="274320" tIns="274320" rIns="274320" bIns="274320"/>
-          <a:lstStyle/>
-          <a:p>
-            <a:pPr algn="ctr">
-              <a:spcAft>
-                <a:spcPts val="1200"/>
+          <a:bodyPr rtlCol="0" anchor="ctr"/>
+          <a:lstStyle/>
+          <a:p>
+            <a:pPr algn="ctr"/>
+          </a:p>
+        </p:txBody>
+      </p:sp>
+      <p:sp>
+        <p:nvSpPr>
+          <p:cNvPr id="5" name="TextBox 4"/>
+          <p:cNvSpPr txBox="1"/>
+          <p:nvPr/>
+        </p:nvSpPr>
+        <p:spPr>
+          <a:xfrm>
+            <a:off x="960120" y="1554480"/>
+            <a:ext cx="4663440" cy="4663440"/>
+          </a:xfrm>
+          <a:prstGeom prst="rect">
+            <a:avLst/>
+          </a:prstGeom>
+          <a:noFill/>
+        </p:spPr>
+        <p:txBody>
+          <a:bodyPr wrap="square">
+            <a:spAutoFit/>
+          </a:bodyPr>
+          <a:lstStyle/>
+          <a:p>
+            <a:pPr>
+              <a:spcAft>
+                <a:spcPts val="1000"/>
               </a:spcAft>
               <a:defRPr sz="1300" b="1">
                 <a:solidFill>
                   <a:srgbClr val="22C55E"/>
                 </a:solidFill>
+                <a:latin typeface="Arial"/>
               </a:defRPr>
             </a:pPr>
             <a:r>
@@ -5860,6 +6179,7 @@
                 <a:solidFill>
                   <a:srgbClr val="FFFFFF"/>
                 </a:solidFill>
+                <a:latin typeface="Arial"/>
               </a:defRPr>
             </a:pPr>
             <a:r>
@@ -5872,6 +6192,7 @@
                 <a:solidFill>
                   <a:srgbClr val="FFA062"/>
                 </a:solidFill>
+                <a:latin typeface="Arial"/>
               </a:defRPr>
             </a:pPr>
             <a:r>
@@ -5881,12 +6202,13 @@
           <a:p>
             <a:pPr>
               <a:spcAft>
-                <a:spcPts val="800"/>
+                <a:spcPts val="700"/>
               </a:spcAft>
               <a:defRPr sz="900">
                 <a:solidFill>
                   <a:srgbClr val="B9AFC6"/>
                 </a:solidFill>
+                <a:latin typeface="Arial"/>
               </a:defRPr>
             </a:pPr>
             <a:r>
@@ -5899,6 +6221,7 @@
                 <a:solidFill>
                   <a:srgbClr val="FFFFFF"/>
                 </a:solidFill>
+                <a:latin typeface="Arial"/>
               </a:defRPr>
             </a:pPr>
             <a:r>
@@ -5911,6 +6234,7 @@
                 <a:solidFill>
                   <a:srgbClr val="FFA062"/>
                 </a:solidFill>
+                <a:latin typeface="Arial"/>
               </a:defRPr>
             </a:pPr>
             <a:r>
@@ -5920,12 +6244,13 @@
           <a:p>
             <a:pPr>
               <a:spcAft>
-                <a:spcPts val="800"/>
+                <a:spcPts val="700"/>
               </a:spcAft>
               <a:defRPr sz="900">
                 <a:solidFill>
                   <a:srgbClr val="B9AFC6"/>
                 </a:solidFill>
+                <a:latin typeface="Arial"/>
               </a:defRPr>
             </a:pPr>
             <a:r>
@@ -5938,6 +6263,7 @@
                 <a:solidFill>
                   <a:srgbClr val="FFFFFF"/>
                 </a:solidFill>
+                <a:latin typeface="Arial"/>
               </a:defRPr>
             </a:pPr>
             <a:r>
@@ -5950,6 +6276,7 @@
                 <a:solidFill>
                   <a:srgbClr val="FFA062"/>
                 </a:solidFill>
+                <a:latin typeface="Arial"/>
               </a:defRPr>
             </a:pPr>
             <a:r>
@@ -5959,12 +6286,13 @@
           <a:p>
             <a:pPr>
               <a:spcAft>
-                <a:spcPts val="800"/>
+                <a:spcPts val="700"/>
               </a:spcAft>
               <a:defRPr sz="900">
                 <a:solidFill>
                   <a:srgbClr val="B9AFC6"/>
                 </a:solidFill>
+                <a:latin typeface="Arial"/>
               </a:defRPr>
             </a:pPr>
             <a:r>
@@ -5977,6 +6305,7 @@
                 <a:solidFill>
                   <a:srgbClr val="FFFFFF"/>
                 </a:solidFill>
+                <a:latin typeface="Arial"/>
               </a:defRPr>
             </a:pPr>
             <a:r>
@@ -5989,6 +6318,7 @@
                 <a:solidFill>
                   <a:srgbClr val="FFA062"/>
                 </a:solidFill>
+                <a:latin typeface="Arial"/>
               </a:defRPr>
             </a:pPr>
             <a:r>
@@ -5998,12 +6328,13 @@
           <a:p>
             <a:pPr>
               <a:spcAft>
-                <a:spcPts val="800"/>
+                <a:spcPts val="700"/>
               </a:spcAft>
               <a:defRPr sz="900">
                 <a:solidFill>
                   <a:srgbClr val="B9AFC6"/>
                 </a:solidFill>
+                <a:latin typeface="Arial"/>
               </a:defRPr>
             </a:pPr>
             <a:r>
@@ -6020,8 +6351,8 @@
         </p:nvSpPr>
         <p:spPr>
           <a:xfrm>
-            <a:off x="6217920" y="1463040"/>
-            <a:ext cx="5212080" cy="4846320"/>
+            <a:off x="6217920" y="1417320"/>
+            <a:ext cx="5212080" cy="4937760"/>
           </a:xfrm>
           <a:prstGeom prst="roundRect">
             <a:avLst/>
@@ -6029,7 +6360,7 @@
           <a:solidFill>
             <a:srgbClr val="262030"/>
           </a:solidFill>
-          <a:ln>
+          <a:ln w="19050">
             <a:solidFill>
               <a:srgbClr val="413750"/>
             </a:solidFill>
@@ -6050,17 +6381,44 @@
           </a:fontRef>
         </p:style>
         <p:txBody>
-          <a:bodyPr rtlCol="0" anchor="ctr" wrap="square" lIns="274320" tIns="274320" rIns="274320" bIns="274320"/>
-          <a:lstStyle/>
-          <a:p>
-            <a:pPr algn="ctr">
-              <a:spcAft>
-                <a:spcPts val="1200"/>
+          <a:bodyPr rtlCol="0" anchor="ctr"/>
+          <a:lstStyle/>
+          <a:p>
+            <a:pPr algn="ctr"/>
+          </a:p>
+        </p:txBody>
+      </p:sp>
+      <p:sp>
+        <p:nvSpPr>
+          <p:cNvPr id="7" name="TextBox 6"/>
+          <p:cNvSpPr txBox="1"/>
+          <p:nvPr/>
+        </p:nvSpPr>
+        <p:spPr>
+          <a:xfrm>
+            <a:off x="6446520" y="1554480"/>
+            <a:ext cx="4754880" cy="4663440"/>
+          </a:xfrm>
+          <a:prstGeom prst="rect">
+            <a:avLst/>
+          </a:prstGeom>
+          <a:noFill/>
+        </p:spPr>
+        <p:txBody>
+          <a:bodyPr wrap="square">
+            <a:spAutoFit/>
+          </a:bodyPr>
+          <a:lstStyle/>
+          <a:p>
+            <a:pPr>
+              <a:spcAft>
+                <a:spcPts val="1000"/>
               </a:spcAft>
               <a:defRPr sz="1300" b="1">
                 <a:solidFill>
                   <a:srgbClr val="FFA062"/>
                 </a:solidFill>
+                <a:latin typeface="Arial"/>
               </a:defRPr>
             </a:pPr>
             <a:r>
@@ -6073,6 +6431,7 @@
                 <a:solidFill>
                   <a:srgbClr val="FFFFFF"/>
                 </a:solidFill>
+                <a:latin typeface="Arial"/>
               </a:defRPr>
             </a:pPr>
             <a:r>
@@ -6082,12 +6441,13 @@
           <a:p>
             <a:pPr>
               <a:spcAft>
-                <a:spcPts val="600"/>
+                <a:spcPts val="500"/>
               </a:spcAft>
               <a:defRPr sz="950">
                 <a:solidFill>
-                  <a:srgbClr val="D7D0E1"/>
-                </a:solidFill>
+                  <a:srgbClr val="E1DAEB"/>
+                </a:solidFill>
+                <a:latin typeface="Arial"/>
               </a:defRPr>
             </a:pPr>
             <a:r>
@@ -6100,6 +6460,7 @@
                 <a:solidFill>
                   <a:srgbClr val="FFFFFF"/>
                 </a:solidFill>
+                <a:latin typeface="Arial"/>
               </a:defRPr>
             </a:pPr>
             <a:r>
@@ -6109,12 +6470,13 @@
           <a:p>
             <a:pPr>
               <a:spcAft>
-                <a:spcPts val="600"/>
+                <a:spcPts val="500"/>
               </a:spcAft>
               <a:defRPr sz="950">
                 <a:solidFill>
-                  <a:srgbClr val="D7D0E1"/>
-                </a:solidFill>
+                  <a:srgbClr val="E1DAEB"/>
+                </a:solidFill>
+                <a:latin typeface="Arial"/>
               </a:defRPr>
             </a:pPr>
             <a:r>
@@ -6127,6 +6489,7 @@
                 <a:solidFill>
                   <a:srgbClr val="FFFFFF"/>
                 </a:solidFill>
+                <a:latin typeface="Arial"/>
               </a:defRPr>
             </a:pPr>
             <a:r>
@@ -6136,12 +6499,13 @@
           <a:p>
             <a:pPr>
               <a:spcAft>
-                <a:spcPts val="600"/>
+                <a:spcPts val="500"/>
               </a:spcAft>
               <a:defRPr sz="950">
                 <a:solidFill>
-                  <a:srgbClr val="D7D0E1"/>
-                </a:solidFill>
+                  <a:srgbClr val="E1DAEB"/>
+                </a:solidFill>
+                <a:latin typeface="Arial"/>
               </a:defRPr>
             </a:pPr>
             <a:r>
@@ -6154,6 +6518,7 @@
                 <a:solidFill>
                   <a:srgbClr val="FFFFFF"/>
                 </a:solidFill>
+                <a:latin typeface="Arial"/>
               </a:defRPr>
             </a:pPr>
             <a:r>
@@ -6163,12 +6528,13 @@
           <a:p>
             <a:pPr>
               <a:spcAft>
-                <a:spcPts val="600"/>
+                <a:spcPts val="500"/>
               </a:spcAft>
               <a:defRPr sz="950">
                 <a:solidFill>
-                  <a:srgbClr val="D7D0E1"/>
-                </a:solidFill>
+                  <a:srgbClr val="E1DAEB"/>
+                </a:solidFill>
+                <a:latin typeface="Arial"/>
               </a:defRPr>
             </a:pPr>
             <a:r>
@@ -6181,6 +6547,7 @@
                 <a:solidFill>
                   <a:srgbClr val="FFFFFF"/>
                 </a:solidFill>
+                <a:latin typeface="Arial"/>
               </a:defRPr>
             </a:pPr>
             <a:r>
@@ -6190,12 +6557,13 @@
           <a:p>
             <a:pPr>
               <a:spcAft>
-                <a:spcPts val="600"/>
+                <a:spcPts val="500"/>
               </a:spcAft>
               <a:defRPr sz="950">
                 <a:solidFill>
-                  <a:srgbClr val="D7D0E1"/>
-                </a:solidFill>
+                  <a:srgbClr val="E1DAEB"/>
+                </a:solidFill>
+                <a:latin typeface="Arial"/>
               </a:defRPr>
             </a:pPr>
             <a:r>

--- a/StockLink_Capstone_Presentation.pptx
+++ b/StockLink_Capstone_Presentation.pptx
@@ -3088,7 +3088,7 @@
     <p:bg>
       <p:bgPr>
         <a:solidFill>
-          <a:srgbClr val="1A1622"/>
+          <a:srgbClr val="FFFFFF"/>
         </a:solidFill>
         <a:effectLst/>
       </p:bgPr>
@@ -3102,24 +3102,24 @@
       <p:grpSpPr/>
       <p:sp>
         <p:nvSpPr>
-          <p:cNvPr id="2" name="Rectangle 1"/>
+          <p:cNvPr id="2" name="Rounded Rectangle 1"/>
           <p:cNvSpPr/>
           <p:nvPr/>
         </p:nvSpPr>
         <p:spPr>
           <a:xfrm>
-            <a:off x="731520" y="731520"/>
-            <a:ext cx="1371600" cy="73152"/>
+            <a:off x="731520" y="548640"/>
+            <a:ext cx="1188720" cy="1188720"/>
           </a:xfrm>
-          <a:prstGeom prst="rect">
+          <a:prstGeom prst="roundRect">
             <a:avLst/>
           </a:prstGeom>
           <a:solidFill>
-            <a:srgbClr val="FFA062"/>
+            <a:srgbClr val="12261E"/>
           </a:solidFill>
           <a:ln w="12700">
             <a:solidFill>
-              <a:srgbClr val="FFA062"/>
+              <a:srgbClr val="12261E"/>
             </a:solidFill>
           </a:ln>
         </p:spPr>
@@ -3138,10 +3138,20 @@
           </a:fontRef>
         </p:style>
         <p:txBody>
-          <a:bodyPr rtlCol="0" anchor="ctr"/>
-          <a:lstStyle/>
-          <a:p>
-            <a:pPr algn="ctr"/>
+          <a:bodyPr rtlCol="0" anchor="ctr" wrap="square"/>
+          <a:lstStyle/>
+          <a:p>
+            <a:pPr algn="ctr">
+              <a:defRPr sz="3600" b="1">
+                <a:solidFill>
+                  <a:srgbClr val="E29524"/>
+                </a:solidFill>
+                <a:latin typeface="Arial"/>
+              </a:defRPr>
+            </a:pPr>
+            <a:r>
+              <a:t>SL</a:t>
+            </a:r>
           </a:p>
         </p:txBody>
       </p:sp>
@@ -3153,8 +3163,8 @@
         </p:nvSpPr>
         <p:spPr>
           <a:xfrm>
-            <a:off x="731520" y="960120"/>
-            <a:ext cx="10698480" cy="1280160"/>
+            <a:off x="2148840" y="457200"/>
+            <a:ext cx="9326880" cy="2011680"/>
           </a:xfrm>
           <a:prstGeom prst="rect">
             <a:avLst/>
@@ -3168,9 +3178,25 @@
           <a:lstStyle/>
           <a:p>
             <a:pPr>
-              <a:defRPr sz="4400" b="1">
-                <a:solidFill>
-                  <a:srgbClr val="FFFFFF"/>
+              <a:spcAft>
+                <a:spcPts val="200"/>
+              </a:spcAft>
+              <a:defRPr sz="1100" b="1">
+                <a:solidFill>
+                  <a:srgbClr val="64748B"/>
+                </a:solidFill>
+                <a:latin typeface="Arial"/>
+              </a:defRPr>
+            </a:pPr>
+            <a:r>
+              <a:t>CAPSTONE PROJECT</a:t>
+            </a:r>
+          </a:p>
+          <a:p>
+            <a:pPr>
+              <a:defRPr sz="3600" b="1">
+                <a:solidFill>
+                  <a:srgbClr val="12261E"/>
                 </a:solidFill>
                 <a:latin typeface="Arial"/>
               </a:defRPr>
@@ -3182,41 +3208,122 @@
           <a:p>
             <a:pPr>
               <a:spcBef>
-                <a:spcPts val="600"/>
+                <a:spcPts val="400"/>
               </a:spcBef>
-              <a:defRPr sz="1800" b="1">
-                <a:solidFill>
-                  <a:srgbClr val="FFA062"/>
-                </a:solidFill>
-                <a:latin typeface="Arial"/>
-              </a:defRPr>
-            </a:pPr>
-            <a:r>
-              <a:t>B2B Wholesale Marketplace &amp; Real-Time Price Discovery Platform</a:t>
-            </a:r>
-          </a:p>
-        </p:txBody>
-      </p:sp>
-      <p:sp>
-        <p:nvSpPr>
-          <p:cNvPr id="4" name="Rounded Rectangle 3"/>
+              <a:defRPr sz="1300">
+                <a:solidFill>
+                  <a:srgbClr val="64748B"/>
+                </a:solidFill>
+                <a:latin typeface="Arial"/>
+              </a:defRPr>
+            </a:pPr>
+            <a:r>
+              <a:t>Hyper-local B2B wholesale marketplace &amp; real-time mandi price discovery</a:t>
+            </a:r>
+          </a:p>
+        </p:txBody>
+      </p:sp>
+      <p:sp>
+        <p:nvSpPr>
+          <p:cNvPr id="4" name="TextBox 3"/>
+          <p:cNvSpPr txBox="1"/>
+          <p:nvPr/>
+        </p:nvSpPr>
+        <p:spPr>
+          <a:xfrm>
+            <a:off x="731520" y="2011680"/>
+            <a:ext cx="10698480" cy="1371600"/>
+          </a:xfrm>
+          <a:prstGeom prst="rect">
+            <a:avLst/>
+          </a:prstGeom>
+          <a:noFill/>
+        </p:spPr>
+        <p:txBody>
+          <a:bodyPr wrap="square">
+            <a:spAutoFit/>
+          </a:bodyPr>
+          <a:lstStyle/>
+          <a:p>
+            <a:pPr>
+              <a:spcAft>
+                <a:spcPts val="400"/>
+              </a:spcAft>
+              <a:defRPr sz="1100" b="1">
+                <a:solidFill>
+                  <a:srgbClr val="64748B"/>
+                </a:solidFill>
+                <a:latin typeface="Arial"/>
+              </a:defRPr>
+            </a:pPr>
+            <a:r>
+              <a:t>TEAM</a:t>
+            </a:r>
+          </a:p>
+          <a:p>
+            <a:pPr>
+              <a:defRPr sz="1400" b="1">
+                <a:solidFill>
+                  <a:srgbClr val="12261E"/>
+                </a:solidFill>
+                <a:latin typeface="Arial"/>
+              </a:defRPr>
+            </a:pPr>
+            <a:r>
+              <a:t>Praween Singh Rawat   ·   Anvitha S   ·   Ashraj Singh Rana   ·   Tanishq Mittal</a:t>
+            </a:r>
+          </a:p>
+          <a:p>
+            <a:pPr>
+              <a:spcBef>
+                <a:spcPts val="400"/>
+              </a:spcBef>
+              <a:defRPr sz="1200">
+                <a:solidFill>
+                  <a:srgbClr val="64748B"/>
+                </a:solidFill>
+                <a:latin typeface="Arial"/>
+              </a:defRPr>
+            </a:pPr>
+            <a:r>
+              <a:t>Front End Frameworks and Technologies  ·  MCA (General), Semester I</a:t>
+            </a:r>
+          </a:p>
+          <a:p>
+            <a:pPr>
+              <a:defRPr sz="1200" b="1">
+                <a:solidFill>
+                  <a:srgbClr val="12261E"/>
+                </a:solidFill>
+                <a:latin typeface="Arial"/>
+              </a:defRPr>
+            </a:pPr>
+            <a:r>
+              <a:t>Alliance University, Bengaluru  ·  Faculty: Veera Raghav K</a:t>
+            </a:r>
+          </a:p>
+        </p:txBody>
+      </p:sp>
+      <p:sp>
+        <p:nvSpPr>
+          <p:cNvPr id="5" name="Rounded Rectangle 4"/>
           <p:cNvSpPr/>
           <p:nvPr/>
         </p:nvSpPr>
         <p:spPr>
           <a:xfrm>
-            <a:off x="731520" y="2468880"/>
-            <a:ext cx="5120640" cy="3931920"/>
+            <a:off x="731520" y="3840480"/>
+            <a:ext cx="10698480" cy="2377440"/>
           </a:xfrm>
           <a:prstGeom prst="roundRect">
             <a:avLst/>
           </a:prstGeom>
           <a:solidFill>
-            <a:srgbClr val="262030"/>
+            <a:srgbClr val="F8F9FA"/>
           </a:solidFill>
-          <a:ln w="19050">
+          <a:ln w="12700">
             <a:solidFill>
-              <a:srgbClr val="413750"/>
+              <a:srgbClr val="E2E8F0"/>
             </a:solidFill>
           </a:ln>
         </p:spPr>
@@ -3235,23 +3342,126 @@
           </a:fontRef>
         </p:style>
         <p:txBody>
-          <a:bodyPr rtlCol="0" anchor="ctr"/>
-          <a:lstStyle/>
-          <a:p>
-            <a:pPr algn="ctr"/>
-          </a:p>
-        </p:txBody>
-      </p:sp>
-      <p:sp>
-        <p:nvSpPr>
-          <p:cNvPr id="5" name="TextBox 4"/>
+          <a:bodyPr rtlCol="0" anchor="ctr" wrap="square" lIns="274320" tIns="274320" rIns="274320" bIns="274320"/>
+          <a:lstStyle/>
+          <a:p>
+            <a:pPr algn="ctr">
+              <a:spcAft>
+                <a:spcPts val="800"/>
+              </a:spcAft>
+              <a:defRPr sz="1400" b="1">
+                <a:solidFill>
+                  <a:srgbClr val="12261E"/>
+                </a:solidFill>
+                <a:latin typeface="Arial"/>
+              </a:defRPr>
+            </a:pPr>
+            <a:r>
+              <a:t>Agenda</a:t>
+            </a:r>
+          </a:p>
+          <a:p>
+            <a:pPr>
+              <a:spcAft>
+                <a:spcPts val="400"/>
+              </a:spcAft>
+              <a:defRPr sz="1200">
+                <a:solidFill>
+                  <a:srgbClr val="12261E"/>
+                </a:solidFill>
+                <a:latin typeface="Arial"/>
+              </a:defRPr>
+            </a:pPr>
+            <a:r>
+              <a:t>1   What StockLink does, with a live demo</a:t>
+            </a:r>
+          </a:p>
+          <a:p>
+            <a:pPr>
+              <a:spcAft>
+                <a:spcPts val="400"/>
+              </a:spcAft>
+              <a:defRPr sz="1200">
+                <a:solidFill>
+                  <a:srgbClr val="12261E"/>
+                </a:solidFill>
+                <a:latin typeface="Arial"/>
+              </a:defRPr>
+            </a:pPr>
+            <a:r>
+              <a:t>2   Technologies and team responsibilities</a:t>
+            </a:r>
+          </a:p>
+          <a:p>
+            <a:pPr>
+              <a:spcAft>
+                <a:spcPts val="400"/>
+              </a:spcAft>
+              <a:defRPr sz="1200">
+                <a:solidFill>
+                  <a:srgbClr val="12261E"/>
+                </a:solidFill>
+                <a:latin typeface="Arial"/>
+              </a:defRPr>
+            </a:pPr>
+            <a:r>
+              <a:t>3   Advantages, disadvantages and future scope</a:t>
+            </a:r>
+          </a:p>
+          <a:p>
+            <a:pPr>
+              <a:spcAft>
+                <a:spcPts val="400"/>
+              </a:spcAft>
+              <a:defRPr sz="1200">
+                <a:solidFill>
+                  <a:srgbClr val="12261E"/>
+                </a:solidFill>
+                <a:latin typeface="Arial"/>
+              </a:defRPr>
+            </a:pPr>
+            <a:r>
+              <a:t>4   Hosting link and our learning</a:t>
+            </a:r>
+          </a:p>
+        </p:txBody>
+      </p:sp>
+    </p:spTree>
+  </p:cSld>
+  <p:clrMapOvr>
+    <a:masterClrMapping/>
+  </p:clrMapOvr>
+</p:sld>
+</file>
+
+<file path=ppt/slides/slide2.xml><?xml version="1.0" encoding="utf-8"?>
+<p:sld xmlns:a="http://schemas.openxmlformats.org/drawingml/2006/main" xmlns:p="http://schemas.openxmlformats.org/presentationml/2006/main" xmlns:r="http://schemas.openxmlformats.org/officeDocument/2006/relationships">
+  <p:cSld>
+    <p:bg>
+      <p:bgPr>
+        <a:solidFill>
+          <a:srgbClr val="FFFFFF"/>
+        </a:solidFill>
+        <a:effectLst/>
+      </p:bgPr>
+    </p:bg>
+    <p:spTree>
+      <p:nvGrpSpPr>
+        <p:cNvPr id="1" name=""/>
+        <p:cNvGrpSpPr/>
+        <p:nvPr/>
+      </p:nvGrpSpPr>
+      <p:grpSpPr/>
+      <p:sp>
+        <p:nvSpPr>
+          <p:cNvPr id="2" name="TextBox 1"/>
           <p:cNvSpPr txBox="1"/>
           <p:nvPr/>
         </p:nvSpPr>
         <p:spPr>
           <a:xfrm>
-            <a:off x="960120" y="2651760"/>
-            <a:ext cx="4663440" cy="3566160"/>
+            <a:off x="731520" y="365760"/>
+            <a:ext cx="10698480" cy="731520"/>
           </a:xfrm>
           <a:prstGeom prst="rect">
             <a:avLst/>
@@ -3265,31 +3475,122 @@
           <a:lstStyle/>
           <a:p>
             <a:pPr>
+              <a:defRPr sz="2400" b="1">
+                <a:solidFill>
+                  <a:srgbClr val="12261E"/>
+                </a:solidFill>
+                <a:latin typeface="Arial"/>
+              </a:defRPr>
+            </a:pPr>
+            <a:r>
+              <a:t>What StockLink does</a:t>
+            </a:r>
+          </a:p>
+        </p:txBody>
+      </p:sp>
+      <p:sp>
+        <p:nvSpPr>
+          <p:cNvPr id="3" name="TextBox 2"/>
+          <p:cNvSpPr txBox="1"/>
+          <p:nvPr/>
+        </p:nvSpPr>
+        <p:spPr>
+          <a:xfrm>
+            <a:off x="11155680" y="6217920"/>
+            <a:ext cx="731520" cy="365760"/>
+          </a:xfrm>
+          <a:prstGeom prst="rect">
+            <a:avLst/>
+          </a:prstGeom>
+          <a:noFill/>
+        </p:spPr>
+        <p:txBody>
+          <a:bodyPr wrap="none">
+            <a:spAutoFit/>
+          </a:bodyPr>
+          <a:lstStyle/>
+          <a:p>
+            <a:pPr>
+              <a:defRPr sz="1400" b="1">
+                <a:solidFill>
+                  <a:srgbClr val="64748B"/>
+                </a:solidFill>
+                <a:latin typeface="Arial"/>
+              </a:defRPr>
+            </a:pPr>
+            <a:r>
+              <a:t>2</a:t>
+            </a:r>
+          </a:p>
+        </p:txBody>
+      </p:sp>
+      <p:sp>
+        <p:nvSpPr>
+          <p:cNvPr id="4" name="TextBox 3"/>
+          <p:cNvSpPr txBox="1"/>
+          <p:nvPr/>
+        </p:nvSpPr>
+        <p:spPr>
+          <a:xfrm>
+            <a:off x="731520" y="1188720"/>
+            <a:ext cx="4114800" cy="5029200"/>
+          </a:xfrm>
+          <a:prstGeom prst="rect">
+            <a:avLst/>
+          </a:prstGeom>
+          <a:noFill/>
+        </p:spPr>
+        <p:txBody>
+          <a:bodyPr wrap="square">
+            <a:spAutoFit/>
+          </a:bodyPr>
+          <a:lstStyle/>
+          <a:p>
+            <a:pPr>
               <a:spcAft>
-                <a:spcPts val="1200"/>
+                <a:spcPts val="400"/>
               </a:spcAft>
-              <a:defRPr sz="1300" b="1">
-                <a:solidFill>
-                  <a:srgbClr val="FFA062"/>
-                </a:solidFill>
-                <a:latin typeface="Arial"/>
-              </a:defRPr>
-            </a:pPr>
-            <a:r>
-              <a:t>PROJECT TEAM &amp; ROLE ALLOCATION</a:t>
-            </a:r>
-          </a:p>
-          <a:p>
-            <a:pPr>
-              <a:defRPr sz="1300" b="1">
-                <a:solidFill>
-                  <a:srgbClr val="FFFFFF"/>
-                </a:solidFill>
-                <a:latin typeface="Arial"/>
-              </a:defRPr>
-            </a:pPr>
-            <a:r>
-              <a:t>•  Praween Singh Rawat  (Frontend Lead)</a:t>
+              <a:defRPr sz="1100" b="1">
+                <a:solidFill>
+                  <a:srgbClr val="64748B"/>
+                </a:solidFill>
+                <a:latin typeface="Arial"/>
+              </a:defRPr>
+            </a:pPr>
+            <a:r>
+              <a:t>THE PROBLEM</a:t>
+            </a:r>
+          </a:p>
+          <a:p>
+            <a:pPr>
+              <a:defRPr sz="1200">
+                <a:solidFill>
+                  <a:srgbClr val="12261E"/>
+                </a:solidFill>
+                <a:latin typeface="Arial"/>
+              </a:defRPr>
+            </a:pPr>
+            <a:r>
+              <a:t>Traditional mandi wholesale procurement relies on fragmented phone calls, physical visits, and opaque broker pricing.</a:t>
+            </a:r>
+          </a:p>
+          <a:p>
+            <a:pPr>
+              <a:spcBef>
+                <a:spcPts val="400"/>
+              </a:spcBef>
+              <a:spcAft>
+                <a:spcPts val="1600"/>
+              </a:spcAft>
+              <a:defRPr sz="1100">
+                <a:solidFill>
+                  <a:srgbClr val="64748B"/>
+                </a:solidFill>
+                <a:latin typeface="Arial"/>
+              </a:defRPr>
+            </a:pPr>
+            <a:r>
+              <a:t>Kirana retailers overpay 12–18% in commission markups and face frequent stockouts due to phantom/ghost inventory.</a:t>
             </a:r>
           </a:p>
           <a:p>
@@ -3297,126 +3598,87 @@
               <a:spcAft>
                 <a:spcPts val="600"/>
               </a:spcAft>
-              <a:defRPr sz="1050">
-                <a:solidFill>
-                  <a:srgbClr val="B9AFC6"/>
-                </a:solidFill>
-                <a:latin typeface="Arial"/>
-              </a:defRPr>
-            </a:pPr>
-            <a:r>
-              <a:t>    UI/UX, Dashboards &amp; Profile Modules</a:t>
-            </a:r>
-          </a:p>
-          <a:p>
-            <a:pPr>
-              <a:defRPr sz="1300" b="1">
-                <a:solidFill>
-                  <a:srgbClr val="FFFFFF"/>
-                </a:solidFill>
-                <a:latin typeface="Arial"/>
-              </a:defRPr>
-            </a:pPr>
-            <a:r>
-              <a:t>•  Anvitha S  (Frontend Developer)</a:t>
+              <a:defRPr sz="1100" b="1">
+                <a:solidFill>
+                  <a:srgbClr val="64748B"/>
+                </a:solidFill>
+                <a:latin typeface="Arial"/>
+              </a:defRPr>
+            </a:pPr>
+            <a:r>
+              <a:t>HOW IT WORKS</a:t>
             </a:r>
           </a:p>
           <a:p>
             <a:pPr>
               <a:spcAft>
-                <a:spcPts val="600"/>
+                <a:spcPts val="800"/>
               </a:spcAft>
-              <a:defRPr sz="1050">
-                <a:solidFill>
-                  <a:srgbClr val="B9AFC6"/>
-                </a:solidFill>
-                <a:latin typeface="Arial"/>
-              </a:defRPr>
-            </a:pPr>
-            <a:r>
-              <a:t>    Auth, Onboarding Wizards &amp; State Logic</a:t>
-            </a:r>
-          </a:p>
-          <a:p>
-            <a:pPr>
-              <a:defRPr sz="1300" b="1">
-                <a:solidFill>
-                  <a:srgbClr val="FFFFFF"/>
-                </a:solidFill>
-                <a:latin typeface="Arial"/>
-              </a:defRPr>
-            </a:pPr>
-            <a:r>
-              <a:t>•  Tanishq Mittal  (Backend Lead)</a:t>
+              <a:defRPr sz="1150">
+                <a:solidFill>
+                  <a:srgbClr val="12261E"/>
+                </a:solidFill>
+                <a:latin typeface="Arial"/>
+              </a:defRPr>
+            </a:pPr>
+            <a:r>
+              <a:t>1  Wholesalers list verified stock with live unit counts and editable base prices.</a:t>
             </a:r>
           </a:p>
           <a:p>
             <a:pPr>
               <a:spcAft>
-                <a:spcPts val="600"/>
+                <a:spcPts val="800"/>
               </a:spcAft>
-              <a:defRPr sz="1050">
-                <a:solidFill>
-                  <a:srgbClr val="B9AFC6"/>
-                </a:solidFill>
-                <a:latin typeface="Arial"/>
-              </a:defRPr>
-            </a:pPr>
-            <a:r>
-              <a:t>    REST APIs, RBAC Middleware &amp; Data Models</a:t>
-            </a:r>
-          </a:p>
-          <a:p>
-            <a:pPr>
-              <a:defRPr sz="1300" b="1">
-                <a:solidFill>
-                  <a:srgbClr val="FFFFFF"/>
-                </a:solidFill>
-                <a:latin typeface="Arial"/>
-              </a:defRPr>
-            </a:pPr>
-            <a:r>
-              <a:t>•  Ashraj Singh Rana  (Backend &amp; DevOps)</a:t>
+              <a:defRPr sz="1150">
+                <a:solidFill>
+                  <a:srgbClr val="12261E"/>
+                </a:solidFill>
+                <a:latin typeface="Arial"/>
+              </a:defRPr>
+            </a:pPr>
+            <a:r>
+              <a:t>2  Retailers discover local mills by distance and lock rates below APMC mandi benchmarks.</a:t>
             </a:r>
           </a:p>
           <a:p>
             <a:pPr>
               <a:spcAft>
-                <a:spcPts val="600"/>
+                <a:spcPts val="800"/>
               </a:spcAft>
-              <a:defRPr sz="1050">
-                <a:solidFill>
-                  <a:srgbClr val="B9AFC6"/>
-                </a:solidFill>
-                <a:latin typeface="Arial"/>
-              </a:defRPr>
-            </a:pPr>
-            <a:r>
-              <a:t>    Live Aggregation Engines &amp; Cloud Deployments</a:t>
-            </a:r>
-          </a:p>
-        </p:txBody>
-      </p:sp>
-      <p:sp>
-        <p:nvSpPr>
-          <p:cNvPr id="6" name="Rounded Rectangle 5"/>
+              <a:defRPr sz="1150">
+                <a:solidFill>
+                  <a:srgbClr val="12261E"/>
+                </a:solidFill>
+                <a:latin typeface="Arial"/>
+              </a:defRPr>
+            </a:pPr>
+            <a:r>
+              <a:t>3  Direct procurement orders are placed with verified GSTIN credentials and tracked in real time.</a:t>
+            </a:r>
+          </a:p>
+        </p:txBody>
+      </p:sp>
+      <p:sp>
+        <p:nvSpPr>
+          <p:cNvPr id="5" name="Rounded Rectangle 4"/>
           <p:cNvSpPr/>
           <p:nvPr/>
         </p:nvSpPr>
         <p:spPr>
           <a:xfrm>
-            <a:off x="6217920" y="2468880"/>
-            <a:ext cx="5212080" cy="3931920"/>
+            <a:off x="5120640" y="1188720"/>
+            <a:ext cx="6309360" cy="4572000"/>
           </a:xfrm>
           <a:prstGeom prst="roundRect">
             <a:avLst/>
           </a:prstGeom>
           <a:solidFill>
-            <a:srgbClr val="262030"/>
+            <a:srgbClr val="F8F9FA"/>
           </a:solidFill>
-          <a:ln w="19050">
+          <a:ln w="12700">
             <a:solidFill>
-              <a:srgbClr val="413750"/>
+              <a:srgbClr val="E2E8F0"/>
             </a:solidFill>
           </a:ln>
         </p:spPr>
@@ -3444,306 +3706,24 @@
       </p:sp>
       <p:sp>
         <p:nvSpPr>
-          <p:cNvPr id="7" name="TextBox 6"/>
-          <p:cNvSpPr txBox="1"/>
+          <p:cNvPr id="6" name="Rounded Rectangle 5"/>
+          <p:cNvSpPr/>
           <p:nvPr/>
         </p:nvSpPr>
         <p:spPr>
           <a:xfrm>
-            <a:off x="6446520" y="2651760"/>
-            <a:ext cx="4754880" cy="3566160"/>
-          </a:xfrm>
-          <a:prstGeom prst="rect">
-            <a:avLst/>
-          </a:prstGeom>
-          <a:noFill/>
-        </p:spPr>
-        <p:txBody>
-          <a:bodyPr wrap="square">
-            <a:spAutoFit/>
-          </a:bodyPr>
-          <a:lstStyle/>
-          <a:p>
-            <a:pPr>
-              <a:spcAft>
-                <a:spcPts val="1200"/>
-              </a:spcAft>
-              <a:defRPr sz="1300" b="1">
-                <a:solidFill>
-                  <a:srgbClr val="FFA062"/>
-                </a:solidFill>
-                <a:latin typeface="Arial"/>
-              </a:defRPr>
-            </a:pPr>
-            <a:r>
-              <a:t>10-MINUTE PRESENTATION AGENDA</a:t>
-            </a:r>
-          </a:p>
-          <a:p>
-            <a:pPr>
-              <a:defRPr sz="1250" b="1">
-                <a:solidFill>
-                  <a:srgbClr val="E1DAEB"/>
-                </a:solidFill>
-                <a:latin typeface="Arial"/>
-              </a:defRPr>
-            </a:pPr>
-            <a:r>
-              <a:t>[01]  Project Title, Domain &amp; Problem Statement</a:t>
-            </a:r>
-          </a:p>
-          <a:p>
-            <a:pPr>
-              <a:spcAft>
-                <a:spcPts val="600"/>
-              </a:spcAft>
-              <a:defRPr sz="1000">
-                <a:solidFill>
-                  <a:srgbClr val="B9AFC6"/>
-                </a:solidFill>
-                <a:latin typeface="Arial"/>
-              </a:defRPr>
-            </a:pPr>
-            <a:r>
-              <a:t>       2 Mins · Praween</a:t>
-            </a:r>
-          </a:p>
-          <a:p>
-            <a:pPr>
-              <a:defRPr sz="1250" b="1">
-                <a:solidFill>
-                  <a:srgbClr val="E1DAEB"/>
-                </a:solidFill>
-                <a:latin typeface="Arial"/>
-              </a:defRPr>
-            </a:pPr>
-            <a:r>
-              <a:t>[02]  Technologies Used &amp; Team Member Roles</a:t>
-            </a:r>
-          </a:p>
-          <a:p>
-            <a:pPr>
-              <a:spcAft>
-                <a:spcPts val="600"/>
-              </a:spcAft>
-              <a:defRPr sz="1000">
-                <a:solidFill>
-                  <a:srgbClr val="B9AFC6"/>
-                </a:solidFill>
-                <a:latin typeface="Arial"/>
-              </a:defRPr>
-            </a:pPr>
-            <a:r>
-              <a:t>       2 Mins · Anvitha &amp; Tanishq</a:t>
-            </a:r>
-          </a:p>
-          <a:p>
-            <a:pPr>
-              <a:defRPr sz="1250" b="1">
-                <a:solidFill>
-                  <a:srgbClr val="E1DAEB"/>
-                </a:solidFill>
-                <a:latin typeface="Arial"/>
-              </a:defRPr>
-            </a:pPr>
-            <a:r>
-              <a:t>[03]  System Architecture &amp; Live Workflows</a:t>
-            </a:r>
-          </a:p>
-          <a:p>
-            <a:pPr>
-              <a:spcAft>
-                <a:spcPts val="600"/>
-              </a:spcAft>
-              <a:defRPr sz="1000">
-                <a:solidFill>
-                  <a:srgbClr val="B9AFC6"/>
-                </a:solidFill>
-                <a:latin typeface="Arial"/>
-              </a:defRPr>
-            </a:pPr>
-            <a:r>
-              <a:t>       2 Mins · Praween &amp; Ashraj</a:t>
-            </a:r>
-          </a:p>
-          <a:p>
-            <a:pPr>
-              <a:defRPr sz="1250" b="1">
-                <a:solidFill>
-                  <a:srgbClr val="E1DAEB"/>
-                </a:solidFill>
-                <a:latin typeface="Arial"/>
-              </a:defRPr>
-            </a:pPr>
-            <a:r>
-              <a:t>[04]  Advantages, Disadvantages &amp; Roadmap</a:t>
-            </a:r>
-          </a:p>
-          <a:p>
-            <a:pPr>
-              <a:spcAft>
-                <a:spcPts val="600"/>
-              </a:spcAft>
-              <a:defRPr sz="1000">
-                <a:solidFill>
-                  <a:srgbClr val="B9AFC6"/>
-                </a:solidFill>
-                <a:latin typeface="Arial"/>
-              </a:defRPr>
-            </a:pPr>
-            <a:r>
-              <a:t>       2 Mins · Tanishq &amp; Anvitha</a:t>
-            </a:r>
-          </a:p>
-          <a:p>
-            <a:pPr>
-              <a:defRPr sz="1250" b="1">
-                <a:solidFill>
-                  <a:srgbClr val="E1DAEB"/>
-                </a:solidFill>
-                <a:latin typeface="Arial"/>
-              </a:defRPr>
-            </a:pPr>
-            <a:r>
-              <a:t>[05]  Live Cloud Hosting &amp; Key Learning Takeaways</a:t>
-            </a:r>
-          </a:p>
-          <a:p>
-            <a:pPr>
-              <a:spcAft>
-                <a:spcPts val="600"/>
-              </a:spcAft>
-              <a:defRPr sz="1000">
-                <a:solidFill>
-                  <a:srgbClr val="B9AFC6"/>
-                </a:solidFill>
-                <a:latin typeface="Arial"/>
-              </a:defRPr>
-            </a:pPr>
-            <a:r>
-              <a:t>       2 Mins · Ashraj &amp; Praween</a:t>
-            </a:r>
-          </a:p>
-        </p:txBody>
-      </p:sp>
-    </p:spTree>
-  </p:cSld>
-  <p:clrMapOvr>
-    <a:masterClrMapping/>
-  </p:clrMapOvr>
-</p:sld>
-</file>
-
-<file path=ppt/slides/slide2.xml><?xml version="1.0" encoding="utf-8"?>
-<p:sld xmlns:a="http://schemas.openxmlformats.org/drawingml/2006/main" xmlns:p="http://schemas.openxmlformats.org/presentationml/2006/main" xmlns:r="http://schemas.openxmlformats.org/officeDocument/2006/relationships">
-  <p:cSld>
-    <p:bg>
-      <p:bgPr>
-        <a:solidFill>
-          <a:srgbClr val="1A1622"/>
-        </a:solidFill>
-        <a:effectLst/>
-      </p:bgPr>
-    </p:bg>
-    <p:spTree>
-      <p:nvGrpSpPr>
-        <p:cNvPr id="1" name=""/>
-        <p:cNvGrpSpPr/>
-        <p:nvPr/>
-      </p:nvGrpSpPr>
-      <p:grpSpPr/>
-      <p:sp>
-        <p:nvSpPr>
-          <p:cNvPr id="2" name="TextBox 1"/>
-          <p:cNvSpPr txBox="1"/>
-          <p:nvPr/>
-        </p:nvSpPr>
-        <p:spPr>
-          <a:xfrm>
-            <a:off x="731520" y="365760"/>
-            <a:ext cx="10698480" cy="320040"/>
-          </a:xfrm>
-          <a:prstGeom prst="rect">
-            <a:avLst/>
-          </a:prstGeom>
-          <a:noFill/>
-        </p:spPr>
-        <p:txBody>
-          <a:bodyPr wrap="square">
-            <a:spAutoFit/>
-          </a:bodyPr>
-          <a:lstStyle/>
-          <a:p>
-            <a:pPr>
-              <a:defRPr sz="1100" b="1">
-                <a:solidFill>
-                  <a:srgbClr val="FFA062"/>
-                </a:solidFill>
-                <a:latin typeface="Arial"/>
-              </a:defRPr>
-            </a:pPr>
-            <a:r>
-              <a:t>STOCKLINK CAPSTONE PRESENTATION</a:t>
-            </a:r>
-          </a:p>
-        </p:txBody>
-      </p:sp>
-      <p:sp>
-        <p:nvSpPr>
-          <p:cNvPr id="3" name="TextBox 2"/>
-          <p:cNvSpPr txBox="1"/>
-          <p:nvPr/>
-        </p:nvSpPr>
-        <p:spPr>
-          <a:xfrm>
-            <a:off x="731520" y="685800"/>
-            <a:ext cx="10698480" cy="594360"/>
-          </a:xfrm>
-          <a:prstGeom prst="rect">
-            <a:avLst/>
-          </a:prstGeom>
-          <a:noFill/>
-        </p:spPr>
-        <p:txBody>
-          <a:bodyPr wrap="square">
-            <a:spAutoFit/>
-          </a:bodyPr>
-          <a:lstStyle/>
-          <a:p>
-            <a:pPr>
-              <a:defRPr sz="2400" b="1">
-                <a:solidFill>
-                  <a:srgbClr val="FFFFFF"/>
-                </a:solidFill>
-                <a:latin typeface="Arial"/>
-              </a:defRPr>
-            </a:pPr>
-            <a:r>
-              <a:t>Technologies Used &amp; Member Responsibilities</a:t>
-            </a:r>
-          </a:p>
-        </p:txBody>
-      </p:sp>
-      <p:sp>
-        <p:nvSpPr>
-          <p:cNvPr id="4" name="Rounded Rectangle 3"/>
-          <p:cNvSpPr/>
-          <p:nvPr/>
-        </p:nvSpPr>
-        <p:spPr>
-          <a:xfrm>
-            <a:off x="731520" y="1417320"/>
-            <a:ext cx="3566160" cy="4937760"/>
+            <a:off x="5303520" y="1371600"/>
+            <a:ext cx="5943600" cy="777240"/>
           </a:xfrm>
           <a:prstGeom prst="roundRect">
             <a:avLst/>
           </a:prstGeom>
           <a:solidFill>
-            <a:srgbClr val="262030"/>
+            <a:srgbClr val="C2410C"/>
           </a:solidFill>
-          <a:ln w="19050">
+          <a:ln w="12700">
             <a:solidFill>
-              <a:srgbClr val="413750"/>
+              <a:srgbClr val="C2410C"/>
             </a:solidFill>
           </a:ln>
         </p:spPr>
@@ -3762,23 +3742,46 @@
           </a:fontRef>
         </p:style>
         <p:txBody>
-          <a:bodyPr rtlCol="0" anchor="ctr"/>
-          <a:lstStyle/>
-          <a:p>
-            <a:pPr algn="ctr"/>
-          </a:p>
-        </p:txBody>
-      </p:sp>
-      <p:sp>
-        <p:nvSpPr>
-          <p:cNvPr id="5" name="TextBox 4"/>
+          <a:bodyPr rtlCol="0" anchor="ctr" wrap="square"/>
+          <a:lstStyle/>
+          <a:p>
+            <a:pPr algn="ctr">
+              <a:defRPr sz="1150" b="1">
+                <a:solidFill>
+                  <a:srgbClr val="FFFFFF"/>
+                </a:solidFill>
+                <a:latin typeface="Arial"/>
+              </a:defRPr>
+            </a:pPr>
+            <a:r>
+              <a:t>⚡  12.8% Below APMC Mandi Rate — Basmati Rice ₹85/kg</a:t>
+            </a:r>
+          </a:p>
+          <a:p>
+            <a:pPr>
+              <a:defRPr sz="950">
+                <a:solidFill>
+                  <a:srgbClr val="FED7AA"/>
+                </a:solidFill>
+                <a:latin typeface="Arial"/>
+              </a:defRPr>
+            </a:pPr>
+            <a:r>
+              <a:t>Official Mandi Benchmark: ₹95/kg · Direct Mill Rate: ₹85/kg (Save ₹10/kg)</a:t>
+            </a:r>
+          </a:p>
+        </p:txBody>
+      </p:sp>
+      <p:sp>
+        <p:nvSpPr>
+          <p:cNvPr id="7" name="TextBox 6"/>
           <p:cNvSpPr txBox="1"/>
           <p:nvPr/>
         </p:nvSpPr>
         <p:spPr>
           <a:xfrm>
-            <a:off x="914400" y="1554480"/>
-            <a:ext cx="3200400" cy="4663440"/>
+            <a:off x="5303520" y="2286000"/>
+            <a:ext cx="5943600" cy="2926080"/>
           </a:xfrm>
           <a:prstGeom prst="rect">
             <a:avLst/>
@@ -3793,186 +3796,275 @@
           <a:p>
             <a:pPr>
               <a:spcAft>
-                <a:spcPts val="1000"/>
+                <a:spcPts val="600"/>
               </a:spcAft>
-              <a:defRPr sz="1300" b="1">
-                <a:solidFill>
-                  <a:srgbClr val="FFA062"/>
-                </a:solidFill>
-                <a:latin typeface="Arial"/>
-              </a:defRPr>
-            </a:pPr>
-            <a:r>
-              <a:t>TECHNOLOGY STACK</a:t>
-            </a:r>
-          </a:p>
-          <a:p>
-            <a:pPr>
-              <a:defRPr sz="1150" b="1">
-                <a:solidFill>
-                  <a:srgbClr val="FFFFFF"/>
-                </a:solidFill>
-                <a:latin typeface="Arial"/>
-              </a:defRPr>
-            </a:pPr>
-            <a:r>
-              <a:t>• Frontend Stack</a:t>
+              <a:defRPr sz="1100" b="1">
+                <a:solidFill>
+                  <a:srgbClr val="64748B"/>
+                </a:solidFill>
+                <a:latin typeface="Arial"/>
+              </a:defRPr>
+            </a:pPr>
+            <a:r>
+              <a:t>LIVE MARKETPLACE DEMONSTRATION</a:t>
             </a:r>
           </a:p>
           <a:p>
             <a:pPr>
               <a:spcAft>
-                <a:spcPts val="700"/>
+                <a:spcPts val="400"/>
               </a:spcAft>
-              <a:defRPr sz="950">
-                <a:solidFill>
-                  <a:srgbClr val="B9AFC6"/>
-                </a:solidFill>
-                <a:latin typeface="Arial"/>
-              </a:defRPr>
-            </a:pPr>
-            <a:r>
-              <a:t>React 18 · Vite · React Router v7 · Tailwind Design Tokens · Lucide Icons</a:t>
-            </a:r>
-          </a:p>
-          <a:p>
-            <a:pPr>
-              <a:defRPr sz="1150" b="1">
-                <a:solidFill>
-                  <a:srgbClr val="FFFFFF"/>
-                </a:solidFill>
-                <a:latin typeface="Arial"/>
-              </a:defRPr>
-            </a:pPr>
-            <a:r>
-              <a:t>• Backend Services</a:t>
+              <a:defRPr sz="1000">
+                <a:solidFill>
+                  <a:srgbClr val="12261E"/>
+                </a:solidFill>
+                <a:latin typeface="Arial"/>
+              </a:defRPr>
+            </a:pPr>
+            <a:r>
+              <a:t>✔ Retailer Mandi Discovery: Active suppliers count (12 verified mills) within 5km radius with real-time stock units.</a:t>
             </a:r>
           </a:p>
           <a:p>
             <a:pPr>
               <a:spcAft>
-                <a:spcPts val="700"/>
+                <a:spcPts val="400"/>
               </a:spcAft>
-              <a:defRPr sz="950">
-                <a:solidFill>
-                  <a:srgbClr val="B9AFC6"/>
-                </a:solidFill>
-                <a:latin typeface="Arial"/>
-              </a:defRPr>
-            </a:pPr>
-            <a:r>
-              <a:t>Node.js · Express.js REST Framework · Centralized Middleware Pipeline</a:t>
-            </a:r>
-          </a:p>
-          <a:p>
-            <a:pPr>
-              <a:defRPr sz="1150" b="1">
-                <a:solidFill>
-                  <a:srgbClr val="FFFFFF"/>
-                </a:solidFill>
-                <a:latin typeface="Arial"/>
-              </a:defRPr>
-            </a:pPr>
-            <a:r>
-              <a:t>• Data Persistence</a:t>
+              <a:defRPr sz="1000">
+                <a:solidFill>
+                  <a:srgbClr val="12261E"/>
+                </a:solidFill>
+                <a:latin typeface="Arial"/>
+              </a:defRPr>
+            </a:pPr>
+            <a:r>
+              <a:t>✔ Direct Procurement Cart: Source Cart locks quantities with bulk discount thresholds and automated GST tax calculations.</a:t>
             </a:r>
           </a:p>
           <a:p>
             <a:pPr>
               <a:spcAft>
-                <a:spcPts val="700"/>
+                <a:spcPts val="400"/>
               </a:spcAft>
-              <a:defRPr sz="950">
-                <a:solidFill>
-                  <a:srgbClr val="B9AFC6"/>
-                </a:solidFill>
-                <a:latin typeface="Arial"/>
-              </a:defRPr>
-            </a:pPr>
-            <a:r>
-              <a:t>MongoDB · Mongoose ORM · Resilient In-Memory Dual Fallback Engine</a:t>
-            </a:r>
-          </a:p>
-          <a:p>
-            <a:pPr>
-              <a:defRPr sz="1150" b="1">
-                <a:solidFill>
-                  <a:srgbClr val="FFFFFF"/>
-                </a:solidFill>
-                <a:latin typeface="Arial"/>
-              </a:defRPr>
-            </a:pPr>
-            <a:r>
-              <a:t>• Security &amp; Auth</a:t>
+              <a:defRPr sz="1000">
+                <a:solidFill>
+                  <a:srgbClr val="12261E"/>
+                </a:solidFill>
+                <a:latin typeface="Arial"/>
+              </a:defRPr>
+            </a:pPr>
+            <a:r>
+              <a:t>✔ Wholesaler Inline Pricing: Live SKU base price edits update instantly across connected buyer screens without reload.</a:t>
             </a:r>
           </a:p>
           <a:p>
             <a:pPr>
               <a:spcAft>
-                <a:spcPts val="700"/>
+                <a:spcPts val="400"/>
               </a:spcAft>
-              <a:defRPr sz="950">
-                <a:solidFill>
-                  <a:srgbClr val="B9AFC6"/>
-                </a:solidFill>
-                <a:latin typeface="Arial"/>
-              </a:defRPr>
-            </a:pPr>
-            <a:r>
-              <a:t>Stateless JWT Bearer Tokens · Bcryptjs · Zod Schema Validation · RBAC</a:t>
-            </a:r>
-          </a:p>
-          <a:p>
-            <a:pPr>
-              <a:defRPr sz="1150" b="1">
-                <a:solidFill>
-                  <a:srgbClr val="FFFFFF"/>
-                </a:solidFill>
-                <a:latin typeface="Arial"/>
-              </a:defRPr>
-            </a:pPr>
-            <a:r>
-              <a:t>• Cloud Deployment</a:t>
-            </a:r>
-          </a:p>
-          <a:p>
-            <a:pPr>
-              <a:spcAft>
-                <a:spcPts val="700"/>
-              </a:spcAft>
-              <a:defRPr sz="950">
-                <a:solidFill>
-                  <a:srgbClr val="B9AFC6"/>
-                </a:solidFill>
-                <a:latin typeface="Arial"/>
-              </a:defRPr>
-            </a:pPr>
-            <a:r>
-              <a:t>Vercel (Edge CDN Frontend) · Render (Cloud Web Service) · Git Monorepo</a:t>
-            </a:r>
-          </a:p>
-        </p:txBody>
-      </p:sp>
-      <p:sp>
-        <p:nvSpPr>
-          <p:cNvPr id="6" name="Rounded Rectangle 5"/>
+              <a:defRPr sz="1000">
+                <a:solidFill>
+                  <a:srgbClr val="12261E"/>
+                </a:solidFill>
+                <a:latin typeface="Arial"/>
+              </a:defRPr>
+            </a:pPr>
+            <a:r>
+              <a:t>✔ Fulfilment Queue: Active tracking: Order #SL-7401 dispatched with verified GSTIN trader credentials.</a:t>
+            </a:r>
+          </a:p>
+        </p:txBody>
+      </p:sp>
+      <p:sp>
+        <p:nvSpPr>
+          <p:cNvPr id="8" name="TextBox 7"/>
+          <p:cNvSpPr txBox="1"/>
+          <p:nvPr/>
+        </p:nvSpPr>
+        <p:spPr>
+          <a:xfrm>
+            <a:off x="5120640" y="5897880"/>
+            <a:ext cx="6309360" cy="365760"/>
+          </a:xfrm>
+          <a:prstGeom prst="rect">
+            <a:avLst/>
+          </a:prstGeom>
+          <a:noFill/>
+        </p:spPr>
+        <p:txBody>
+          <a:bodyPr wrap="none">
+            <a:spAutoFit/>
+          </a:bodyPr>
+          <a:lstStyle/>
+          <a:p>
+            <a:pPr>
+              <a:defRPr sz="1050">
+                <a:solidFill>
+                  <a:srgbClr val="64748B"/>
+                </a:solidFill>
+                <a:latin typeface="Arial"/>
+              </a:defRPr>
+            </a:pPr>
+            <a:r>
+              <a:t>A live session on the hosted app  ·  Live demo · fft-capstone-project.vercel.app</a:t>
+            </a:r>
+          </a:p>
+        </p:txBody>
+      </p:sp>
+    </p:spTree>
+  </p:cSld>
+  <p:clrMapOvr>
+    <a:masterClrMapping/>
+  </p:clrMapOvr>
+</p:sld>
+</file>
+
+<file path=ppt/slides/slide3.xml><?xml version="1.0" encoding="utf-8"?>
+<p:sld xmlns:a="http://schemas.openxmlformats.org/drawingml/2006/main" xmlns:p="http://schemas.openxmlformats.org/presentationml/2006/main" xmlns:r="http://schemas.openxmlformats.org/officeDocument/2006/relationships">
+  <p:cSld>
+    <p:bg>
+      <p:bgPr>
+        <a:solidFill>
+          <a:srgbClr val="FFFFFF"/>
+        </a:solidFill>
+        <a:effectLst/>
+      </p:bgPr>
+    </p:bg>
+    <p:spTree>
+      <p:nvGrpSpPr>
+        <p:cNvPr id="1" name=""/>
+        <p:cNvGrpSpPr/>
+        <p:nvPr/>
+      </p:nvGrpSpPr>
+      <p:grpSpPr/>
+      <p:sp>
+        <p:nvSpPr>
+          <p:cNvPr id="2" name="TextBox 1"/>
+          <p:cNvSpPr txBox="1"/>
+          <p:nvPr/>
+        </p:nvSpPr>
+        <p:spPr>
+          <a:xfrm>
+            <a:off x="731520" y="365760"/>
+            <a:ext cx="10698480" cy="731520"/>
+          </a:xfrm>
+          <a:prstGeom prst="rect">
+            <a:avLst/>
+          </a:prstGeom>
+          <a:noFill/>
+        </p:spPr>
+        <p:txBody>
+          <a:bodyPr wrap="square">
+            <a:spAutoFit/>
+          </a:bodyPr>
+          <a:lstStyle/>
+          <a:p>
+            <a:pPr>
+              <a:defRPr sz="2400" b="1">
+                <a:solidFill>
+                  <a:srgbClr val="12261E"/>
+                </a:solidFill>
+                <a:latin typeface="Arial"/>
+              </a:defRPr>
+            </a:pPr>
+            <a:r>
+              <a:t>Technologies used &amp; team responsibilities</a:t>
+            </a:r>
+          </a:p>
+        </p:txBody>
+      </p:sp>
+      <p:sp>
+        <p:nvSpPr>
+          <p:cNvPr id="3" name="TextBox 2"/>
+          <p:cNvSpPr txBox="1"/>
+          <p:nvPr/>
+        </p:nvSpPr>
+        <p:spPr>
+          <a:xfrm>
+            <a:off x="11155680" y="6217920"/>
+            <a:ext cx="731520" cy="365760"/>
+          </a:xfrm>
+          <a:prstGeom prst="rect">
+            <a:avLst/>
+          </a:prstGeom>
+          <a:noFill/>
+        </p:spPr>
+        <p:txBody>
+          <a:bodyPr wrap="none">
+            <a:spAutoFit/>
+          </a:bodyPr>
+          <a:lstStyle/>
+          <a:p>
+            <a:pPr>
+              <a:defRPr sz="1400" b="1">
+                <a:solidFill>
+                  <a:srgbClr val="64748B"/>
+                </a:solidFill>
+                <a:latin typeface="Arial"/>
+              </a:defRPr>
+            </a:pPr>
+            <a:r>
+              <a:t>3</a:t>
+            </a:r>
+          </a:p>
+        </p:txBody>
+      </p:sp>
+      <p:sp>
+        <p:nvSpPr>
+          <p:cNvPr id="4" name="TextBox 3"/>
+          <p:cNvSpPr txBox="1"/>
+          <p:nvPr/>
+        </p:nvSpPr>
+        <p:spPr>
+          <a:xfrm>
+            <a:off x="731520" y="1051560"/>
+            <a:ext cx="10698480" cy="274320"/>
+          </a:xfrm>
+          <a:prstGeom prst="rect">
+            <a:avLst/>
+          </a:prstGeom>
+          <a:noFill/>
+        </p:spPr>
+        <p:txBody>
+          <a:bodyPr wrap="none">
+            <a:spAutoFit/>
+          </a:bodyPr>
+          <a:lstStyle/>
+          <a:p>
+            <a:pPr>
+              <a:defRPr sz="1100" b="1">
+                <a:solidFill>
+                  <a:srgbClr val="64748B"/>
+                </a:solidFill>
+                <a:latin typeface="Arial"/>
+              </a:defRPr>
+            </a:pPr>
+            <a:r>
+              <a:t>TECHNOLOGIES</a:t>
+            </a:r>
+          </a:p>
+        </p:txBody>
+      </p:sp>
+      <p:sp>
+        <p:nvSpPr>
+          <p:cNvPr id="5" name="Rounded Rectangle 4"/>
           <p:cNvSpPr/>
           <p:nvPr/>
         </p:nvSpPr>
         <p:spPr>
           <a:xfrm>
-            <a:off x="4572000" y="1417320"/>
-            <a:ext cx="3566160" cy="2377440"/>
+            <a:off x="731520" y="1371600"/>
+            <a:ext cx="2542032" cy="1463040"/>
           </a:xfrm>
           <a:prstGeom prst="roundRect">
             <a:avLst/>
           </a:prstGeom>
           <a:solidFill>
-            <a:srgbClr val="262030"/>
+            <a:srgbClr val="F8F9FA"/>
           </a:solidFill>
-          <a:ln w="19050">
+          <a:ln w="12700">
             <a:solidFill>
-              <a:srgbClr val="413750"/>
+              <a:srgbClr val="E2E8F0"/>
             </a:solidFill>
           </a:ln>
         </p:spPr>
@@ -3991,149 +4083,59 @@
           </a:fontRef>
         </p:style>
         <p:txBody>
-          <a:bodyPr rtlCol="0" anchor="ctr"/>
-          <a:lstStyle/>
-          <a:p>
-            <a:pPr algn="ctr"/>
-          </a:p>
-        </p:txBody>
-      </p:sp>
-      <p:sp>
-        <p:nvSpPr>
-          <p:cNvPr id="7" name="TextBox 6"/>
-          <p:cNvSpPr txBox="1"/>
+          <a:bodyPr rtlCol="0" anchor="ctr" wrap="square" lIns="164592" tIns="164592" rIns="164592" bIns="164592"/>
+          <a:lstStyle/>
+          <a:p>
+            <a:pPr algn="ctr">
+              <a:spcAft>
+                <a:spcPts val="400"/>
+              </a:spcAft>
+              <a:defRPr sz="1200" b="1">
+                <a:solidFill>
+                  <a:srgbClr val="12261E"/>
+                </a:solidFill>
+                <a:latin typeface="Arial"/>
+              </a:defRPr>
+            </a:pPr>
+            <a:r>
+              <a:t>Front end</a:t>
+            </a:r>
+          </a:p>
+          <a:p>
+            <a:pPr>
+              <a:defRPr sz="950">
+                <a:solidFill>
+                  <a:srgbClr val="64748B"/>
+                </a:solidFill>
+                <a:latin typeface="Arial"/>
+              </a:defRPr>
+            </a:pPr>
+            <a:r>
+              <a:t>React 18 · Vite 6 · React Router · Tailwind CSS · Lucide Icons</a:t>
+            </a:r>
+          </a:p>
+        </p:txBody>
+      </p:sp>
+      <p:sp>
+        <p:nvSpPr>
+          <p:cNvPr id="6" name="Rounded Rectangle 5"/>
+          <p:cNvSpPr/>
           <p:nvPr/>
         </p:nvSpPr>
         <p:spPr>
           <a:xfrm>
-            <a:off x="4754880" y="1581912"/>
-            <a:ext cx="3200400" cy="2103120"/>
-          </a:xfrm>
-          <a:prstGeom prst="rect">
-            <a:avLst/>
-          </a:prstGeom>
-          <a:noFill/>
-        </p:spPr>
-        <p:txBody>
-          <a:bodyPr wrap="square">
-            <a:spAutoFit/>
-          </a:bodyPr>
-          <a:lstStyle/>
-          <a:p>
-            <a:pPr>
-              <a:defRPr sz="1300" b="1">
-                <a:solidFill>
-                  <a:srgbClr val="FFFFFF"/>
-                </a:solidFill>
-                <a:latin typeface="Arial"/>
-              </a:defRPr>
-            </a:pPr>
-            <a:r>
-              <a:t>Praween Singh Rawat</a:t>
-            </a:r>
-          </a:p>
-          <a:p>
-            <a:pPr>
-              <a:spcAft>
-                <a:spcPts val="600"/>
-              </a:spcAft>
-              <a:defRPr sz="900" b="1">
-                <a:solidFill>
-                  <a:srgbClr val="FFA062"/>
-                </a:solidFill>
-                <a:latin typeface="Arial"/>
-              </a:defRPr>
-            </a:pPr>
-            <a:r>
-              <a:t>FRONTEND LEAD</a:t>
-            </a:r>
-          </a:p>
-          <a:p>
-            <a:pPr>
-              <a:spcAft>
-                <a:spcPts val="200"/>
-              </a:spcAft>
-              <a:defRPr sz="950">
-                <a:solidFill>
-                  <a:srgbClr val="E1DAEB"/>
-                </a:solidFill>
-                <a:latin typeface="Arial"/>
-              </a:defRPr>
-            </a:pPr>
-            <a:r>
-              <a:t>▹ UI/UX Design system tailored for Mandi Commerce</a:t>
-            </a:r>
-          </a:p>
-          <a:p>
-            <a:pPr>
-              <a:spcAft>
-                <a:spcPts val="200"/>
-              </a:spcAft>
-              <a:defRPr sz="950">
-                <a:solidFill>
-                  <a:srgbClr val="E1DAEB"/>
-                </a:solidFill>
-                <a:latin typeface="Arial"/>
-              </a:defRPr>
-            </a:pPr>
-            <a:r>
-              <a:t>▹ Interactive Retailer &amp; Wholesaler KPI Dashboards</a:t>
-            </a:r>
-          </a:p>
-          <a:p>
-            <a:pPr>
-              <a:spcAft>
-                <a:spcPts val="200"/>
-              </a:spcAft>
-              <a:defRPr sz="950">
-                <a:solidFill>
-                  <a:srgbClr val="E1DAEB"/>
-                </a:solidFill>
-                <a:latin typeface="Arial"/>
-              </a:defRPr>
-            </a:pPr>
-            <a:r>
-              <a:t>▹ Multi-section Store and Wholesaler Profile engines</a:t>
-            </a:r>
-          </a:p>
-          <a:p>
-            <a:pPr>
-              <a:spcAft>
-                <a:spcPts val="200"/>
-              </a:spcAft>
-              <a:defRPr sz="950">
-                <a:solidFill>
-                  <a:srgbClr val="E1DAEB"/>
-                </a:solidFill>
-                <a:latin typeface="Arial"/>
-              </a:defRPr>
-            </a:pPr>
-            <a:r>
-              <a:t>▹ Vite client optimization &amp; responsive layout design</a:t>
-            </a:r>
-          </a:p>
-        </p:txBody>
-      </p:sp>
-      <p:sp>
-        <p:nvSpPr>
-          <p:cNvPr id="8" name="Rounded Rectangle 7"/>
-          <p:cNvSpPr/>
-          <p:nvPr/>
-        </p:nvSpPr>
-        <p:spPr>
-          <a:xfrm>
-            <a:off x="8321040" y="1417320"/>
-            <a:ext cx="3566160" cy="2377440"/>
+            <a:off x="3447288" y="1371600"/>
+            <a:ext cx="2542032" cy="1463040"/>
           </a:xfrm>
           <a:prstGeom prst="roundRect">
             <a:avLst/>
           </a:prstGeom>
           <a:solidFill>
-            <a:srgbClr val="262030"/>
+            <a:srgbClr val="F8F9FA"/>
           </a:solidFill>
-          <a:ln w="19050">
+          <a:ln w="12700">
             <a:solidFill>
-              <a:srgbClr val="413750"/>
+              <a:srgbClr val="E2E8F0"/>
             </a:solidFill>
           </a:ln>
         </p:spPr>
@@ -4152,149 +4154,59 @@
           </a:fontRef>
         </p:style>
         <p:txBody>
-          <a:bodyPr rtlCol="0" anchor="ctr"/>
-          <a:lstStyle/>
-          <a:p>
-            <a:pPr algn="ctr"/>
-          </a:p>
-        </p:txBody>
-      </p:sp>
-      <p:sp>
-        <p:nvSpPr>
-          <p:cNvPr id="9" name="TextBox 8"/>
-          <p:cNvSpPr txBox="1"/>
+          <a:bodyPr rtlCol="0" anchor="ctr" wrap="square" lIns="164592" tIns="164592" rIns="164592" bIns="164592"/>
+          <a:lstStyle/>
+          <a:p>
+            <a:pPr algn="ctr">
+              <a:spcAft>
+                <a:spcPts val="400"/>
+              </a:spcAft>
+              <a:defRPr sz="1200" b="1">
+                <a:solidFill>
+                  <a:srgbClr val="12261E"/>
+                </a:solidFill>
+                <a:latin typeface="Arial"/>
+              </a:defRPr>
+            </a:pPr>
+            <a:r>
+              <a:t>Real-time backend</a:t>
+            </a:r>
+          </a:p>
+          <a:p>
+            <a:pPr>
+              <a:defRPr sz="950">
+                <a:solidFill>
+                  <a:srgbClr val="64748B"/>
+                </a:solidFill>
+                <a:latin typeface="Arial"/>
+              </a:defRPr>
+            </a:pPr>
+            <a:r>
+              <a:t>Node.js · Express.js · REST APIs · JWT Auth Middleware</a:t>
+            </a:r>
+          </a:p>
+        </p:txBody>
+      </p:sp>
+      <p:sp>
+        <p:nvSpPr>
+          <p:cNvPr id="7" name="Rounded Rectangle 6"/>
+          <p:cNvSpPr/>
           <p:nvPr/>
         </p:nvSpPr>
         <p:spPr>
           <a:xfrm>
-            <a:off x="8503920" y="1581912"/>
-            <a:ext cx="3200400" cy="2103120"/>
-          </a:xfrm>
-          <a:prstGeom prst="rect">
-            <a:avLst/>
-          </a:prstGeom>
-          <a:noFill/>
-        </p:spPr>
-        <p:txBody>
-          <a:bodyPr wrap="square">
-            <a:spAutoFit/>
-          </a:bodyPr>
-          <a:lstStyle/>
-          <a:p>
-            <a:pPr>
-              <a:defRPr sz="1300" b="1">
-                <a:solidFill>
-                  <a:srgbClr val="FFFFFF"/>
-                </a:solidFill>
-                <a:latin typeface="Arial"/>
-              </a:defRPr>
-            </a:pPr>
-            <a:r>
-              <a:t>Anvitha S</a:t>
-            </a:r>
-          </a:p>
-          <a:p>
-            <a:pPr>
-              <a:spcAft>
-                <a:spcPts val="600"/>
-              </a:spcAft>
-              <a:defRPr sz="900" b="1">
-                <a:solidFill>
-                  <a:srgbClr val="FFA062"/>
-                </a:solidFill>
-                <a:latin typeface="Arial"/>
-              </a:defRPr>
-            </a:pPr>
-            <a:r>
-              <a:t>FRONTEND DEVELOPER</a:t>
-            </a:r>
-          </a:p>
-          <a:p>
-            <a:pPr>
-              <a:spcAft>
-                <a:spcPts val="200"/>
-              </a:spcAft>
-              <a:defRPr sz="950">
-                <a:solidFill>
-                  <a:srgbClr val="E1DAEB"/>
-                </a:solidFill>
-                <a:latin typeface="Arial"/>
-              </a:defRPr>
-            </a:pPr>
-            <a:r>
-              <a:t>▹ Multi-mode authentication (Login, Register &amp; Role Switch)</a:t>
-            </a:r>
-          </a:p>
-          <a:p>
-            <a:pPr>
-              <a:spcAft>
-                <a:spcPts val="200"/>
-              </a:spcAft>
-              <a:defRPr sz="950">
-                <a:solidFill>
-                  <a:srgbClr val="E1DAEB"/>
-                </a:solidFill>
-                <a:latin typeface="Arial"/>
-              </a:defRPr>
-            </a:pPr>
-            <a:r>
-              <a:t>▹ 3-stage onboarding wizard (GSTIN, Address, Preferences)</a:t>
-            </a:r>
-          </a:p>
-          <a:p>
-            <a:pPr>
-              <a:spcAft>
-                <a:spcPts val="200"/>
-              </a:spcAft>
-              <a:defRPr sz="950">
-                <a:solidFill>
-                  <a:srgbClr val="E1DAEB"/>
-                </a:solidFill>
-                <a:latin typeface="Arial"/>
-              </a:defRPr>
-            </a:pPr>
-            <a:r>
-              <a:t>▹ Centralized API service (`api.js`) &amp; token integration</a:t>
-            </a:r>
-          </a:p>
-          <a:p>
-            <a:pPr>
-              <a:spcAft>
-                <a:spcPts val="200"/>
-              </a:spcAft>
-              <a:defRPr sz="950">
-                <a:solidFill>
-                  <a:srgbClr val="E1DAEB"/>
-                </a:solidFill>
-                <a:latin typeface="Arial"/>
-              </a:defRPr>
-            </a:pPr>
-            <a:r>
-              <a:t>▹ Source cart state, dynamic routing, and input validation</a:t>
-            </a:r>
-          </a:p>
-        </p:txBody>
-      </p:sp>
-      <p:sp>
-        <p:nvSpPr>
-          <p:cNvPr id="10" name="Rounded Rectangle 9"/>
-          <p:cNvSpPr/>
-          <p:nvPr/>
-        </p:nvSpPr>
-        <p:spPr>
-          <a:xfrm>
-            <a:off x="4572000" y="3977639"/>
-            <a:ext cx="3566160" cy="2377440"/>
+            <a:off x="6163056" y="1371600"/>
+            <a:ext cx="2542032" cy="1463040"/>
           </a:xfrm>
           <a:prstGeom prst="roundRect">
             <a:avLst/>
           </a:prstGeom>
           <a:solidFill>
-            <a:srgbClr val="262030"/>
+            <a:srgbClr val="F8F9FA"/>
           </a:solidFill>
-          <a:ln w="19050">
+          <a:ln w="12700">
             <a:solidFill>
-              <a:srgbClr val="413750"/>
+              <a:srgbClr val="E2E8F0"/>
             </a:solidFill>
           </a:ln>
         </p:spPr>
@@ -4313,149 +4225,59 @@
           </a:fontRef>
         </p:style>
         <p:txBody>
-          <a:bodyPr rtlCol="0" anchor="ctr"/>
-          <a:lstStyle/>
-          <a:p>
-            <a:pPr algn="ctr"/>
-          </a:p>
-        </p:txBody>
-      </p:sp>
-      <p:sp>
-        <p:nvSpPr>
-          <p:cNvPr id="11" name="TextBox 10"/>
-          <p:cNvSpPr txBox="1"/>
+          <a:bodyPr rtlCol="0" anchor="ctr" wrap="square" lIns="164592" tIns="164592" rIns="164592" bIns="164592"/>
+          <a:lstStyle/>
+          <a:p>
+            <a:pPr algn="ctr">
+              <a:spcAft>
+                <a:spcPts val="400"/>
+              </a:spcAft>
+              <a:defRPr sz="1200" b="1">
+                <a:solidFill>
+                  <a:srgbClr val="12261E"/>
+                </a:solidFill>
+                <a:latin typeface="Arial"/>
+              </a:defRPr>
+            </a:pPr>
+            <a:r>
+              <a:t>Database &amp; Storage</a:t>
+            </a:r>
+          </a:p>
+          <a:p>
+            <a:pPr>
+              <a:defRPr sz="950">
+                <a:solidFill>
+                  <a:srgbClr val="64748B"/>
+                </a:solidFill>
+                <a:latin typeface="Arial"/>
+              </a:defRPr>
+            </a:pPr>
+            <a:r>
+              <a:t>MongoDB Atlas · Mongoose ORM · Resilient In-Memory Dual Store</a:t>
+            </a:r>
+          </a:p>
+        </p:txBody>
+      </p:sp>
+      <p:sp>
+        <p:nvSpPr>
+          <p:cNvPr id="8" name="Rounded Rectangle 7"/>
+          <p:cNvSpPr/>
           <p:nvPr/>
         </p:nvSpPr>
         <p:spPr>
           <a:xfrm>
-            <a:off x="4754880" y="4142231"/>
-            <a:ext cx="3200400" cy="2103120"/>
-          </a:xfrm>
-          <a:prstGeom prst="rect">
-            <a:avLst/>
-          </a:prstGeom>
-          <a:noFill/>
-        </p:spPr>
-        <p:txBody>
-          <a:bodyPr wrap="square">
-            <a:spAutoFit/>
-          </a:bodyPr>
-          <a:lstStyle/>
-          <a:p>
-            <a:pPr>
-              <a:defRPr sz="1300" b="1">
-                <a:solidFill>
-                  <a:srgbClr val="FFFFFF"/>
-                </a:solidFill>
-                <a:latin typeface="Arial"/>
-              </a:defRPr>
-            </a:pPr>
-            <a:r>
-              <a:t>Tanishq Mittal</a:t>
-            </a:r>
-          </a:p>
-          <a:p>
-            <a:pPr>
-              <a:spcAft>
-                <a:spcPts val="600"/>
-              </a:spcAft>
-              <a:defRPr sz="900" b="1">
-                <a:solidFill>
-                  <a:srgbClr val="3B82F6"/>
-                </a:solidFill>
-                <a:latin typeface="Arial"/>
-              </a:defRPr>
-            </a:pPr>
-            <a:r>
-              <a:t>BACKEND LEAD</a:t>
-            </a:r>
-          </a:p>
-          <a:p>
-            <a:pPr>
-              <a:spcAft>
-                <a:spcPts val="200"/>
-              </a:spcAft>
-              <a:defRPr sz="950">
-                <a:solidFill>
-                  <a:srgbClr val="E1DAEB"/>
-                </a:solidFill>
-                <a:latin typeface="Arial"/>
-              </a:defRPr>
-            </a:pPr>
-            <a:r>
-              <a:t>▹ Express RESTful API routing architecture and endpoints</a:t>
-            </a:r>
-          </a:p>
-          <a:p>
-            <a:pPr>
-              <a:spcAft>
-                <a:spcPts val="200"/>
-              </a:spcAft>
-              <a:defRPr sz="950">
-                <a:solidFill>
-                  <a:srgbClr val="E1DAEB"/>
-                </a:solidFill>
-                <a:latin typeface="Arial"/>
-              </a:defRPr>
-            </a:pPr>
-            <a:r>
-              <a:t>▹ Role-Based Access Control (RBAC) &amp; authMiddleware</a:t>
-            </a:r>
-          </a:p>
-          <a:p>
-            <a:pPr>
-              <a:spcAft>
-                <a:spcPts val="200"/>
-              </a:spcAft>
-              <a:defRPr sz="950">
-                <a:solidFill>
-                  <a:srgbClr val="E1DAEB"/>
-                </a:solidFill>
-                <a:latin typeface="Arial"/>
-              </a:defRPr>
-            </a:pPr>
-            <a:r>
-              <a:t>▹ Database Schemas for User, Product, and Order models</a:t>
-            </a:r>
-          </a:p>
-          <a:p>
-            <a:pPr>
-              <a:spcAft>
-                <a:spcPts val="200"/>
-              </a:spcAft>
-              <a:defRPr sz="950">
-                <a:solidFill>
-                  <a:srgbClr val="E1DAEB"/>
-                </a:solidFill>
-                <a:latin typeface="Arial"/>
-              </a:defRPr>
-            </a:pPr>
-            <a:r>
-              <a:t>▹ Profile mutation endpoints with mass-assignment defense</a:t>
-            </a:r>
-          </a:p>
-        </p:txBody>
-      </p:sp>
-      <p:sp>
-        <p:nvSpPr>
-          <p:cNvPr id="12" name="Rounded Rectangle 11"/>
-          <p:cNvSpPr/>
-          <p:nvPr/>
-        </p:nvSpPr>
-        <p:spPr>
-          <a:xfrm>
-            <a:off x="8321040" y="3977639"/>
-            <a:ext cx="3566160" cy="2377440"/>
+            <a:off x="8878824" y="1371600"/>
+            <a:ext cx="2542032" cy="1463040"/>
           </a:xfrm>
           <a:prstGeom prst="roundRect">
             <a:avLst/>
           </a:prstGeom>
           <a:solidFill>
-            <a:srgbClr val="262030"/>
+            <a:srgbClr val="F8F9FA"/>
           </a:solidFill>
-          <a:ln w="19050">
+          <a:ln w="12700">
             <a:solidFill>
-              <a:srgbClr val="413750"/>
+              <a:srgbClr val="E2E8F0"/>
             </a:solidFill>
           </a:ln>
         </p:spPr>
@@ -4474,23 +4296,49 @@
           </a:fontRef>
         </p:style>
         <p:txBody>
-          <a:bodyPr rtlCol="0" anchor="ctr"/>
-          <a:lstStyle/>
-          <a:p>
-            <a:pPr algn="ctr"/>
-          </a:p>
-        </p:txBody>
-      </p:sp>
-      <p:sp>
-        <p:nvSpPr>
-          <p:cNvPr id="13" name="TextBox 12"/>
+          <a:bodyPr rtlCol="0" anchor="ctr" wrap="square" lIns="164592" tIns="164592" rIns="164592" bIns="164592"/>
+          <a:lstStyle/>
+          <a:p>
+            <a:pPr algn="ctr">
+              <a:spcAft>
+                <a:spcPts val="400"/>
+              </a:spcAft>
+              <a:defRPr sz="1200" b="1">
+                <a:solidFill>
+                  <a:srgbClr val="12261E"/>
+                </a:solidFill>
+                <a:latin typeface="Arial"/>
+              </a:defRPr>
+            </a:pPr>
+            <a:r>
+              <a:t>Testing and hosting</a:t>
+            </a:r>
+          </a:p>
+          <a:p>
+            <a:pPr>
+              <a:defRPr sz="950">
+                <a:solidFill>
+                  <a:srgbClr val="64748B"/>
+                </a:solidFill>
+                <a:latin typeface="Arial"/>
+              </a:defRPr>
+            </a:pPr>
+            <a:r>
+              <a:t>Vercel (Edge CDN) · Render (Cloud Web Service) · Automated Suite</a:t>
+            </a:r>
+          </a:p>
+        </p:txBody>
+      </p:sp>
+      <p:sp>
+        <p:nvSpPr>
+          <p:cNvPr id="9" name="TextBox 8"/>
           <p:cNvSpPr txBox="1"/>
           <p:nvPr/>
         </p:nvSpPr>
         <p:spPr>
           <a:xfrm>
-            <a:off x="8503920" y="4142231"/>
-            <a:ext cx="3200400" cy="2103120"/>
+            <a:off x="731520" y="3063240"/>
+            <a:ext cx="10698480" cy="274320"/>
           </a:xfrm>
           <a:prstGeom prst="rect">
             <a:avLst/>
@@ -4498,223 +4346,45 @@
           <a:noFill/>
         </p:spPr>
         <p:txBody>
-          <a:bodyPr wrap="square">
+          <a:bodyPr wrap="none">
             <a:spAutoFit/>
           </a:bodyPr>
           <a:lstStyle/>
           <a:p>
             <a:pPr>
-              <a:defRPr sz="1300" b="1">
-                <a:solidFill>
-                  <a:srgbClr val="FFFFFF"/>
-                </a:solidFill>
-                <a:latin typeface="Arial"/>
-              </a:defRPr>
-            </a:pPr>
-            <a:r>
-              <a:t>Ashraj Singh Rana</a:t>
-            </a:r>
-          </a:p>
-          <a:p>
-            <a:pPr>
-              <a:spcAft>
-                <a:spcPts val="600"/>
-              </a:spcAft>
-              <a:defRPr sz="900" b="1">
-                <a:solidFill>
-                  <a:srgbClr val="22C55E"/>
-                </a:solidFill>
-                <a:latin typeface="Arial"/>
-              </a:defRPr>
-            </a:pPr>
-            <a:r>
-              <a:t>BACKEND &amp; DEVOPS</a:t>
-            </a:r>
-          </a:p>
-          <a:p>
-            <a:pPr>
-              <a:spcAft>
-                <a:spcPts val="200"/>
-              </a:spcAft>
-              <a:defRPr sz="950">
-                <a:solidFill>
-                  <a:srgbClr val="E1DAEB"/>
-                </a:solidFill>
-                <a:latin typeface="Arial"/>
-              </a:defRPr>
-            </a:pPr>
-            <a:r>
-              <a:t>▹ Dynamic dashboard aggregations (Revenue, Spend, Orders)</a:t>
-            </a:r>
-          </a:p>
-          <a:p>
-            <a:pPr>
-              <a:spcAft>
-                <a:spcPts val="200"/>
-              </a:spcAft>
-              <a:defRPr sz="950">
-                <a:solidFill>
-                  <a:srgbClr val="E1DAEB"/>
-                </a:solidFill>
-                <a:latin typeface="Arial"/>
-              </a:defRPr>
-            </a:pPr>
-            <a:r>
-              <a:t>▹ Live APMC Mandi discount % benchmark computation</a:t>
-            </a:r>
-          </a:p>
-          <a:p>
-            <a:pPr>
-              <a:spcAft>
-                <a:spcPts val="200"/>
-              </a:spcAft>
-              <a:defRPr sz="950">
-                <a:solidFill>
-                  <a:srgbClr val="E1DAEB"/>
-                </a:solidFill>
-                <a:latin typeface="Arial"/>
-              </a:defRPr>
-            </a:pPr>
-            <a:r>
-              <a:t>▹ Inline SKU base-price &amp; stock live update controller</a:t>
-            </a:r>
-          </a:p>
-          <a:p>
-            <a:pPr>
-              <a:spcAft>
-                <a:spcPts val="200"/>
-              </a:spcAft>
-              <a:defRPr sz="950">
-                <a:solidFill>
-                  <a:srgbClr val="E1DAEB"/>
-                </a:solidFill>
-                <a:latin typeface="Arial"/>
-              </a:defRPr>
-            </a:pPr>
-            <a:r>
-              <a:t>▹ Cloud deployment setup on Render &amp; automated test suite</a:t>
-            </a:r>
-          </a:p>
-        </p:txBody>
-      </p:sp>
-    </p:spTree>
-  </p:cSld>
-  <p:clrMapOvr>
-    <a:masterClrMapping/>
-  </p:clrMapOvr>
-</p:sld>
-</file>
-
-<file path=ppt/slides/slide3.xml><?xml version="1.0" encoding="utf-8"?>
-<p:sld xmlns:a="http://schemas.openxmlformats.org/drawingml/2006/main" xmlns:p="http://schemas.openxmlformats.org/presentationml/2006/main" xmlns:r="http://schemas.openxmlformats.org/officeDocument/2006/relationships">
-  <p:cSld>
-    <p:bg>
-      <p:bgPr>
-        <a:solidFill>
-          <a:srgbClr val="1A1622"/>
-        </a:solidFill>
-        <a:effectLst/>
-      </p:bgPr>
-    </p:bg>
-    <p:spTree>
-      <p:nvGrpSpPr>
-        <p:cNvPr id="1" name=""/>
-        <p:cNvGrpSpPr/>
-        <p:nvPr/>
-      </p:nvGrpSpPr>
-      <p:grpSpPr/>
-      <p:sp>
-        <p:nvSpPr>
-          <p:cNvPr id="2" name="TextBox 1"/>
-          <p:cNvSpPr txBox="1"/>
+              <a:defRPr sz="1100" b="1">
+                <a:solidFill>
+                  <a:srgbClr val="64748B"/>
+                </a:solidFill>
+                <a:latin typeface="Arial"/>
+              </a:defRPr>
+            </a:pPr>
+            <a:r>
+              <a:t>TEAM RESPONSIBILITIES</a:t>
+            </a:r>
+          </a:p>
+        </p:txBody>
+      </p:sp>
+      <p:sp>
+        <p:nvSpPr>
+          <p:cNvPr id="10" name="Rounded Rectangle 9"/>
+          <p:cNvSpPr/>
           <p:nvPr/>
         </p:nvSpPr>
         <p:spPr>
           <a:xfrm>
-            <a:off x="731520" y="365760"/>
-            <a:ext cx="10698480" cy="320040"/>
-          </a:xfrm>
-          <a:prstGeom prst="rect">
-            <a:avLst/>
-          </a:prstGeom>
-          <a:noFill/>
-        </p:spPr>
-        <p:txBody>
-          <a:bodyPr wrap="square">
-            <a:spAutoFit/>
-          </a:bodyPr>
-          <a:lstStyle/>
-          <a:p>
-            <a:pPr>
-              <a:defRPr sz="1100" b="1">
-                <a:solidFill>
-                  <a:srgbClr val="FFA062"/>
-                </a:solidFill>
-                <a:latin typeface="Arial"/>
-              </a:defRPr>
-            </a:pPr>
-            <a:r>
-              <a:t>STOCKLINK CAPSTONE PRESENTATION</a:t>
-            </a:r>
-          </a:p>
-        </p:txBody>
-      </p:sp>
-      <p:sp>
-        <p:nvSpPr>
-          <p:cNvPr id="3" name="TextBox 2"/>
-          <p:cNvSpPr txBox="1"/>
-          <p:nvPr/>
-        </p:nvSpPr>
-        <p:spPr>
-          <a:xfrm>
-            <a:off x="731520" y="685800"/>
-            <a:ext cx="10698480" cy="594360"/>
-          </a:xfrm>
-          <a:prstGeom prst="rect">
-            <a:avLst/>
-          </a:prstGeom>
-          <a:noFill/>
-        </p:spPr>
-        <p:txBody>
-          <a:bodyPr wrap="square">
-            <a:spAutoFit/>
-          </a:bodyPr>
-          <a:lstStyle/>
-          <a:p>
-            <a:pPr>
-              <a:defRPr sz="2400" b="1">
-                <a:solidFill>
-                  <a:srgbClr val="FFFFFF"/>
-                </a:solidFill>
-                <a:latin typeface="Arial"/>
-              </a:defRPr>
-            </a:pPr>
-            <a:r>
-              <a:t>System Architecture &amp; Core Platform Workflows</a:t>
-            </a:r>
-          </a:p>
-        </p:txBody>
-      </p:sp>
-      <p:sp>
-        <p:nvSpPr>
-          <p:cNvPr id="4" name="Rounded Rectangle 3"/>
-          <p:cNvSpPr/>
-          <p:nvPr/>
-        </p:nvSpPr>
-        <p:spPr>
-          <a:xfrm>
-            <a:off x="731520" y="1417320"/>
-            <a:ext cx="3328416" cy="4937760"/>
+            <a:off x="731520" y="3383280"/>
+            <a:ext cx="2542032" cy="2926080"/>
           </a:xfrm>
           <a:prstGeom prst="roundRect">
             <a:avLst/>
           </a:prstGeom>
           <a:solidFill>
-            <a:srgbClr val="262030"/>
+            <a:srgbClr val="F8F9FA"/>
           </a:solidFill>
-          <a:ln w="19050">
+          <a:ln w="12700">
             <a:solidFill>
-              <a:srgbClr val="413750"/>
+              <a:srgbClr val="E2E8F0"/>
             </a:solidFill>
           </a:ln>
         </p:spPr>
@@ -4733,188 +4403,72 @@
           </a:fontRef>
         </p:style>
         <p:txBody>
-          <a:bodyPr rtlCol="0" anchor="ctr"/>
-          <a:lstStyle/>
-          <a:p>
-            <a:pPr algn="ctr"/>
-          </a:p>
-        </p:txBody>
-      </p:sp>
-      <p:sp>
-        <p:nvSpPr>
-          <p:cNvPr id="5" name="TextBox 4"/>
-          <p:cNvSpPr txBox="1"/>
+          <a:bodyPr rtlCol="0" anchor="ctr" wrap="square" lIns="164592" tIns="164592" rIns="164592" bIns="164592"/>
+          <a:lstStyle/>
+          <a:p>
+            <a:pPr algn="ctr">
+              <a:defRPr sz="1150" b="1">
+                <a:solidFill>
+                  <a:srgbClr val="12261E"/>
+                </a:solidFill>
+                <a:latin typeface="Arial"/>
+              </a:defRPr>
+            </a:pPr>
+            <a:r>
+              <a:t>[PR]  Praween Singh Rawat</a:t>
+            </a:r>
+          </a:p>
+          <a:p>
+            <a:pPr>
+              <a:spcAft>
+                <a:spcPts val="600"/>
+              </a:spcAft>
+              <a:defRPr sz="850" b="1">
+                <a:solidFill>
+                  <a:srgbClr val="E29524"/>
+                </a:solidFill>
+                <a:latin typeface="Arial"/>
+              </a:defRPr>
+            </a:pPr>
+            <a:r>
+              <a:t>FRONTEND MAIN LEAD</a:t>
+            </a:r>
+          </a:p>
+          <a:p>
+            <a:pPr>
+              <a:defRPr sz="950">
+                <a:solidFill>
+                  <a:srgbClr val="64748B"/>
+                </a:solidFill>
+                <a:latin typeface="Arial"/>
+              </a:defRPr>
+            </a:pPr>
+            <a:r>
+              <a:t>UI/UX architecture &amp; design tokens; interactive Retailer &amp; Wholesaler Dashboards; comprehensive profile management engines; responsive layouts.</a:t>
+            </a:r>
+          </a:p>
+        </p:txBody>
+      </p:sp>
+      <p:sp>
+        <p:nvSpPr>
+          <p:cNvPr id="11" name="Rounded Rectangle 10"/>
+          <p:cNvSpPr/>
           <p:nvPr/>
         </p:nvSpPr>
         <p:spPr>
           <a:xfrm>
-            <a:off x="914400" y="1554480"/>
-            <a:ext cx="2962656" cy="4663440"/>
-          </a:xfrm>
-          <a:prstGeom prst="rect">
-            <a:avLst/>
-          </a:prstGeom>
-          <a:noFill/>
-        </p:spPr>
-        <p:txBody>
-          <a:bodyPr wrap="square">
-            <a:spAutoFit/>
-          </a:bodyPr>
-          <a:lstStyle/>
-          <a:p>
-            <a:pPr>
-              <a:spcAft>
-                <a:spcPts val="1000"/>
-              </a:spcAft>
-              <a:defRPr sz="1300" b="1">
-                <a:solidFill>
-                  <a:srgbClr val="FFA062"/>
-                </a:solidFill>
-                <a:latin typeface="Arial"/>
-              </a:defRPr>
-            </a:pPr>
-            <a:r>
-              <a:t>RETAILER WORKFLOW (BUYER)</a:t>
-            </a:r>
-          </a:p>
-          <a:p>
-            <a:pPr>
-              <a:defRPr sz="1150" b="1">
-                <a:solidFill>
-                  <a:srgbClr val="FFFFFF"/>
-                </a:solidFill>
-                <a:latin typeface="Arial"/>
-              </a:defRPr>
-            </a:pPr>
-            <a:r>
-              <a:t>✔ Hyper-Local Discovery</a:t>
-            </a:r>
-          </a:p>
-          <a:p>
-            <a:pPr>
-              <a:spcAft>
-                <a:spcPts val="700"/>
-              </a:spcAft>
-              <a:defRPr sz="950">
-                <a:solidFill>
-                  <a:srgbClr val="B9AFC6"/>
-                </a:solidFill>
-                <a:latin typeface="Arial"/>
-              </a:defRPr>
-            </a:pPr>
-            <a:r>
-              <a:t>Search bulk commodities by distance (&lt;5km, 10km, 15km+) and verified mandi mills.</a:t>
-            </a:r>
-          </a:p>
-          <a:p>
-            <a:pPr>
-              <a:defRPr sz="1150" b="1">
-                <a:solidFill>
-                  <a:srgbClr val="FFFFFF"/>
-                </a:solidFill>
-                <a:latin typeface="Arial"/>
-              </a:defRPr>
-            </a:pPr>
-            <a:r>
-              <a:t>✔ Price Discovery Spotlight</a:t>
-            </a:r>
-          </a:p>
-          <a:p>
-            <a:pPr>
-              <a:spcAft>
-                <a:spcPts val="700"/>
-              </a:spcAft>
-              <a:defRPr sz="950">
-                <a:solidFill>
-                  <a:srgbClr val="B9AFC6"/>
-                </a:solidFill>
-                <a:latin typeface="Arial"/>
-              </a:defRPr>
-            </a:pPr>
-            <a:r>
-              <a:t>Real-time savings benchmarked directly against official APMC Mandi rates (-12.8% savings).</a:t>
-            </a:r>
-          </a:p>
-          <a:p>
-            <a:pPr>
-              <a:defRPr sz="1150" b="1">
-                <a:solidFill>
-                  <a:srgbClr val="FFFFFF"/>
-                </a:solidFill>
-                <a:latin typeface="Arial"/>
-              </a:defRPr>
-            </a:pPr>
-            <a:r>
-              <a:t>✔ Source Cart &amp; Tracking</a:t>
-            </a:r>
-          </a:p>
-          <a:p>
-            <a:pPr>
-              <a:spcAft>
-                <a:spcPts val="700"/>
-              </a:spcAft>
-              <a:defRPr sz="950">
-                <a:solidFill>
-                  <a:srgbClr val="B9AFC6"/>
-                </a:solidFill>
-                <a:latin typeface="Arial"/>
-              </a:defRPr>
-            </a:pPr>
-            <a:r>
-              <a:t>Bulk purchase with minimum order quantities and track status (Pending, Dispatched, Delivered).</a:t>
-            </a:r>
-          </a:p>
-          <a:p>
-            <a:pPr>
-              <a:defRPr sz="1150" b="1">
-                <a:solidFill>
-                  <a:srgbClr val="FFFFFF"/>
-                </a:solidFill>
-                <a:latin typeface="Arial"/>
-              </a:defRPr>
-            </a:pPr>
-            <a:r>
-              <a:t>✔ Store Profile Manager</a:t>
-            </a:r>
-          </a:p>
-          <a:p>
-            <a:pPr>
-              <a:spcAft>
-                <a:spcPts val="700"/>
-              </a:spcAft>
-              <a:defRPr sz="950">
-                <a:solidFill>
-                  <a:srgbClr val="B9AFC6"/>
-                </a:solidFill>
-                <a:latin typeface="Arial"/>
-              </a:defRPr>
-            </a:pPr>
-            <a:r>
-              <a:t>Control delivery radius, accepted payment modes (COD, NEFT, Card), and store licenses.</a:t>
-            </a:r>
-          </a:p>
-        </p:txBody>
-      </p:sp>
-      <p:sp>
-        <p:nvSpPr>
-          <p:cNvPr id="6" name="Rounded Rectangle 5"/>
-          <p:cNvSpPr/>
-          <p:nvPr/>
-        </p:nvSpPr>
-        <p:spPr>
-          <a:xfrm>
-            <a:off x="4389120" y="1417320"/>
-            <a:ext cx="3328416" cy="4937760"/>
+            <a:off x="3447288" y="3383280"/>
+            <a:ext cx="2542032" cy="2926080"/>
           </a:xfrm>
           <a:prstGeom prst="roundRect">
             <a:avLst/>
           </a:prstGeom>
           <a:solidFill>
-            <a:srgbClr val="262030"/>
+            <a:srgbClr val="F8F9FA"/>
           </a:solidFill>
-          <a:ln w="19050">
+          <a:ln w="12700">
             <a:solidFill>
-              <a:srgbClr val="413750"/>
+              <a:srgbClr val="E2E8F0"/>
             </a:solidFill>
           </a:ln>
         </p:spPr>
@@ -4933,188 +4487,72 @@
           </a:fontRef>
         </p:style>
         <p:txBody>
-          <a:bodyPr rtlCol="0" anchor="ctr"/>
-          <a:lstStyle/>
-          <a:p>
-            <a:pPr algn="ctr"/>
-          </a:p>
-        </p:txBody>
-      </p:sp>
-      <p:sp>
-        <p:nvSpPr>
-          <p:cNvPr id="7" name="TextBox 6"/>
-          <p:cNvSpPr txBox="1"/>
+          <a:bodyPr rtlCol="0" anchor="ctr" wrap="square" lIns="164592" tIns="164592" rIns="164592" bIns="164592"/>
+          <a:lstStyle/>
+          <a:p>
+            <a:pPr algn="ctr">
+              <a:defRPr sz="1150" b="1">
+                <a:solidFill>
+                  <a:srgbClr val="12261E"/>
+                </a:solidFill>
+                <a:latin typeface="Arial"/>
+              </a:defRPr>
+            </a:pPr>
+            <a:r>
+              <a:t>[AS]  Anvitha S</a:t>
+            </a:r>
+          </a:p>
+          <a:p>
+            <a:pPr>
+              <a:spcAft>
+                <a:spcPts val="600"/>
+              </a:spcAft>
+              <a:defRPr sz="850" b="1">
+                <a:solidFill>
+                  <a:srgbClr val="E29524"/>
+                </a:solidFill>
+                <a:latin typeface="Arial"/>
+              </a:defRPr>
+            </a:pPr>
+            <a:r>
+              <a:t>FRONTEND DEVELOPER</a:t>
+            </a:r>
+          </a:p>
+          <a:p>
+            <a:pPr>
+              <a:defRPr sz="950">
+                <a:solidFill>
+                  <a:srgbClr val="64748B"/>
+                </a:solidFill>
+                <a:latin typeface="Arial"/>
+              </a:defRPr>
+            </a:pPr>
+            <a:r>
+              <a:t>Multi-role authentication workflows; 3-stage onboarding wizard (GSTIN, Address, Preferences); centralized API service (`api.js`); Source Cart state.</a:t>
+            </a:r>
+          </a:p>
+        </p:txBody>
+      </p:sp>
+      <p:sp>
+        <p:nvSpPr>
+          <p:cNvPr id="12" name="Rounded Rectangle 11"/>
+          <p:cNvSpPr/>
           <p:nvPr/>
         </p:nvSpPr>
         <p:spPr>
           <a:xfrm>
-            <a:off x="4572000" y="1554480"/>
-            <a:ext cx="2962656" cy="4663440"/>
-          </a:xfrm>
-          <a:prstGeom prst="rect">
-            <a:avLst/>
-          </a:prstGeom>
-          <a:noFill/>
-        </p:spPr>
-        <p:txBody>
-          <a:bodyPr wrap="square">
-            <a:spAutoFit/>
-          </a:bodyPr>
-          <a:lstStyle/>
-          <a:p>
-            <a:pPr>
-              <a:spcAft>
-                <a:spcPts val="1000"/>
-              </a:spcAft>
-              <a:defRPr sz="1300" b="1">
-                <a:solidFill>
-                  <a:srgbClr val="3B82F6"/>
-                </a:solidFill>
-                <a:latin typeface="Arial"/>
-              </a:defRPr>
-            </a:pPr>
-            <a:r>
-              <a:t>SECURITY &amp; BACKEND ENGINE</a:t>
-            </a:r>
-          </a:p>
-          <a:p>
-            <a:pPr>
-              <a:defRPr sz="1150" b="1">
-                <a:solidFill>
-                  <a:srgbClr val="FFFFFF"/>
-                </a:solidFill>
-                <a:latin typeface="Arial"/>
-              </a:defRPr>
-            </a:pPr>
-            <a:r>
-              <a:t>⚡ Stateless JWT Auth</a:t>
-            </a:r>
-          </a:p>
-          <a:p>
-            <a:pPr>
-              <a:spcAft>
-                <a:spcPts val="700"/>
-              </a:spcAft>
-              <a:defRPr sz="950">
-                <a:solidFill>
-                  <a:srgbClr val="B9AFC6"/>
-                </a:solidFill>
-                <a:latin typeface="Arial"/>
-              </a:defRPr>
-            </a:pPr>
-            <a:r>
-              <a:t>Secure bearer token generation with 7-day expiration and tamper-proof user claims.</a:t>
-            </a:r>
-          </a:p>
-          <a:p>
-            <a:pPr>
-              <a:defRPr sz="1150" b="1">
-                <a:solidFill>
-                  <a:srgbClr val="FFFFFF"/>
-                </a:solidFill>
-                <a:latin typeface="Arial"/>
-              </a:defRPr>
-            </a:pPr>
-            <a:r>
-              <a:t>⚡ Dual-Mode Persistence</a:t>
-            </a:r>
-          </a:p>
-          <a:p>
-            <a:pPr>
-              <a:spcAft>
-                <a:spcPts val="700"/>
-              </a:spcAft>
-              <a:defRPr sz="950">
-                <a:solidFill>
-                  <a:srgbClr val="B9AFC6"/>
-                </a:solidFill>
-                <a:latin typeface="Arial"/>
-              </a:defRPr>
-            </a:pPr>
-            <a:r>
-              <a:t>Seamless fallback between live MongoDB Atlas and resilient in-memory stores (100% uptime).</a:t>
-            </a:r>
-          </a:p>
-          <a:p>
-            <a:pPr>
-              <a:defRPr sz="1150" b="1">
-                <a:solidFill>
-                  <a:srgbClr val="FFFFFF"/>
-                </a:solidFill>
-                <a:latin typeface="Arial"/>
-              </a:defRPr>
-            </a:pPr>
-            <a:r>
-              <a:t>⚡ Strict Role Barrier (RBAC)</a:t>
-            </a:r>
-          </a:p>
-          <a:p>
-            <a:pPr>
-              <a:spcAft>
-                <a:spcPts val="700"/>
-              </a:spcAft>
-              <a:defRPr sz="950">
-                <a:solidFill>
-                  <a:srgbClr val="B9AFC6"/>
-                </a:solidFill>
-                <a:latin typeface="Arial"/>
-              </a:defRPr>
-            </a:pPr>
-            <a:r>
-              <a:t>Prevents retailers from listing stock and wholesalers from placing orders.</a:t>
-            </a:r>
-          </a:p>
-          <a:p>
-            <a:pPr>
-              <a:defRPr sz="1150" b="1">
-                <a:solidFill>
-                  <a:srgbClr val="FFFFFF"/>
-                </a:solidFill>
-                <a:latin typeface="Arial"/>
-              </a:defRPr>
-            </a:pPr>
-            <a:r>
-              <a:t>⚡ Live Aggregation Engine</a:t>
-            </a:r>
-          </a:p>
-          <a:p>
-            <a:pPr>
-              <a:spcAft>
-                <a:spcPts val="700"/>
-              </a:spcAft>
-              <a:defRPr sz="950">
-                <a:solidFill>
-                  <a:srgbClr val="B9AFC6"/>
-                </a:solidFill>
-                <a:latin typeface="Arial"/>
-              </a:defRPr>
-            </a:pPr>
-            <a:r>
-              <a:t>Calculates live metrics from actual database order records rather than static hardcoding.</a:t>
-            </a:r>
-          </a:p>
-        </p:txBody>
-      </p:sp>
-      <p:sp>
-        <p:nvSpPr>
-          <p:cNvPr id="8" name="Rounded Rectangle 7"/>
-          <p:cNvSpPr/>
-          <p:nvPr/>
-        </p:nvSpPr>
-        <p:spPr>
-          <a:xfrm>
-            <a:off x="8046720" y="1417320"/>
-            <a:ext cx="3328416" cy="4937760"/>
+            <a:off x="6163056" y="3383280"/>
+            <a:ext cx="2542032" cy="2926080"/>
           </a:xfrm>
           <a:prstGeom prst="roundRect">
             <a:avLst/>
           </a:prstGeom>
           <a:solidFill>
-            <a:srgbClr val="262030"/>
+            <a:srgbClr val="F8F9FA"/>
           </a:solidFill>
-          <a:ln w="19050">
+          <a:ln w="12700">
             <a:solidFill>
-              <a:srgbClr val="413750"/>
+              <a:srgbClr val="E2E8F0"/>
             </a:solidFill>
           </a:ln>
         </p:spPr>
@@ -5133,286 +4571,72 @@
           </a:fontRef>
         </p:style>
         <p:txBody>
-          <a:bodyPr rtlCol="0" anchor="ctr"/>
-          <a:lstStyle/>
-          <a:p>
-            <a:pPr algn="ctr"/>
-          </a:p>
-        </p:txBody>
-      </p:sp>
-      <p:sp>
-        <p:nvSpPr>
-          <p:cNvPr id="9" name="TextBox 8"/>
-          <p:cNvSpPr txBox="1"/>
+          <a:bodyPr rtlCol="0" anchor="ctr" wrap="square" lIns="164592" tIns="164592" rIns="164592" bIns="164592"/>
+          <a:lstStyle/>
+          <a:p>
+            <a:pPr algn="ctr">
+              <a:defRPr sz="1150" b="1">
+                <a:solidFill>
+                  <a:srgbClr val="12261E"/>
+                </a:solidFill>
+                <a:latin typeface="Arial"/>
+              </a:defRPr>
+            </a:pPr>
+            <a:r>
+              <a:t>[AR]  Ashraj Singh Rana</a:t>
+            </a:r>
+          </a:p>
+          <a:p>
+            <a:pPr>
+              <a:spcAft>
+                <a:spcPts val="600"/>
+              </a:spcAft>
+              <a:defRPr sz="850" b="1">
+                <a:solidFill>
+                  <a:srgbClr val="E29524"/>
+                </a:solidFill>
+                <a:latin typeface="Arial"/>
+              </a:defRPr>
+            </a:pPr>
+            <a:r>
+              <a:t>BACKEND MAIN LEAD &amp; DEVOPS</a:t>
+            </a:r>
+          </a:p>
+          <a:p>
+            <a:pPr>
+              <a:defRPr sz="950">
+                <a:solidFill>
+                  <a:srgbClr val="64748B"/>
+                </a:solidFill>
+                <a:latin typeface="Arial"/>
+              </a:defRPr>
+            </a:pPr>
+            <a:r>
+              <a:t>Express REST API architecture; real-time dashboard aggregation engines (spend, revenue, APMC benchmark %); cloud deployment on Render &amp; Vercel.</a:t>
+            </a:r>
+          </a:p>
+        </p:txBody>
+      </p:sp>
+      <p:sp>
+        <p:nvSpPr>
+          <p:cNvPr id="13" name="Rounded Rectangle 12"/>
+          <p:cNvSpPr/>
           <p:nvPr/>
         </p:nvSpPr>
         <p:spPr>
           <a:xfrm>
-            <a:off x="8229600" y="1554480"/>
-            <a:ext cx="2962656" cy="4663440"/>
-          </a:xfrm>
-          <a:prstGeom prst="rect">
-            <a:avLst/>
-          </a:prstGeom>
-          <a:noFill/>
-        </p:spPr>
-        <p:txBody>
-          <a:bodyPr wrap="square">
-            <a:spAutoFit/>
-          </a:bodyPr>
-          <a:lstStyle/>
-          <a:p>
-            <a:pPr>
-              <a:spcAft>
-                <a:spcPts val="1000"/>
-              </a:spcAft>
-              <a:defRPr sz="1300" b="1">
-                <a:solidFill>
-                  <a:srgbClr val="22C55E"/>
-                </a:solidFill>
-                <a:latin typeface="Arial"/>
-              </a:defRPr>
-            </a:pPr>
-            <a:r>
-              <a:t>WHOLESALER WORKFLOW (SELLER)</a:t>
-            </a:r>
-          </a:p>
-          <a:p>
-            <a:pPr>
-              <a:defRPr sz="1150" b="1">
-                <a:solidFill>
-                  <a:srgbClr val="FFFFFF"/>
-                </a:solidFill>
-                <a:latin typeface="Arial"/>
-              </a:defRPr>
-            </a:pPr>
-            <a:r>
-              <a:t>✔ Live Revenue &amp; KPI Cards</a:t>
-            </a:r>
-          </a:p>
-          <a:p>
-            <a:pPr>
-              <a:spcAft>
-                <a:spcPts val="700"/>
-              </a:spcAft>
-              <a:defRPr sz="950">
-                <a:solidFill>
-                  <a:srgbClr val="B9AFC6"/>
-                </a:solidFill>
-                <a:latin typeface="Arial"/>
-              </a:defRPr>
-            </a:pPr>
-            <a:r>
-              <a:t>Calculates month revenue from eligible orders (₹12.4L) and active connected retailers.</a:t>
-            </a:r>
-          </a:p>
-          <a:p>
-            <a:pPr>
-              <a:defRPr sz="1150" b="1">
-                <a:solidFill>
-                  <a:srgbClr val="FFFFFF"/>
-                </a:solidFill>
-                <a:latin typeface="Arial"/>
-              </a:defRPr>
-            </a:pPr>
-            <a:r>
-              <a:t>✔ Inline Price Mutation</a:t>
-            </a:r>
-          </a:p>
-          <a:p>
-            <a:pPr>
-              <a:spcAft>
-                <a:spcPts val="700"/>
-              </a:spcAft>
-              <a:defRPr sz="950">
-                <a:solidFill>
-                  <a:srgbClr val="B9AFC6"/>
-                </a:solidFill>
-                <a:latin typeface="Arial"/>
-              </a:defRPr>
-            </a:pPr>
-            <a:r>
-              <a:t>Directly edit SKU base prices on inventory cards with immediate backend persistence.</a:t>
-            </a:r>
-          </a:p>
-          <a:p>
-            <a:pPr>
-              <a:defRPr sz="1150" b="1">
-                <a:solidFill>
-                  <a:srgbClr val="FFFFFF"/>
-                </a:solidFill>
-                <a:latin typeface="Arial"/>
-              </a:defRPr>
-            </a:pPr>
-            <a:r>
-              <a:t>✔ Stock Depletion Alerts</a:t>
-            </a:r>
-          </a:p>
-          <a:p>
-            <a:pPr>
-              <a:spcAft>
-                <a:spcPts val="700"/>
-              </a:spcAft>
-              <a:defRPr sz="950">
-                <a:solidFill>
-                  <a:srgbClr val="B9AFC6"/>
-                </a:solidFill>
-                <a:latin typeface="Arial"/>
-              </a:defRPr>
-            </a:pPr>
-            <a:r>
-              <a:t>Automatic triggers identifying low-stock inventory (threshold &lt;= 10 units).</a:t>
-            </a:r>
-          </a:p>
-          <a:p>
-            <a:pPr>
-              <a:defRPr sz="1150" b="1">
-                <a:solidFill>
-                  <a:srgbClr val="FFFFFF"/>
-                </a:solidFill>
-                <a:latin typeface="Arial"/>
-              </a:defRPr>
-            </a:pPr>
-            <a:r>
-              <a:t>✔ Order Fulfilment Queue</a:t>
-            </a:r>
-          </a:p>
-          <a:p>
-            <a:pPr>
-              <a:spcAft>
-                <a:spcPts val="700"/>
-              </a:spcAft>
-              <a:defRPr sz="950">
-                <a:solidFill>
-                  <a:srgbClr val="B9AFC6"/>
-                </a:solidFill>
-                <a:latin typeface="Arial"/>
-              </a:defRPr>
-            </a:pPr>
-            <a:r>
-              <a:t>Prioritized fulfillment table displaying buyer identity, quantity, and settlement values.</a:t>
-            </a:r>
-          </a:p>
-        </p:txBody>
-      </p:sp>
-    </p:spTree>
-  </p:cSld>
-  <p:clrMapOvr>
-    <a:masterClrMapping/>
-  </p:clrMapOvr>
-</p:sld>
-</file>
-
-<file path=ppt/slides/slide4.xml><?xml version="1.0" encoding="utf-8"?>
-<p:sld xmlns:a="http://schemas.openxmlformats.org/drawingml/2006/main" xmlns:p="http://schemas.openxmlformats.org/presentationml/2006/main" xmlns:r="http://schemas.openxmlformats.org/officeDocument/2006/relationships">
-  <p:cSld>
-    <p:bg>
-      <p:bgPr>
-        <a:solidFill>
-          <a:srgbClr val="1A1622"/>
-        </a:solidFill>
-        <a:effectLst/>
-      </p:bgPr>
-    </p:bg>
-    <p:spTree>
-      <p:nvGrpSpPr>
-        <p:cNvPr id="1" name=""/>
-        <p:cNvGrpSpPr/>
-        <p:nvPr/>
-      </p:nvGrpSpPr>
-      <p:grpSpPr/>
-      <p:sp>
-        <p:nvSpPr>
-          <p:cNvPr id="2" name="TextBox 1"/>
-          <p:cNvSpPr txBox="1"/>
-          <p:nvPr/>
-        </p:nvSpPr>
-        <p:spPr>
-          <a:xfrm>
-            <a:off x="731520" y="365760"/>
-            <a:ext cx="10698480" cy="320040"/>
-          </a:xfrm>
-          <a:prstGeom prst="rect">
-            <a:avLst/>
-          </a:prstGeom>
-          <a:noFill/>
-        </p:spPr>
-        <p:txBody>
-          <a:bodyPr wrap="square">
-            <a:spAutoFit/>
-          </a:bodyPr>
-          <a:lstStyle/>
-          <a:p>
-            <a:pPr>
-              <a:defRPr sz="1100" b="1">
-                <a:solidFill>
-                  <a:srgbClr val="FFA062"/>
-                </a:solidFill>
-                <a:latin typeface="Arial"/>
-              </a:defRPr>
-            </a:pPr>
-            <a:r>
-              <a:t>STOCKLINK CAPSTONE PRESENTATION</a:t>
-            </a:r>
-          </a:p>
-        </p:txBody>
-      </p:sp>
-      <p:sp>
-        <p:nvSpPr>
-          <p:cNvPr id="3" name="TextBox 2"/>
-          <p:cNvSpPr txBox="1"/>
-          <p:nvPr/>
-        </p:nvSpPr>
-        <p:spPr>
-          <a:xfrm>
-            <a:off x="731520" y="685800"/>
-            <a:ext cx="10698480" cy="594360"/>
-          </a:xfrm>
-          <a:prstGeom prst="rect">
-            <a:avLst/>
-          </a:prstGeom>
-          <a:noFill/>
-        </p:spPr>
-        <p:txBody>
-          <a:bodyPr wrap="square">
-            <a:spAutoFit/>
-          </a:bodyPr>
-          <a:lstStyle/>
-          <a:p>
-            <a:pPr>
-              <a:defRPr sz="2400" b="1">
-                <a:solidFill>
-                  <a:srgbClr val="FFFFFF"/>
-                </a:solidFill>
-                <a:latin typeface="Arial"/>
-              </a:defRPr>
-            </a:pPr>
-            <a:r>
-              <a:t>Project Analysis: Advantages, Limitations &amp; Roadmap</a:t>
-            </a:r>
-          </a:p>
-        </p:txBody>
-      </p:sp>
-      <p:sp>
-        <p:nvSpPr>
-          <p:cNvPr id="4" name="Rounded Rectangle 3"/>
-          <p:cNvSpPr/>
-          <p:nvPr/>
-        </p:nvSpPr>
-        <p:spPr>
-          <a:xfrm>
-            <a:off x="731520" y="1417320"/>
-            <a:ext cx="3328416" cy="4937760"/>
+            <a:off x="8878824" y="3383280"/>
+            <a:ext cx="2542032" cy="2926080"/>
           </a:xfrm>
           <a:prstGeom prst="roundRect">
             <a:avLst/>
           </a:prstGeom>
           <a:solidFill>
-            <a:srgbClr val="262030"/>
+            <a:srgbClr val="F8F9FA"/>
           </a:solidFill>
-          <a:ln w="19050">
+          <a:ln w="12700">
             <a:solidFill>
-              <a:srgbClr val="413750"/>
+              <a:srgbClr val="E2E8F0"/>
             </a:solidFill>
           </a:ln>
         </p:spPr>
@@ -5431,23 +4655,88 @@
           </a:fontRef>
         </p:style>
         <p:txBody>
-          <a:bodyPr rtlCol="0" anchor="ctr"/>
-          <a:lstStyle/>
-          <a:p>
-            <a:pPr algn="ctr"/>
-          </a:p>
-        </p:txBody>
-      </p:sp>
-      <p:sp>
-        <p:nvSpPr>
-          <p:cNvPr id="5" name="TextBox 4"/>
+          <a:bodyPr rtlCol="0" anchor="ctr" wrap="square" lIns="164592" tIns="164592" rIns="164592" bIns="164592"/>
+          <a:lstStyle/>
+          <a:p>
+            <a:pPr algn="ctr">
+              <a:defRPr sz="1150" b="1">
+                <a:solidFill>
+                  <a:srgbClr val="12261E"/>
+                </a:solidFill>
+                <a:latin typeface="Arial"/>
+              </a:defRPr>
+            </a:pPr>
+            <a:r>
+              <a:t>[TM]  Tanishq Mittal</a:t>
+            </a:r>
+          </a:p>
+          <a:p>
+            <a:pPr>
+              <a:spcAft>
+                <a:spcPts val="600"/>
+              </a:spcAft>
+              <a:defRPr sz="850" b="1">
+                <a:solidFill>
+                  <a:srgbClr val="E29524"/>
+                </a:solidFill>
+                <a:latin typeface="Arial"/>
+              </a:defRPr>
+            </a:pPr>
+            <a:r>
+              <a:t>BACKEND &amp; DATABASE DEVELOPER</a:t>
+            </a:r>
+          </a:p>
+          <a:p>
+            <a:pPr>
+              <a:defRPr sz="950">
+                <a:solidFill>
+                  <a:srgbClr val="64748B"/>
+                </a:solidFill>
+                <a:latin typeface="Arial"/>
+              </a:defRPr>
+            </a:pPr>
+            <a:r>
+              <a:t>Database connection &amp; Mongoose schemas (User, Product, Order); role-based JWT security middleware; resilient in-memory dual fallback engine.</a:t>
+            </a:r>
+          </a:p>
+        </p:txBody>
+      </p:sp>
+    </p:spTree>
+  </p:cSld>
+  <p:clrMapOvr>
+    <a:masterClrMapping/>
+  </p:clrMapOvr>
+</p:sld>
+</file>
+
+<file path=ppt/slides/slide4.xml><?xml version="1.0" encoding="utf-8"?>
+<p:sld xmlns:a="http://schemas.openxmlformats.org/drawingml/2006/main" xmlns:p="http://schemas.openxmlformats.org/presentationml/2006/main" xmlns:r="http://schemas.openxmlformats.org/officeDocument/2006/relationships">
+  <p:cSld>
+    <p:bg>
+      <p:bgPr>
+        <a:solidFill>
+          <a:srgbClr val="FFFFFF"/>
+        </a:solidFill>
+        <a:effectLst/>
+      </p:bgPr>
+    </p:bg>
+    <p:spTree>
+      <p:nvGrpSpPr>
+        <p:cNvPr id="1" name=""/>
+        <p:cNvGrpSpPr/>
+        <p:nvPr/>
+      </p:nvGrpSpPr>
+      <p:grpSpPr/>
+      <p:sp>
+        <p:nvSpPr>
+          <p:cNvPr id="2" name="TextBox 1"/>
           <p:cNvSpPr txBox="1"/>
           <p:nvPr/>
         </p:nvSpPr>
         <p:spPr>
           <a:xfrm>
-            <a:off x="914400" y="1554480"/>
-            <a:ext cx="2962656" cy="4663440"/>
+            <a:off x="731520" y="365760"/>
+            <a:ext cx="10698480" cy="731520"/>
           </a:xfrm>
           <a:prstGeom prst="rect">
             <a:avLst/>
@@ -5461,158 +4750,75 @@
           <a:lstStyle/>
           <a:p>
             <a:pPr>
-              <a:spcAft>
-                <a:spcPts val="1000"/>
-              </a:spcAft>
-              <a:defRPr sz="1300" b="1">
-                <a:solidFill>
-                  <a:srgbClr val="22C55E"/>
-                </a:solidFill>
-                <a:latin typeface="Arial"/>
-              </a:defRPr>
-            </a:pPr>
-            <a:r>
-              <a:t>KEY ADVANTAGES</a:t>
-            </a:r>
-          </a:p>
-          <a:p>
-            <a:pPr>
-              <a:defRPr sz="1150" b="1">
-                <a:solidFill>
-                  <a:srgbClr val="FFFFFF"/>
-                </a:solidFill>
-                <a:latin typeface="Arial"/>
-              </a:defRPr>
-            </a:pPr>
-            <a:r>
-              <a:t>★ Direct Disintermediation</a:t>
-            </a:r>
-          </a:p>
-          <a:p>
-            <a:pPr>
-              <a:spcAft>
-                <a:spcPts val="700"/>
-              </a:spcAft>
-              <a:defRPr sz="950">
-                <a:solidFill>
-                  <a:srgbClr val="B9AFC6"/>
-                </a:solidFill>
-                <a:latin typeface="Arial"/>
-              </a:defRPr>
-            </a:pPr>
-            <a:r>
-              <a:t>Direct mill-to-retailer linkage eliminates 12-18% middleman commission markups.</a:t>
-            </a:r>
-          </a:p>
-          <a:p>
-            <a:pPr>
-              <a:defRPr sz="1150" b="1">
-                <a:solidFill>
-                  <a:srgbClr val="FFFFFF"/>
-                </a:solidFill>
-                <a:latin typeface="Arial"/>
-              </a:defRPr>
-            </a:pPr>
-            <a:r>
-              <a:t>★ Zero Ghost Inventory</a:t>
-            </a:r>
-          </a:p>
-          <a:p>
-            <a:pPr>
-              <a:spcAft>
-                <a:spcPts val="700"/>
-              </a:spcAft>
-              <a:defRPr sz="950">
-                <a:solidFill>
-                  <a:srgbClr val="B9AFC6"/>
-                </a:solidFill>
-                <a:latin typeface="Arial"/>
-              </a:defRPr>
-            </a:pPr>
-            <a:r>
-              <a:t>Real-time stock reservation prevents cancelled orders and supply disruption.</a:t>
-            </a:r>
-          </a:p>
-          <a:p>
-            <a:pPr>
-              <a:defRPr sz="1150" b="1">
-                <a:solidFill>
-                  <a:srgbClr val="FFFFFF"/>
-                </a:solidFill>
-                <a:latin typeface="Arial"/>
-              </a:defRPr>
-            </a:pPr>
-            <a:r>
-              <a:t>★ Transparent Price Discovery</a:t>
-            </a:r>
-          </a:p>
-          <a:p>
-            <a:pPr>
-              <a:spcAft>
-                <a:spcPts val="700"/>
-              </a:spcAft>
-              <a:defRPr sz="950">
-                <a:solidFill>
-                  <a:srgbClr val="B9AFC6"/>
-                </a:solidFill>
-                <a:latin typeface="Arial"/>
-              </a:defRPr>
-            </a:pPr>
-            <a:r>
-              <a:t>Empowers local shopkeepers with live APMC mandi benchmark pricing.</a:t>
-            </a:r>
-          </a:p>
-          <a:p>
-            <a:pPr>
-              <a:defRPr sz="1150" b="1">
-                <a:solidFill>
-                  <a:srgbClr val="FFFFFF"/>
-                </a:solidFill>
-                <a:latin typeface="Arial"/>
-              </a:defRPr>
-            </a:pPr>
-            <a:r>
-              <a:t>★ Resilient Zero-Downtime Engine</a:t>
-            </a:r>
-          </a:p>
-          <a:p>
-            <a:pPr>
-              <a:spcAft>
-                <a:spcPts val="700"/>
-              </a:spcAft>
-              <a:defRPr sz="950">
-                <a:solidFill>
-                  <a:srgbClr val="B9AFC6"/>
-                </a:solidFill>
-                <a:latin typeface="Arial"/>
-              </a:defRPr>
-            </a:pPr>
-            <a:r>
-              <a:t>Dual-persistence store guarantees continuous platform uptime during server outages.</a:t>
-            </a:r>
-          </a:p>
-        </p:txBody>
-      </p:sp>
-      <p:sp>
-        <p:nvSpPr>
-          <p:cNvPr id="6" name="Rounded Rectangle 5"/>
+              <a:defRPr sz="2400" b="1">
+                <a:solidFill>
+                  <a:srgbClr val="12261E"/>
+                </a:solidFill>
+                <a:latin typeface="Arial"/>
+              </a:defRPr>
+            </a:pPr>
+            <a:r>
+              <a:t>Advantages, disadvantages &amp; future scope</a:t>
+            </a:r>
+          </a:p>
+        </p:txBody>
+      </p:sp>
+      <p:sp>
+        <p:nvSpPr>
+          <p:cNvPr id="3" name="TextBox 2"/>
+          <p:cNvSpPr txBox="1"/>
+          <p:nvPr/>
+        </p:nvSpPr>
+        <p:spPr>
+          <a:xfrm>
+            <a:off x="11155680" y="6217920"/>
+            <a:ext cx="731520" cy="365760"/>
+          </a:xfrm>
+          <a:prstGeom prst="rect">
+            <a:avLst/>
+          </a:prstGeom>
+          <a:noFill/>
+        </p:spPr>
+        <p:txBody>
+          <a:bodyPr wrap="none">
+            <a:spAutoFit/>
+          </a:bodyPr>
+          <a:lstStyle/>
+          <a:p>
+            <a:pPr>
+              <a:defRPr sz="1400" b="1">
+                <a:solidFill>
+                  <a:srgbClr val="64748B"/>
+                </a:solidFill>
+                <a:latin typeface="Arial"/>
+              </a:defRPr>
+            </a:pPr>
+            <a:r>
+              <a:t>4</a:t>
+            </a:r>
+          </a:p>
+        </p:txBody>
+      </p:sp>
+      <p:sp>
+        <p:nvSpPr>
+          <p:cNvPr id="4" name="Rounded Rectangle 3"/>
           <p:cNvSpPr/>
           <p:nvPr/>
         </p:nvSpPr>
         <p:spPr>
           <a:xfrm>
-            <a:off x="4389120" y="1417320"/>
+            <a:off x="731520" y="1188720"/>
             <a:ext cx="3328416" cy="4937760"/>
           </a:xfrm>
           <a:prstGeom prst="roundRect">
             <a:avLst/>
           </a:prstGeom>
           <a:solidFill>
-            <a:srgbClr val="262030"/>
+            <a:srgbClr val="F8F9FA"/>
           </a:solidFill>
-          <a:ln w="19050">
+          <a:ln w="12700">
             <a:solidFill>
-              <a:srgbClr val="413750"/>
+              <a:srgbClr val="E2E8F0"/>
             </a:solidFill>
           </a:ln>
         </p:spPr>
@@ -5640,14 +4846,14 @@
       </p:sp>
       <p:sp>
         <p:nvSpPr>
-          <p:cNvPr id="7" name="TextBox 6"/>
+          <p:cNvPr id="5" name="TextBox 4"/>
           <p:cNvSpPr txBox="1"/>
           <p:nvPr/>
         </p:nvSpPr>
         <p:spPr>
           <a:xfrm>
-            <a:off x="4572000" y="1554480"/>
-            <a:ext cx="2962656" cy="4663440"/>
+            <a:off x="914400" y="1371600"/>
+            <a:ext cx="2962656" cy="4572000"/>
           </a:xfrm>
           <a:prstGeom prst="rect">
             <a:avLst/>
@@ -5662,157 +4868,157 @@
           <a:p>
             <a:pPr>
               <a:spcAft>
-                <a:spcPts val="1000"/>
+                <a:spcPts val="1200"/>
               </a:spcAft>
-              <a:defRPr sz="1300" b="1">
-                <a:solidFill>
-                  <a:srgbClr val="FFA062"/>
-                </a:solidFill>
-                <a:latin typeface="Arial"/>
-              </a:defRPr>
-            </a:pPr>
-            <a:r>
-              <a:t>CURRENT LIMITATIONS</a:t>
+              <a:defRPr sz="1400" b="1">
+                <a:solidFill>
+                  <a:srgbClr val="12261E"/>
+                </a:solidFill>
+                <a:latin typeface="Arial"/>
+              </a:defRPr>
+            </a:pPr>
+            <a:r>
+              <a:t>Advantages</a:t>
             </a:r>
           </a:p>
           <a:p>
             <a:pPr>
               <a:defRPr sz="1150" b="1">
                 <a:solidFill>
-                  <a:srgbClr val="FFFFFF"/>
-                </a:solidFill>
-                <a:latin typeface="Arial"/>
-              </a:defRPr>
-            </a:pPr>
-            <a:r>
-              <a:t>▲ Active Internet Dependency</a:t>
+                  <a:srgbClr val="12261E"/>
+                </a:solidFill>
+                <a:latin typeface="Arial"/>
+              </a:defRPr>
+            </a:pPr>
+            <a:r>
+              <a:t>• Direct disintermediation</a:t>
             </a:r>
           </a:p>
           <a:p>
             <a:pPr>
               <a:spcAft>
-                <a:spcPts val="700"/>
+                <a:spcPts val="800"/>
               </a:spcAft>
               <a:defRPr sz="950">
                 <a:solidFill>
-                  <a:srgbClr val="B9AFC6"/>
-                </a:solidFill>
-                <a:latin typeface="Arial"/>
-              </a:defRPr>
-            </a:pPr>
-            <a:r>
-              <a:t>Live inventory counts and rate updates require continuous internet connectivity.</a:t>
+                  <a:srgbClr val="64748B"/>
+                </a:solidFill>
+                <a:latin typeface="Arial"/>
+              </a:defRPr>
+            </a:pPr>
+            <a:r>
+              <a:t>Direct mill-to-retailer linkage eliminates 12–18% middleman commission markups.</a:t>
             </a:r>
           </a:p>
           <a:p>
             <a:pPr>
               <a:defRPr sz="1150" b="1">
                 <a:solidFill>
-                  <a:srgbClr val="FFFFFF"/>
-                </a:solidFill>
-                <a:latin typeface="Arial"/>
-              </a:defRPr>
-            </a:pPr>
-            <a:r>
-              <a:t>▲ Local Geofence Boundaries</a:t>
+                  <a:srgbClr val="12261E"/>
+                </a:solidFill>
+                <a:latin typeface="Arial"/>
+              </a:defRPr>
+            </a:pPr>
+            <a:r>
+              <a:t>• Zero ghost inventory</a:t>
             </a:r>
           </a:p>
           <a:p>
             <a:pPr>
               <a:spcAft>
-                <a:spcPts val="700"/>
+                <a:spcPts val="800"/>
               </a:spcAft>
               <a:defRPr sz="950">
                 <a:solidFill>
-                  <a:srgbClr val="B9AFC6"/>
-                </a:solidFill>
-                <a:latin typeface="Arial"/>
-              </a:defRPr>
-            </a:pPr>
-            <a:r>
-              <a:t>Logistics radius is currently tailored for localized mandi hubs (&lt;15-20km).</a:t>
+                  <a:srgbClr val="64748B"/>
+                </a:solidFill>
+                <a:latin typeface="Arial"/>
+              </a:defRPr>
+            </a:pPr>
+            <a:r>
+              <a:t>Real-time stock reservation prevents cancelled orders and stockouts.</a:t>
             </a:r>
           </a:p>
           <a:p>
             <a:pPr>
               <a:defRPr sz="1150" b="1">
                 <a:solidFill>
-                  <a:srgbClr val="FFFFFF"/>
-                </a:solidFill>
-                <a:latin typeface="Arial"/>
-              </a:defRPr>
-            </a:pPr>
-            <a:r>
-              <a:t>▲ Single Currency Ecosystem</a:t>
+                  <a:srgbClr val="12261E"/>
+                </a:solidFill>
+                <a:latin typeface="Arial"/>
+              </a:defRPr>
+            </a:pPr>
+            <a:r>
+              <a:t>• Live APMC price discovery</a:t>
             </a:r>
           </a:p>
           <a:p>
             <a:pPr>
               <a:spcAft>
-                <a:spcPts val="700"/>
+                <a:spcPts val="800"/>
               </a:spcAft>
               <a:defRPr sz="950">
                 <a:solidFill>
-                  <a:srgbClr val="B9AFC6"/>
-                </a:solidFill>
-                <a:latin typeface="Arial"/>
-              </a:defRPr>
-            </a:pPr>
-            <a:r>
-              <a:t>Transactions are optimized exclusively for Indian Rupees (INR) and domestic GSTIN formats.</a:t>
+                  <a:srgbClr val="64748B"/>
+                </a:solidFill>
+                <a:latin typeface="Arial"/>
+              </a:defRPr>
+            </a:pPr>
+            <a:r>
+              <a:t>Empowers local shopkeepers with live mandi benchmark pricing.</a:t>
             </a:r>
           </a:p>
           <a:p>
             <a:pPr>
               <a:defRPr sz="1150" b="1">
                 <a:solidFill>
-                  <a:srgbClr val="FFFFFF"/>
-                </a:solidFill>
-                <a:latin typeface="Arial"/>
-              </a:defRPr>
-            </a:pPr>
-            <a:r>
-              <a:t>▲ Manual Payment Verification</a:t>
+                  <a:srgbClr val="12261E"/>
+                </a:solidFill>
+                <a:latin typeface="Arial"/>
+              </a:defRPr>
+            </a:pPr>
+            <a:r>
+              <a:t>• Resilient dual engine</a:t>
             </a:r>
           </a:p>
           <a:p>
             <a:pPr>
               <a:spcAft>
-                <a:spcPts val="700"/>
+                <a:spcPts val="800"/>
               </a:spcAft>
               <a:defRPr sz="950">
                 <a:solidFill>
-                  <a:srgbClr val="B9AFC6"/>
-                </a:solidFill>
-                <a:latin typeface="Arial"/>
-              </a:defRPr>
-            </a:pPr>
-            <a:r>
-              <a:t>High-value bank transfers currently require manual invoice receipt reconciliation.</a:t>
-            </a:r>
-          </a:p>
-        </p:txBody>
-      </p:sp>
-      <p:sp>
-        <p:nvSpPr>
-          <p:cNvPr id="8" name="Rounded Rectangle 7"/>
+                  <a:srgbClr val="64748B"/>
+                </a:solidFill>
+                <a:latin typeface="Arial"/>
+              </a:defRPr>
+            </a:pPr>
+            <a:r>
+              <a:t>In-memory fallback guarantees 100% platform uptime during database outages.</a:t>
+            </a:r>
+          </a:p>
+        </p:txBody>
+      </p:sp>
+      <p:sp>
+        <p:nvSpPr>
+          <p:cNvPr id="6" name="Rounded Rectangle 5"/>
           <p:cNvSpPr/>
           <p:nvPr/>
         </p:nvSpPr>
         <p:spPr>
           <a:xfrm>
-            <a:off x="8046720" y="1417320"/>
+            <a:off x="4389120" y="1188720"/>
             <a:ext cx="3328416" cy="4937760"/>
           </a:xfrm>
           <a:prstGeom prst="roundRect">
             <a:avLst/>
           </a:prstGeom>
           <a:solidFill>
-            <a:srgbClr val="262030"/>
+            <a:srgbClr val="F8F9FA"/>
           </a:solidFill>
-          <a:ln w="19050">
+          <a:ln w="12700">
             <a:solidFill>
-              <a:srgbClr val="413750"/>
+              <a:srgbClr val="E2E8F0"/>
             </a:solidFill>
           </a:ln>
         </p:spPr>
@@ -5840,14 +5046,14 @@
       </p:sp>
       <p:sp>
         <p:nvSpPr>
-          <p:cNvPr id="9" name="TextBox 8"/>
+          <p:cNvPr id="7" name="TextBox 6"/>
           <p:cNvSpPr txBox="1"/>
           <p:nvPr/>
         </p:nvSpPr>
         <p:spPr>
           <a:xfrm>
-            <a:off x="8229600" y="1554480"/>
-            <a:ext cx="2962656" cy="4663440"/>
+            <a:off x="4572000" y="1371600"/>
+            <a:ext cx="2962656" cy="4572000"/>
           </a:xfrm>
           <a:prstGeom prst="rect">
             <a:avLst/>
@@ -5862,255 +5068,157 @@
           <a:p>
             <a:pPr>
               <a:spcAft>
-                <a:spcPts val="1000"/>
+                <a:spcPts val="1200"/>
               </a:spcAft>
-              <a:defRPr sz="1300" b="1">
-                <a:solidFill>
-                  <a:srgbClr val="3B82F6"/>
-                </a:solidFill>
-                <a:latin typeface="Arial"/>
-              </a:defRPr>
-            </a:pPr>
-            <a:r>
-              <a:t>FUTURE ENHANCEMENTS</a:t>
+              <a:defRPr sz="1400" b="1">
+                <a:solidFill>
+                  <a:srgbClr val="12261E"/>
+                </a:solidFill>
+                <a:latin typeface="Arial"/>
+              </a:defRPr>
+            </a:pPr>
+            <a:r>
+              <a:t>Disadvantages</a:t>
             </a:r>
           </a:p>
           <a:p>
             <a:pPr>
               <a:defRPr sz="1150" b="1">
                 <a:solidFill>
-                  <a:srgbClr val="FFFFFF"/>
-                </a:solidFill>
-                <a:latin typeface="Arial"/>
-              </a:defRPr>
-            </a:pPr>
-            <a:r>
-              <a:t>🚀 AI Predictive Procurement</a:t>
+                  <a:srgbClr val="12261E"/>
+                </a:solidFill>
+                <a:latin typeface="Arial"/>
+              </a:defRPr>
+            </a:pPr>
+            <a:r>
+              <a:t>• Every trader needs connectivity</a:t>
             </a:r>
           </a:p>
           <a:p>
             <a:pPr>
               <a:spcAft>
-                <a:spcPts val="700"/>
+                <a:spcPts val="800"/>
               </a:spcAft>
               <a:defRPr sz="950">
                 <a:solidFill>
-                  <a:srgbClr val="B9AFC6"/>
-                </a:solidFill>
-                <a:latin typeface="Arial"/>
-              </a:defRPr>
-            </a:pPr>
-            <a:r>
-              <a:t>Machine learning forecasting of mandi price trends and automated Kirana stock replenishment.</a:t>
+                  <a:srgbClr val="64748B"/>
+                </a:solidFill>
+                <a:latin typeface="Arial"/>
+              </a:defRPr>
+            </a:pPr>
+            <a:r>
+              <a:t>Live inventory counts and rate updates require continuous internet access.</a:t>
             </a:r>
           </a:p>
           <a:p>
             <a:pPr>
               <a:defRPr sz="1150" b="1">
                 <a:solidFill>
-                  <a:srgbClr val="FFFFFF"/>
-                </a:solidFill>
-                <a:latin typeface="Arial"/>
-              </a:defRPr>
-            </a:pPr>
-            <a:r>
-              <a:t>🚀 Automated e-Way Bill Integration</a:t>
+                  <a:srgbClr val="12261E"/>
+                </a:solidFill>
+                <a:latin typeface="Arial"/>
+              </a:defRPr>
+            </a:pPr>
+            <a:r>
+              <a:t>• Local geofence boundaries</a:t>
             </a:r>
           </a:p>
           <a:p>
             <a:pPr>
               <a:spcAft>
-                <a:spcPts val="700"/>
+                <a:spcPts val="800"/>
               </a:spcAft>
               <a:defRPr sz="950">
                 <a:solidFill>
-                  <a:srgbClr val="B9AFC6"/>
-                </a:solidFill>
-                <a:latin typeface="Arial"/>
-              </a:defRPr>
-            </a:pPr>
-            <a:r>
-              <a:t>Instant GST e-Way bill and tax invoice generation upon order dispatch.</a:t>
+                  <a:srgbClr val="64748B"/>
+                </a:solidFill>
+                <a:latin typeface="Arial"/>
+              </a:defRPr>
+            </a:pPr>
+            <a:r>
+              <a:t>Logistics radius is currently tailored for localized mandi hubs (&lt;15–20 km).</a:t>
             </a:r>
           </a:p>
           <a:p>
             <a:pPr>
               <a:defRPr sz="1150" b="1">
                 <a:solidFill>
-                  <a:srgbClr val="FFFFFF"/>
-                </a:solidFill>
-                <a:latin typeface="Arial"/>
-              </a:defRPr>
-            </a:pPr>
-            <a:r>
-              <a:t>🚀 Integrated Escrow Gateway</a:t>
+                  <a:srgbClr val="12261E"/>
+                </a:solidFill>
+                <a:latin typeface="Arial"/>
+              </a:defRPr>
+            </a:pPr>
+            <a:r>
+              <a:t>• Self-managed logistics</a:t>
             </a:r>
           </a:p>
           <a:p>
             <a:pPr>
               <a:spcAft>
-                <a:spcPts val="700"/>
+                <a:spcPts val="800"/>
               </a:spcAft>
               <a:defRPr sz="950">
                 <a:solidFill>
-                  <a:srgbClr val="B9AFC6"/>
-                </a:solidFill>
-                <a:latin typeface="Arial"/>
-              </a:defRPr>
-            </a:pPr>
-            <a:r>
-              <a:t>Milestone-based digital payment holding until delivery confirmation by retailer.</a:t>
+                  <a:srgbClr val="64748B"/>
+                </a:solidFill>
+                <a:latin typeface="Arial"/>
+              </a:defRPr>
+            </a:pPr>
+            <a:r>
+              <a:t>Delivery relies on existing local transporter fleets without automated route tracking.</a:t>
             </a:r>
           </a:p>
           <a:p>
             <a:pPr>
               <a:defRPr sz="1150" b="1">
                 <a:solidFill>
-                  <a:srgbClr val="FFFFFF"/>
-                </a:solidFill>
-                <a:latin typeface="Arial"/>
-              </a:defRPr>
-            </a:pPr>
-            <a:r>
-              <a:t>🚀 Vernacular Voice Search</a:t>
+                  <a:srgbClr val="12261E"/>
+                </a:solidFill>
+                <a:latin typeface="Arial"/>
+              </a:defRPr>
+            </a:pPr>
+            <a:r>
+              <a:t>• Single currency ecosystem</a:t>
             </a:r>
           </a:p>
           <a:p>
             <a:pPr>
               <a:spcAft>
-                <a:spcPts val="700"/>
+                <a:spcPts val="800"/>
               </a:spcAft>
               <a:defRPr sz="950">
                 <a:solidFill>
-                  <a:srgbClr val="B9AFC6"/>
-                </a:solidFill>
-                <a:latin typeface="Arial"/>
-              </a:defRPr>
-            </a:pPr>
-            <a:r>
-              <a:t>Multilingual voice search (Hindi, Kannada, Telugu, Marathi) for mandi traders.</a:t>
-            </a:r>
-          </a:p>
-        </p:txBody>
-      </p:sp>
-    </p:spTree>
-  </p:cSld>
-  <p:clrMapOvr>
-    <a:masterClrMapping/>
-  </p:clrMapOvr>
-</p:sld>
-</file>
-
-<file path=ppt/slides/slide5.xml><?xml version="1.0" encoding="utf-8"?>
-<p:sld xmlns:a="http://schemas.openxmlformats.org/drawingml/2006/main" xmlns:p="http://schemas.openxmlformats.org/presentationml/2006/main" xmlns:r="http://schemas.openxmlformats.org/officeDocument/2006/relationships">
-  <p:cSld>
-    <p:bg>
-      <p:bgPr>
-        <a:solidFill>
-          <a:srgbClr val="1A1622"/>
-        </a:solidFill>
-        <a:effectLst/>
-      </p:bgPr>
-    </p:bg>
-    <p:spTree>
-      <p:nvGrpSpPr>
-        <p:cNvPr id="1" name=""/>
-        <p:cNvGrpSpPr/>
-        <p:nvPr/>
-      </p:nvGrpSpPr>
-      <p:grpSpPr/>
-      <p:sp>
-        <p:nvSpPr>
-          <p:cNvPr id="2" name="TextBox 1"/>
-          <p:cNvSpPr txBox="1"/>
+                  <a:srgbClr val="64748B"/>
+                </a:solidFill>
+                <a:latin typeface="Arial"/>
+              </a:defRPr>
+            </a:pPr>
+            <a:r>
+              <a:t>Transactions are optimized exclusively for Indian Rupees (INR) and GSTIN formats.</a:t>
+            </a:r>
+          </a:p>
+        </p:txBody>
+      </p:sp>
+      <p:sp>
+        <p:nvSpPr>
+          <p:cNvPr id="8" name="Rounded Rectangle 7"/>
+          <p:cNvSpPr/>
           <p:nvPr/>
         </p:nvSpPr>
         <p:spPr>
           <a:xfrm>
-            <a:off x="731520" y="365760"/>
-            <a:ext cx="10698480" cy="320040"/>
-          </a:xfrm>
-          <a:prstGeom prst="rect">
-            <a:avLst/>
-          </a:prstGeom>
-          <a:noFill/>
-        </p:spPr>
-        <p:txBody>
-          <a:bodyPr wrap="square">
-            <a:spAutoFit/>
-          </a:bodyPr>
-          <a:lstStyle/>
-          <a:p>
-            <a:pPr>
-              <a:defRPr sz="1100" b="1">
-                <a:solidFill>
-                  <a:srgbClr val="FFA062"/>
-                </a:solidFill>
-                <a:latin typeface="Arial"/>
-              </a:defRPr>
-            </a:pPr>
-            <a:r>
-              <a:t>STOCKLINK CAPSTONE PRESENTATION</a:t>
-            </a:r>
-          </a:p>
-        </p:txBody>
-      </p:sp>
-      <p:sp>
-        <p:nvSpPr>
-          <p:cNvPr id="3" name="TextBox 2"/>
-          <p:cNvSpPr txBox="1"/>
-          <p:nvPr/>
-        </p:nvSpPr>
-        <p:spPr>
-          <a:xfrm>
-            <a:off x="731520" y="685800"/>
-            <a:ext cx="10698480" cy="594360"/>
-          </a:xfrm>
-          <a:prstGeom prst="rect">
-            <a:avLst/>
-          </a:prstGeom>
-          <a:noFill/>
-        </p:spPr>
-        <p:txBody>
-          <a:bodyPr wrap="square">
-            <a:spAutoFit/>
-          </a:bodyPr>
-          <a:lstStyle/>
-          <a:p>
-            <a:pPr>
-              <a:defRPr sz="2400" b="1">
-                <a:solidFill>
-                  <a:srgbClr val="FFFFFF"/>
-                </a:solidFill>
-                <a:latin typeface="Arial"/>
-              </a:defRPr>
-            </a:pPr>
-            <a:r>
-              <a:t>Project Hosting Links &amp; Key Learning Experiences</a:t>
-            </a:r>
-          </a:p>
-        </p:txBody>
-      </p:sp>
-      <p:sp>
-        <p:nvSpPr>
-          <p:cNvPr id="4" name="Rounded Rectangle 3"/>
-          <p:cNvSpPr/>
-          <p:nvPr/>
-        </p:nvSpPr>
-        <p:spPr>
-          <a:xfrm>
-            <a:off x="731520" y="1417320"/>
-            <a:ext cx="5120640" cy="4937760"/>
+            <a:off x="8046720" y="1188720"/>
+            <a:ext cx="3328416" cy="4937760"/>
           </a:xfrm>
           <a:prstGeom prst="roundRect">
             <a:avLst/>
           </a:prstGeom>
           <a:solidFill>
-            <a:srgbClr val="262030"/>
+            <a:srgbClr val="F8F9FA"/>
           </a:solidFill>
-          <a:ln w="19050">
+          <a:ln w="12700">
             <a:solidFill>
-              <a:srgbClr val="413750"/>
+              <a:srgbClr val="E2E8F0"/>
             </a:solidFill>
           </a:ln>
         </p:spPr>
@@ -6138,14 +5246,14 @@
       </p:sp>
       <p:sp>
         <p:nvSpPr>
-          <p:cNvPr id="5" name="TextBox 4"/>
+          <p:cNvPr id="9" name="TextBox 8"/>
           <p:cNvSpPr txBox="1"/>
           <p:nvPr/>
         </p:nvSpPr>
         <p:spPr>
           <a:xfrm>
-            <a:off x="960120" y="1554480"/>
-            <a:ext cx="4663440" cy="4663440"/>
+            <a:off x="8229600" y="1371600"/>
+            <a:ext cx="2962656" cy="4572000"/>
           </a:xfrm>
           <a:prstGeom prst="rect">
             <a:avLst/>
@@ -6160,209 +5268,255 @@
           <a:p>
             <a:pPr>
               <a:spcAft>
-                <a:spcPts val="1000"/>
+                <a:spcPts val="1200"/>
               </a:spcAft>
-              <a:defRPr sz="1300" b="1">
-                <a:solidFill>
-                  <a:srgbClr val="22C55E"/>
-                </a:solidFill>
-                <a:latin typeface="Arial"/>
-              </a:defRPr>
-            </a:pPr>
-            <a:r>
-              <a:t>LIVE CLOUD DEPLOYMENT &amp; REPO</a:t>
-            </a:r>
-          </a:p>
-          <a:p>
-            <a:pPr>
-              <a:defRPr sz="1100" b="1">
-                <a:solidFill>
-                  <a:srgbClr val="FFFFFF"/>
-                </a:solidFill>
-                <a:latin typeface="Arial"/>
-              </a:defRPr>
-            </a:pPr>
-            <a:r>
-              <a:t>🔗 Live Web Application (Frontend)</a:t>
-            </a:r>
-          </a:p>
-          <a:p>
-            <a:pPr>
-              <a:defRPr sz="1000" b="1">
-                <a:solidFill>
-                  <a:srgbClr val="FFA062"/>
-                </a:solidFill>
-                <a:latin typeface="Arial"/>
-              </a:defRPr>
-            </a:pPr>
-            <a:r>
-              <a:t>https://fft-capstone-project.vercel.app</a:t>
+              <a:defRPr sz="1400" b="1">
+                <a:solidFill>
+                  <a:srgbClr val="12261E"/>
+                </a:solidFill>
+                <a:latin typeface="Arial"/>
+              </a:defRPr>
+            </a:pPr>
+            <a:r>
+              <a:t>Future enhancements</a:t>
+            </a:r>
+          </a:p>
+          <a:p>
+            <a:pPr>
+              <a:defRPr sz="1150" b="1">
+                <a:solidFill>
+                  <a:srgbClr val="12261E"/>
+                </a:solidFill>
+                <a:latin typeface="Arial"/>
+              </a:defRPr>
+            </a:pPr>
+            <a:r>
+              <a:t>• AI predictive procurement</a:t>
             </a:r>
           </a:p>
           <a:p>
             <a:pPr>
               <a:spcAft>
-                <a:spcPts val="700"/>
+                <a:spcPts val="800"/>
               </a:spcAft>
-              <a:defRPr sz="900">
-                <a:solidFill>
-                  <a:srgbClr val="B9AFC6"/>
-                </a:solidFill>
-                <a:latin typeface="Arial"/>
-              </a:defRPr>
-            </a:pPr>
-            <a:r>
-              <a:t>Deployed globally on Vercel Edge Network with client SPA rewrite protections.</a:t>
-            </a:r>
-          </a:p>
-          <a:p>
-            <a:pPr>
-              <a:defRPr sz="1100" b="1">
-                <a:solidFill>
-                  <a:srgbClr val="FFFFFF"/>
-                </a:solidFill>
-                <a:latin typeface="Arial"/>
-              </a:defRPr>
-            </a:pPr>
-            <a:r>
-              <a:t>🔗 Backend REST API Service</a:t>
-            </a:r>
-          </a:p>
-          <a:p>
-            <a:pPr>
-              <a:defRPr sz="1000" b="1">
-                <a:solidFill>
-                  <a:srgbClr val="FFA062"/>
-                </a:solidFill>
-                <a:latin typeface="Arial"/>
-              </a:defRPr>
-            </a:pPr>
-            <a:r>
-              <a:t>https://fft-capstone-project.onrender.com/api/health</a:t>
+              <a:defRPr sz="950">
+                <a:solidFill>
+                  <a:srgbClr val="64748B"/>
+                </a:solidFill>
+                <a:latin typeface="Arial"/>
+              </a:defRPr>
+            </a:pPr>
+            <a:r>
+              <a:t>ML forecasting of mandi price trends and automated Kirana stock replenishment.</a:t>
+            </a:r>
+          </a:p>
+          <a:p>
+            <a:pPr>
+              <a:defRPr sz="1150" b="1">
+                <a:solidFill>
+                  <a:srgbClr val="12261E"/>
+                </a:solidFill>
+                <a:latin typeface="Arial"/>
+              </a:defRPr>
+            </a:pPr>
+            <a:r>
+              <a:t>• Automated e-Way bills</a:t>
             </a:r>
           </a:p>
           <a:p>
             <a:pPr>
               <a:spcAft>
-                <a:spcPts val="700"/>
+                <a:spcPts val="800"/>
               </a:spcAft>
-              <a:defRPr sz="900">
-                <a:solidFill>
-                  <a:srgbClr val="B9AFC6"/>
-                </a:solidFill>
-                <a:latin typeface="Arial"/>
-              </a:defRPr>
-            </a:pPr>
-            <a:r>
-              <a:t>Live Node.js Express server running on Render with active health monitoring.</a:t>
-            </a:r>
-          </a:p>
-          <a:p>
-            <a:pPr>
-              <a:defRPr sz="1100" b="1">
-                <a:solidFill>
-                  <a:srgbClr val="FFFFFF"/>
-                </a:solidFill>
-                <a:latin typeface="Arial"/>
-              </a:defRPr>
-            </a:pPr>
-            <a:r>
-              <a:t>🔗 GitHub Monorepo Repository</a:t>
-            </a:r>
-          </a:p>
-          <a:p>
-            <a:pPr>
-              <a:defRPr sz="1000" b="1">
-                <a:solidFill>
-                  <a:srgbClr val="FFA062"/>
-                </a:solidFill>
-                <a:latin typeface="Arial"/>
-              </a:defRPr>
-            </a:pPr>
-            <a:r>
-              <a:t>https://github.com/PraweenRawat/FFT_CAPSTONE_PROJECT</a:t>
+              <a:defRPr sz="950">
+                <a:solidFill>
+                  <a:srgbClr val="64748B"/>
+                </a:solidFill>
+                <a:latin typeface="Arial"/>
+              </a:defRPr>
+            </a:pPr>
+            <a:r>
+              <a:t>Instant GST e-Way bill and tax invoice generation upon order dispatch.</a:t>
+            </a:r>
+          </a:p>
+          <a:p>
+            <a:pPr>
+              <a:defRPr sz="1150" b="1">
+                <a:solidFill>
+                  <a:srgbClr val="12261E"/>
+                </a:solidFill>
+                <a:latin typeface="Arial"/>
+              </a:defRPr>
+            </a:pPr>
+            <a:r>
+              <a:t>• Integrated escrow gateway</a:t>
             </a:r>
           </a:p>
           <a:p>
             <a:pPr>
               <a:spcAft>
-                <a:spcPts val="700"/>
+                <a:spcPts val="800"/>
               </a:spcAft>
-              <a:defRPr sz="900">
-                <a:solidFill>
-                  <a:srgbClr val="B9AFC6"/>
-                </a:solidFill>
-                <a:latin typeface="Arial"/>
-              </a:defRPr>
-            </a:pPr>
-            <a:r>
-              <a:t>Complete source code, git version history, models, routes &amp; test suites.</a:t>
-            </a:r>
-          </a:p>
-          <a:p>
-            <a:pPr>
-              <a:defRPr sz="1100" b="1">
-                <a:solidFill>
-                  <a:srgbClr val="FFFFFF"/>
-                </a:solidFill>
-                <a:latin typeface="Arial"/>
-              </a:defRPr>
-            </a:pPr>
-            <a:r>
-              <a:t>🔗 Pre-configured Demo Accounts</a:t>
-            </a:r>
-          </a:p>
-          <a:p>
-            <a:pPr>
-              <a:defRPr sz="1000" b="1">
-                <a:solidFill>
-                  <a:srgbClr val="FFA062"/>
-                </a:solidFill>
-                <a:latin typeface="Arial"/>
-              </a:defRPr>
-            </a:pPr>
-            <a:r>
-              <a:t>Retailer: retailer@stocklink.in | Wholesaler: wholesaler@stocklink.in</a:t>
+              <a:defRPr sz="950">
+                <a:solidFill>
+                  <a:srgbClr val="64748B"/>
+                </a:solidFill>
+                <a:latin typeface="Arial"/>
+              </a:defRPr>
+            </a:pPr>
+            <a:r>
+              <a:t>Milestone-based digital payment holding until delivery confirmation by retailer.</a:t>
+            </a:r>
+          </a:p>
+          <a:p>
+            <a:pPr>
+              <a:defRPr sz="1150" b="1">
+                <a:solidFill>
+                  <a:srgbClr val="12261E"/>
+                </a:solidFill>
+                <a:latin typeface="Arial"/>
+              </a:defRPr>
+            </a:pPr>
+            <a:r>
+              <a:t>• Vernacular voice search</a:t>
             </a:r>
           </a:p>
           <a:p>
             <a:pPr>
               <a:spcAft>
-                <a:spcPts val="700"/>
+                <a:spcPts val="800"/>
               </a:spcAft>
-              <a:defRPr sz="900">
-                <a:solidFill>
-                  <a:srgbClr val="B9AFC6"/>
-                </a:solidFill>
-                <a:latin typeface="Arial"/>
-              </a:defRPr>
-            </a:pPr>
-            <a:r>
-              <a:t>Enables instant role-based evaluation without manual registration.</a:t>
-            </a:r>
-          </a:p>
-        </p:txBody>
-      </p:sp>
-      <p:sp>
-        <p:nvSpPr>
-          <p:cNvPr id="6" name="Rounded Rectangle 5"/>
+              <a:defRPr sz="950">
+                <a:solidFill>
+                  <a:srgbClr val="64748B"/>
+                </a:solidFill>
+                <a:latin typeface="Arial"/>
+              </a:defRPr>
+            </a:pPr>
+            <a:r>
+              <a:t>Multilingual voice search (Hindi, Kannada, Telugu, Marathi) for local mandi traders.</a:t>
+            </a:r>
+          </a:p>
+        </p:txBody>
+      </p:sp>
+    </p:spTree>
+  </p:cSld>
+  <p:clrMapOvr>
+    <a:masterClrMapping/>
+  </p:clrMapOvr>
+</p:sld>
+</file>
+
+<file path=ppt/slides/slide5.xml><?xml version="1.0" encoding="utf-8"?>
+<p:sld xmlns:a="http://schemas.openxmlformats.org/drawingml/2006/main" xmlns:p="http://schemas.openxmlformats.org/presentationml/2006/main" xmlns:r="http://schemas.openxmlformats.org/officeDocument/2006/relationships">
+  <p:cSld>
+    <p:bg>
+      <p:bgPr>
+        <a:solidFill>
+          <a:srgbClr val="FFFFFF"/>
+        </a:solidFill>
+        <a:effectLst/>
+      </p:bgPr>
+    </p:bg>
+    <p:spTree>
+      <p:nvGrpSpPr>
+        <p:cNvPr id="1" name=""/>
+        <p:cNvGrpSpPr/>
+        <p:nvPr/>
+      </p:nvGrpSpPr>
+      <p:grpSpPr/>
+      <p:sp>
+        <p:nvSpPr>
+          <p:cNvPr id="2" name="TextBox 1"/>
+          <p:cNvSpPr txBox="1"/>
+          <p:nvPr/>
+        </p:nvSpPr>
+        <p:spPr>
+          <a:xfrm>
+            <a:off x="731520" y="365760"/>
+            <a:ext cx="10698480" cy="731520"/>
+          </a:xfrm>
+          <a:prstGeom prst="rect">
+            <a:avLst/>
+          </a:prstGeom>
+          <a:noFill/>
+        </p:spPr>
+        <p:txBody>
+          <a:bodyPr wrap="square">
+            <a:spAutoFit/>
+          </a:bodyPr>
+          <a:lstStyle/>
+          <a:p>
+            <a:pPr>
+              <a:defRPr sz="2400" b="1">
+                <a:solidFill>
+                  <a:srgbClr val="12261E"/>
+                </a:solidFill>
+                <a:latin typeface="Arial"/>
+              </a:defRPr>
+            </a:pPr>
+            <a:r>
+              <a:t>Hosting link &amp; our learning experience</a:t>
+            </a:r>
+          </a:p>
+        </p:txBody>
+      </p:sp>
+      <p:sp>
+        <p:nvSpPr>
+          <p:cNvPr id="3" name="TextBox 2"/>
+          <p:cNvSpPr txBox="1"/>
+          <p:nvPr/>
+        </p:nvSpPr>
+        <p:spPr>
+          <a:xfrm>
+            <a:off x="11155680" y="6217920"/>
+            <a:ext cx="731520" cy="365760"/>
+          </a:xfrm>
+          <a:prstGeom prst="rect">
+            <a:avLst/>
+          </a:prstGeom>
+          <a:noFill/>
+        </p:spPr>
+        <p:txBody>
+          <a:bodyPr wrap="none">
+            <a:spAutoFit/>
+          </a:bodyPr>
+          <a:lstStyle/>
+          <a:p>
+            <a:pPr>
+              <a:defRPr sz="1400" b="1">
+                <a:solidFill>
+                  <a:srgbClr val="64748B"/>
+                </a:solidFill>
+                <a:latin typeface="Arial"/>
+              </a:defRPr>
+            </a:pPr>
+            <a:r>
+              <a:t>5</a:t>
+            </a:r>
+          </a:p>
+        </p:txBody>
+      </p:sp>
+      <p:sp>
+        <p:nvSpPr>
+          <p:cNvPr id="4" name="Rounded Rectangle 3"/>
           <p:cNvSpPr/>
           <p:nvPr/>
         </p:nvSpPr>
         <p:spPr>
           <a:xfrm>
-            <a:off x="6217920" y="1417320"/>
-            <a:ext cx="5212080" cy="4937760"/>
+            <a:off x="731520" y="1188720"/>
+            <a:ext cx="4114800" cy="4937760"/>
           </a:xfrm>
           <a:prstGeom prst="roundRect">
             <a:avLst/>
           </a:prstGeom>
           <a:solidFill>
-            <a:srgbClr val="262030"/>
+            <a:srgbClr val="F8F9FA"/>
           </a:solidFill>
-          <a:ln w="19050">
+          <a:ln w="12700">
             <a:solidFill>
-              <a:srgbClr val="413750"/>
+              <a:srgbClr val="E2E8F0"/>
             </a:solidFill>
           </a:ln>
         </p:spPr>
@@ -6390,14 +5544,14 @@
       </p:sp>
       <p:sp>
         <p:nvSpPr>
-          <p:cNvPr id="7" name="TextBox 6"/>
+          <p:cNvPr id="5" name="TextBox 4"/>
           <p:cNvSpPr txBox="1"/>
           <p:nvPr/>
         </p:nvSpPr>
         <p:spPr>
           <a:xfrm>
-            <a:off x="6446520" y="1554480"/>
-            <a:ext cx="4754880" cy="4663440"/>
+            <a:off x="914400" y="1325880"/>
+            <a:ext cx="3749039" cy="4663440"/>
           </a:xfrm>
           <a:prstGeom prst="rect">
             <a:avLst/>
@@ -6411,163 +5565,278 @@
           <a:lstStyle/>
           <a:p>
             <a:pPr>
+              <a:defRPr sz="1100" b="1">
+                <a:solidFill>
+                  <a:srgbClr val="64748B"/>
+                </a:solidFill>
+                <a:latin typeface="Arial"/>
+              </a:defRPr>
+            </a:pPr>
+            <a:r>
+              <a:t>LIVE AT</a:t>
+            </a:r>
+          </a:p>
+          <a:p>
+            <a:pPr>
               <a:spcAft>
-                <a:spcPts val="1000"/>
+                <a:spcPts val="800"/>
               </a:spcAft>
-              <a:defRPr sz="1300" b="1">
-                <a:solidFill>
-                  <a:srgbClr val="FFA062"/>
-                </a:solidFill>
-                <a:latin typeface="Arial"/>
-              </a:defRPr>
-            </a:pPr>
-            <a:r>
-              <a:t>KEY LEARNING EXPERIENCES IN THIS SUBJECT</a:t>
-            </a:r>
-          </a:p>
+              <a:defRPr sz="1400" b="1">
+                <a:solidFill>
+                  <a:srgbClr val="12261E"/>
+                </a:solidFill>
+                <a:latin typeface="Arial"/>
+              </a:defRPr>
+            </a:pPr>
+            <a:r>
+              <a:t>fft-capstone-project.vercel.app</a:t>
+            </a:r>
+          </a:p>
+        </p:txBody>
+      </p:sp>
+      <p:pic>
+        <p:nvPicPr>
+          <p:cNvPr id="6" name="Picture 5" descr="stocklink_qr.png"/>
+          <p:cNvPicPr>
+            <a:picLocks noChangeAspect="1"/>
+          </p:cNvPicPr>
+          <p:nvPr/>
+        </p:nvPicPr>
+        <p:blipFill>
+          <a:blip r:embed="rId2"/>
+          <a:stretch>
+            <a:fillRect/>
+          </a:stretch>
+        </p:blipFill>
+        <p:spPr>
+          <a:xfrm>
+            <a:off x="1463040" y="2148840"/>
+            <a:ext cx="2468880" cy="2468880"/>
+          </a:xfrm>
+          <a:prstGeom prst="rect">
+            <a:avLst/>
+          </a:prstGeom>
+        </p:spPr>
+      </p:pic>
+      <p:sp>
+        <p:nvSpPr>
+          <p:cNvPr id="7" name="TextBox 6"/>
+          <p:cNvSpPr txBox="1"/>
+          <p:nvPr/>
+        </p:nvSpPr>
+        <p:spPr>
+          <a:xfrm>
+            <a:off x="914400" y="4709160"/>
+            <a:ext cx="3749039" cy="1280160"/>
+          </a:xfrm>
+          <a:prstGeom prst="rect">
+            <a:avLst/>
+          </a:prstGeom>
+          <a:noFill/>
+        </p:spPr>
+        <p:txBody>
+          <a:bodyPr wrap="square">
+            <a:spAutoFit/>
+          </a:bodyPr>
+          <a:lstStyle/>
           <a:p>
             <a:pPr>
               <a:defRPr sz="1100" b="1">
                 <a:solidFill>
-                  <a:srgbClr val="FFFFFF"/>
-                </a:solidFill>
-                <a:latin typeface="Arial"/>
-              </a:defRPr>
-            </a:pPr>
-            <a:r>
-              <a:t>💡 Full-Stack Systems Architecture</a:t>
-            </a:r>
-          </a:p>
+                  <a:srgbClr val="12261E"/>
+                </a:solidFill>
+                <a:latin typeface="Arial"/>
+              </a:defRPr>
+            </a:pPr>
+            <a:r>
+              <a:t>Scan to try it</a:t>
+            </a:r>
+          </a:p>
+          <a:p>
+            <a:pPr>
+              <a:spcBef>
+                <a:spcPts val="200"/>
+              </a:spcBef>
+              <a:defRPr sz="950">
+                <a:solidFill>
+                  <a:srgbClr val="64748B"/>
+                </a:solidFill>
+                <a:latin typeface="Arial"/>
+              </a:defRPr>
+            </a:pPr>
+            <a:r>
+              <a:t>Join as a retailer or sign in as a wholesaler with pre-configured demo credentials.</a:t>
+            </a:r>
+          </a:p>
+          <a:p>
+            <a:pPr>
+              <a:spcBef>
+                <a:spcPts val="200"/>
+              </a:spcBef>
+              <a:defRPr sz="850">
+                <a:solidFill>
+                  <a:srgbClr val="64748B"/>
+                </a:solidFill>
+                <a:latin typeface="Arial"/>
+              </a:defRPr>
+            </a:pPr>
+            <a:r>
+              <a:t>Runs on Vercel Edge Network (frontend) and Render Cloud Web Service (Node.js backend).</a:t>
+            </a:r>
+          </a:p>
+        </p:txBody>
+      </p:sp>
+      <p:sp>
+        <p:nvSpPr>
+          <p:cNvPr id="8" name="TextBox 7"/>
+          <p:cNvSpPr txBox="1"/>
+          <p:nvPr/>
+        </p:nvSpPr>
+        <p:spPr>
+          <a:xfrm>
+            <a:off x="5212080" y="1188720"/>
+            <a:ext cx="6217920" cy="4572000"/>
+          </a:xfrm>
+          <a:prstGeom prst="rect">
+            <a:avLst/>
+          </a:prstGeom>
+          <a:noFill/>
+        </p:spPr>
+        <p:txBody>
+          <a:bodyPr wrap="square">
+            <a:spAutoFit/>
+          </a:bodyPr>
+          <a:lstStyle/>
           <a:p>
             <a:pPr>
               <a:spcAft>
-                <a:spcPts val="500"/>
+                <a:spcPts val="800"/>
               </a:spcAft>
-              <a:defRPr sz="950">
-                <a:solidFill>
-                  <a:srgbClr val="E1DAEB"/>
-                </a:solidFill>
-                <a:latin typeface="Arial"/>
-              </a:defRPr>
-            </a:pPr>
-            <a:r>
-              <a:t>Mastered connecting decoupled React Vite frontends with Express microservices using dynamic environment variables and CORS policies.</a:t>
-            </a:r>
-          </a:p>
-          <a:p>
-            <a:pPr>
               <a:defRPr sz="1100" b="1">
                 <a:solidFill>
-                  <a:srgbClr val="FFFFFF"/>
-                </a:solidFill>
-                <a:latin typeface="Arial"/>
-              </a:defRPr>
-            </a:pPr>
-            <a:r>
-              <a:t>💡 Enterprise-Grade Security (RBAC)</a:t>
+                  <a:srgbClr val="64748B"/>
+                </a:solidFill>
+                <a:latin typeface="Arial"/>
+              </a:defRPr>
+            </a:pPr>
+            <a:r>
+              <a:t>WHAT WE LEARNED</a:t>
             </a:r>
           </a:p>
           <a:p>
             <a:pPr>
               <a:spcAft>
-                <a:spcPts val="500"/>
+                <a:spcPts val="800"/>
               </a:spcAft>
-              <a:defRPr sz="950">
-                <a:solidFill>
-                  <a:srgbClr val="E1DAEB"/>
-                </a:solidFill>
-                <a:latin typeface="Arial"/>
-              </a:defRPr>
-            </a:pPr>
-            <a:r>
-              <a:t>Implemented stateless JSON Web Tokens, bcrypt password hashing, and server-side authorization guards preventing identity spoofing.</a:t>
-            </a:r>
-          </a:p>
-          <a:p>
-            <a:pPr>
-              <a:defRPr sz="1100" b="1">
-                <a:solidFill>
-                  <a:srgbClr val="FFFFFF"/>
-                </a:solidFill>
-                <a:latin typeface="Arial"/>
-              </a:defRPr>
-            </a:pPr>
-            <a:r>
-              <a:t>💡 Data Persistence &amp; Graceful Degradation</a:t>
+              <a:defRPr sz="1150">
+                <a:solidFill>
+                  <a:srgbClr val="12261E"/>
+                </a:solidFill>
+                <a:latin typeface="Arial"/>
+              </a:defRPr>
+            </a:pPr>
+            <a:r>
+              <a:t>1   Thinking in components: A real React 18 application with hooks, client routing and reactive cart state.</a:t>
             </a:r>
           </a:p>
           <a:p>
             <a:pPr>
               <a:spcAft>
-                <a:spcPts val="500"/>
+                <a:spcPts val="800"/>
               </a:spcAft>
-              <a:defRPr sz="950">
-                <a:solidFill>
-                  <a:srgbClr val="E1DAEB"/>
-                </a:solidFill>
-                <a:latin typeface="Arial"/>
-              </a:defRPr>
-            </a:pPr>
-            <a:r>
-              <a:t>Engineered resilient multi-tier data persistence that seamlessly balances live MongoDB Atlas connections with in-memory stores.</a:t>
-            </a:r>
-          </a:p>
-          <a:p>
-            <a:pPr>
-              <a:defRPr sz="1100" b="1">
-                <a:solidFill>
-                  <a:srgbClr val="FFFFFF"/>
-                </a:solidFill>
-                <a:latin typeface="Arial"/>
-              </a:defRPr>
-            </a:pPr>
-            <a:r>
-              <a:t>💡 Production Cloud DevOps</a:t>
+              <a:defRPr sz="1150">
+                <a:solidFill>
+                  <a:srgbClr val="12261E"/>
+                </a:solidFill>
+                <a:latin typeface="Arial"/>
+              </a:defRPr>
+            </a:pPr>
+            <a:r>
+              <a:t>2   Full-stack API orchestration: Live sync with Express REST APIs, centralized controllers and CORS rules.</a:t>
             </a:r>
           </a:p>
           <a:p>
             <a:pPr>
               <a:spcAft>
-                <a:spcPts val="500"/>
+                <a:spcPts val="800"/>
               </a:spcAft>
-              <a:defRPr sz="950">
-                <a:solidFill>
-                  <a:srgbClr val="E1DAEB"/>
-                </a:solidFill>
-                <a:latin typeface="Arial"/>
-              </a:defRPr>
-            </a:pPr>
-            <a:r>
-              <a:t>Acquired hands-on mastery of production CI/CD pipelines, edge rewrites, zero-downtime cloud deployments, and automated testing.</a:t>
-            </a:r>
-          </a:p>
-          <a:p>
-            <a:pPr>
-              <a:defRPr sz="1100" b="1">
-                <a:solidFill>
-                  <a:srgbClr val="FFFFFF"/>
-                </a:solidFill>
-                <a:latin typeface="Arial"/>
-              </a:defRPr>
-            </a:pPr>
-            <a:r>
-              <a:t>💡 Agile Teamwork &amp; Collaboration</a:t>
+              <a:defRPr sz="1150">
+                <a:solidFill>
+                  <a:srgbClr val="12261E"/>
+                </a:solidFill>
+                <a:latin typeface="Arial"/>
+              </a:defRPr>
+            </a:pPr>
+            <a:r>
+              <a:t>3   Role-based security &amp; RBAC: Stateless JWT authorization, password hashing with bcryptjs, and route protection.</a:t>
             </a:r>
           </a:p>
           <a:p>
             <a:pPr>
               <a:spcAft>
-                <a:spcPts val="500"/>
+                <a:spcPts val="800"/>
               </a:spcAft>
-              <a:defRPr sz="950">
-                <a:solidFill>
-                  <a:srgbClr val="E1DAEB"/>
-                </a:solidFill>
-                <a:latin typeface="Arial"/>
-              </a:defRPr>
-            </a:pPr>
-            <a:r>
-              <a:t>Coordinated 4-member pair programming, Git monorepo branching, and clear interface contracts across Frontend and Backend teams.</a:t>
+              <a:defRPr sz="1150">
+                <a:solidFill>
+                  <a:srgbClr val="12261E"/>
+                </a:solidFill>
+                <a:latin typeface="Arial"/>
+              </a:defRPr>
+            </a:pPr>
+            <a:r>
+              <a:t>4   Resilient data persistence: Designing multi-tier storage with MongoDB Mongoose schemas and an automatic in-memory fallback.</a:t>
+            </a:r>
+          </a:p>
+          <a:p>
+            <a:pPr>
+              <a:spcAft>
+                <a:spcPts val="800"/>
+              </a:spcAft>
+              <a:defRPr sz="1150">
+                <a:solidFill>
+                  <a:srgbClr val="12261E"/>
+                </a:solidFill>
+                <a:latin typeface="Arial"/>
+              </a:defRPr>
+            </a:pPr>
+            <a:r>
+              <a:t>5   Shipping production software: Configuring edge CDN routing, SPA rewrites, automated test suites and zero-downtime cloud hosting.</a:t>
+            </a:r>
+          </a:p>
+        </p:txBody>
+      </p:sp>
+      <p:sp>
+        <p:nvSpPr>
+          <p:cNvPr id="9" name="TextBox 8"/>
+          <p:cNvSpPr txBox="1"/>
+          <p:nvPr/>
+        </p:nvSpPr>
+        <p:spPr>
+          <a:xfrm>
+            <a:off x="5212080" y="5897880"/>
+            <a:ext cx="6217920" cy="365760"/>
+          </a:xfrm>
+          <a:prstGeom prst="rect">
+            <a:avLst/>
+          </a:prstGeom>
+          <a:noFill/>
+        </p:spPr>
+        <p:txBody>
+          <a:bodyPr wrap="none">
+            <a:spAutoFit/>
+          </a:bodyPr>
+          <a:lstStyle/>
+          <a:p>
+            <a:pPr>
+              <a:defRPr sz="1200" b="1">
+                <a:solidFill>
+                  <a:srgbClr val="12261E"/>
+                </a:solidFill>
+                <a:latin typeface="Arial"/>
+              </a:defRPr>
+            </a:pPr>
+            <a:r>
+              <a:t>Thank you   ·   Questions?</a:t>
             </a:r>
           </a:p>
         </p:txBody>
